--- a/datos/Resumen_tiempos_convenios_BS.pptx
+++ b/datos/Resumen_tiempos_convenios_BS.pptx
@@ -820,8 +820,8 @@
         </p:nvSpPr>
         <p:spPr>
           <a:xfrm>
-            <a:off x="640000" y="1450000"/>
-            <a:ext cx="10900000" cy="4600000"/>
+            <a:off x="640000" y="1330000"/>
+            <a:ext cx="10900000" cy="4900000"/>
           </a:xfrm>
           <a:prstGeom prst="rect">
             <a:avLst/>
@@ -837,13 +837,139 @@
               <a:buNone/>
             </a:pPr>
             <a:r>
-              <a:rPr lang="es-PE" sz="1500" dirty="0">
+              <a:rPr lang="es-PE" sz="1400" dirty="0">
                 <a:solidFill>
                   <a:srgbClr val="022300"/>
                 </a:solidFill>
                 <a:latin typeface="Calibri"/>
               </a:rPr>
               <a:t>Distribucion de los 246 convenios por tiempo de traslado terrestre (auto particular):</a:t>
+            </a:r>
+            <a:endParaRPr lang="es-PE" sz="1400"/>
+          </a:p>
+          <a:p>
+            <a:pPr marL="0" lvl="0">
+              <a:buFont typeface="Arial"/>
+              <a:buChar char="•"/>
+            </a:pPr>
+            <a:r>
+              <a:rPr lang="es-PE" sz="1400" dirty="0">
+                <a:solidFill>
+                  <a:srgbClr val="022300"/>
+                </a:solidFill>
+                <a:latin typeface="Calibri"/>
+              </a:rPr>
+              <a:t>Hasta 1 h ............ 183</a:t>
+            </a:r>
+            <a:endParaRPr lang="es-PE" sz="1400"/>
+          </a:p>
+          <a:p>
+            <a:pPr marL="0" lvl="0">
+              <a:buFont typeface="Arial"/>
+              <a:buChar char="•"/>
+            </a:pPr>
+            <a:r>
+              <a:rPr lang="es-PE" sz="1400" dirty="0">
+                <a:solidFill>
+                  <a:srgbClr val="022300"/>
+                </a:solidFill>
+                <a:latin typeface="Calibri"/>
+              </a:rPr>
+              <a:t>1 a 3 h .............. 39</a:t>
+            </a:r>
+            <a:endParaRPr lang="es-PE" sz="1400"/>
+          </a:p>
+          <a:p>
+            <a:pPr marL="0" lvl="0">
+              <a:buFont typeface="Arial"/>
+              <a:buChar char="•"/>
+            </a:pPr>
+            <a:r>
+              <a:rPr lang="es-PE" sz="1400" dirty="0">
+                <a:solidFill>
+                  <a:srgbClr val="022300"/>
+                </a:solidFill>
+                <a:latin typeface="Calibri"/>
+              </a:rPr>
+              <a:t>3 a 6 h .............. 12</a:t>
+            </a:r>
+            <a:endParaRPr lang="es-PE" sz="1400"/>
+          </a:p>
+          <a:p>
+            <a:pPr marL="0" lvl="0">
+              <a:buFont typeface="Arial"/>
+              <a:buChar char="•"/>
+            </a:pPr>
+            <a:r>
+              <a:rPr lang="es-PE" sz="1400" dirty="0">
+                <a:solidFill>
+                  <a:srgbClr val="022300"/>
+                </a:solidFill>
+                <a:latin typeface="Calibri"/>
+              </a:rPr>
+              <a:t>6 a 12 h ............. 5</a:t>
+            </a:r>
+            <a:endParaRPr lang="es-PE" sz="1400"/>
+          </a:p>
+          <a:p>
+            <a:pPr marL="0" lvl="0">
+              <a:buFont typeface="Arial"/>
+              <a:buChar char="•"/>
+            </a:pPr>
+            <a:r>
+              <a:rPr lang="es-PE" sz="1400" dirty="0">
+                <a:solidFill>
+                  <a:srgbClr val="022300"/>
+                </a:solidFill>
+                <a:latin typeface="Calibri"/>
+              </a:rPr>
+              <a:t>12 a 24 h ............ 5</a:t>
+            </a:r>
+            <a:endParaRPr lang="es-PE" sz="1400"/>
+          </a:p>
+          <a:p>
+            <a:pPr marL="0" lvl="0">
+              <a:buFont typeface="Arial"/>
+              <a:buChar char="•"/>
+            </a:pPr>
+            <a:r>
+              <a:rPr lang="es-PE" sz="1400" dirty="0">
+                <a:solidFill>
+                  <a:srgbClr val="B03A2E"/>
+                </a:solidFill>
+                <a:latin typeface="Calibri"/>
+              </a:rPr>
+              <a:t>Mas de 24 h ......... 2</a:t>
+            </a:r>
+            <a:endParaRPr lang="es-PE" sz="1400"/>
+          </a:p>
+          <a:p>
+            <a:pPr marL="0" lvl="0">
+              <a:buNone/>
+            </a:pPr>
+            <a:r>
+              <a:rPr lang="es-PE" sz="1300" dirty="0">
+                <a:solidFill>
+                  <a:srgbClr val="7A8699"/>
+                </a:solidFill>
+                <a:latin typeface="Calibri"/>
+              </a:rPr>
+              <a:t>Conjunto completo (246 convenios): mediana 0 h 25 min, media 1 h 42 min.</a:t>
+            </a:r>
+            <a:endParaRPr lang="es-PE" sz="1300"/>
+          </a:p>
+          <a:p>
+            <a:pPr marL="0" lvl="0">
+              <a:buNone/>
+            </a:pPr>
+            <a:r>
+              <a:rPr lang="es-PE" sz="1500" b="1" dirty="0">
+                <a:solidFill>
+                  <a:srgbClr val="1F2A44"/>
+                </a:solidFill>
+                <a:latin typeface="Calibri"/>
+              </a:rPr>
+              <a:t>IPRESS con traslado terrestre mayor a 1 h: 63 convenios (26 % del total).</a:t>
             </a:r>
             <a:endParaRPr lang="es-PE" sz="1500"/>
           </a:p>
@@ -859,87 +985,7 @@
                 </a:solidFill>
                 <a:latin typeface="Calibri"/>
               </a:rPr>
-              <a:t>Hasta 1 h ............ 183</a:t>
-            </a:r>
-            <a:endParaRPr lang="es-PE" sz="1500"/>
-          </a:p>
-          <a:p>
-            <a:pPr marL="0" lvl="0">
-              <a:buFont typeface="Arial"/>
-              <a:buChar char="•"/>
-            </a:pPr>
-            <a:r>
-              <a:rPr lang="es-PE" sz="1500" dirty="0">
-                <a:solidFill>
-                  <a:srgbClr val="022300"/>
-                </a:solidFill>
-                <a:latin typeface="Calibri"/>
-              </a:rPr>
-              <a:t>1 a 3 h .............. 39</a:t>
-            </a:r>
-            <a:endParaRPr lang="es-PE" sz="1500"/>
-          </a:p>
-          <a:p>
-            <a:pPr marL="0" lvl="0">
-              <a:buFont typeface="Arial"/>
-              <a:buChar char="•"/>
-            </a:pPr>
-            <a:r>
-              <a:rPr lang="es-PE" sz="1500" dirty="0">
-                <a:solidFill>
-                  <a:srgbClr val="022300"/>
-                </a:solidFill>
-                <a:latin typeface="Calibri"/>
-              </a:rPr>
-              <a:t>3 a 6 h .............. 12</a:t>
-            </a:r>
-            <a:endParaRPr lang="es-PE" sz="1500"/>
-          </a:p>
-          <a:p>
-            <a:pPr marL="0" lvl="0">
-              <a:buFont typeface="Arial"/>
-              <a:buChar char="•"/>
-            </a:pPr>
-            <a:r>
-              <a:rPr lang="es-PE" sz="1500" dirty="0">
-                <a:solidFill>
-                  <a:srgbClr val="022300"/>
-                </a:solidFill>
-                <a:latin typeface="Calibri"/>
-              </a:rPr>
-              <a:t>6 a 12 h ............. 5</a:t>
-            </a:r>
-            <a:endParaRPr lang="es-PE" sz="1500"/>
-          </a:p>
-          <a:p>
-            <a:pPr marL="0" lvl="0">
-              <a:buFont typeface="Arial"/>
-              <a:buChar char="•"/>
-            </a:pPr>
-            <a:r>
-              <a:rPr lang="es-PE" sz="1500" dirty="0">
-                <a:solidFill>
-                  <a:srgbClr val="022300"/>
-                </a:solidFill>
-                <a:latin typeface="Calibri"/>
-              </a:rPr>
-              <a:t>12 a 24 h ............ 5</a:t>
-            </a:r>
-            <a:endParaRPr lang="es-PE" sz="1500"/>
-          </a:p>
-          <a:p>
-            <a:pPr marL="0" lvl="0">
-              <a:buFont typeface="Arial"/>
-              <a:buChar char="•"/>
-            </a:pPr>
-            <a:r>
-              <a:rPr lang="es-PE" sz="1500" dirty="0">
-                <a:solidFill>
-                  <a:srgbClr val="B03A2E"/>
-                </a:solidFill>
-                <a:latin typeface="Calibri"/>
-              </a:rPr>
-              <a:t>Mas de 24 h ......... 2</a:t>
+              <a:t>En ese grupo la mediana del tiempo de ruta es 2 h 30 min y la media es 5 h 30 min.</a:t>
             </a:r>
             <a:endParaRPr lang="es-PE" sz="1500"/>
           </a:p>
@@ -948,15 +994,15 @@
               <a:buNone/>
             </a:pPr>
             <a:r>
-              <a:rPr lang="es-PE" sz="1300" dirty="0">
+              <a:rPr lang="es-PE" sz="1200" dirty="0">
                 <a:solidFill>
                   <a:srgbClr val="7A8699"/>
                 </a:solidFill>
                 <a:latin typeface="Calibri"/>
               </a:rPr>
-              <a:t>Mediana: 25 min h. La gran mayoria son traslados intra-ciudad o intra-region de menos de 3 h.</a:t>
+              <a:t>La media es mayor que la mediana porque unos pocos convenios inter-regionales de sierra y selva (12 h a 2 dias) elevan el promedio; para la mitad del grupo el traslado sigue por debajo de 2 h 30 min.</a:t>
             </a:r>
-            <a:endParaRPr lang="es-PE" sz="1300"/>
+            <a:endParaRPr lang="es-PE" sz="1200"/>
           </a:p>
         </p:txBody>
       </p:sp>
@@ -1032,7 +1078,7 @@
         </p:nvGraphicFramePr>
         <p:xfrm>
           <a:off x="500000" y="1350000"/>
-          <a:ext cx="11200000" cy="4700000"/>
+          <a:ext cx="11200000" cy="1000000"/>
         </p:xfrm>
         <a:graphic>
           <a:graphicData uri="http://schemas.openxmlformats.org/drawingml/2006/table">
@@ -2755,7 +2801,7 @@
         </p:nvGraphicFramePr>
         <p:xfrm>
           <a:off x="500000" y="1350000"/>
-          <a:ext cx="11200000" cy="3980000"/>
+          <a:ext cx="11200000" cy="1000000"/>
         </p:xfrm>
         <a:graphic>
           <a:graphicData uri="http://schemas.openxmlformats.org/drawingml/2006/table">

--- a/datos/Resumen_tiempos_convenios_BS.pptx
+++ b/datos/Resumen_tiempos_convenios_BS.pptx
@@ -557,7 +557,7 @@
                 </a:solidFill>
                 <a:latin typeface="Calibri"/>
               </a:rPr>
-              <a:t>Verificacion semaforo de convenios (agosto 2026) - 2026-09-03</a:t>
+              <a:t>Verificacion semaforo de convenios (agosto 2026) - 2026-09-04</a:t>
             </a:r>
             <a:endParaRPr lang="es-PE" sz="1400"/>
           </a:p>
@@ -677,7 +677,7 @@
                 </a:solidFill>
                 <a:latin typeface="Calibri"/>
               </a:rPr>
-              <a:t>246 con ruta terrestre calculada. Ningun convenio resulto sin acceso por carretera.</a:t>
+              <a:t>248 con ruta terrestre calculada. Ningun convenio resulto sin acceso por carretera.</a:t>
             </a:r>
             <a:endParaRPr lang="es-PE" sz="1600"/>
           </a:p>
@@ -693,7 +693,7 @@
                 </a:solidFill>
                 <a:latin typeface="Calibri"/>
               </a:rPr>
-              <a:t>20 con opcion de via aerea util (origen y destino en ciudades con aeropuertos distintos).</a:t>
+              <a:t>18 con opcion de via aerea util (origen y destino en ciudades con aeropuertos distintos).</a:t>
             </a:r>
             <a:endParaRPr lang="es-PE" sz="1600"/>
           </a:p>
@@ -725,7 +725,7 @@
                 </a:solidFill>
                 <a:latin typeface="Calibri"/>
               </a:rPr>
-              <a:t>32 sin dato: el hospital receptor no figura con ubicacion en el Registro Nacional (RENIPRESS no encontrado).</a:t>
+              <a:t>30 sin dato: el hospital receptor no figura con ubicacion en el Registro Nacional (RENIPRESS no encontrado).</a:t>
             </a:r>
             <a:endParaRPr lang="es-PE" sz="1600"/>
           </a:p>
@@ -843,7 +843,7 @@
                 </a:solidFill>
                 <a:latin typeface="Calibri"/>
               </a:rPr>
-              <a:t>Distribucion de los 246 convenios por tiempo de traslado terrestre (auto particular):</a:t>
+              <a:t>Distribucion de los 248 convenios por tiempo de traslado terrestre (auto particular):</a:t>
             </a:r>
             <a:endParaRPr lang="es-PE" sz="1400"/>
           </a:p>
@@ -859,7 +859,7 @@
                 </a:solidFill>
                 <a:latin typeface="Calibri"/>
               </a:rPr>
-              <a:t>Hasta 1 h ............ 183</a:t>
+              <a:t>Hasta 1 h ............ 189</a:t>
             </a:r>
             <a:endParaRPr lang="es-PE" sz="1400"/>
           </a:p>
@@ -875,7 +875,7 @@
                 </a:solidFill>
                 <a:latin typeface="Calibri"/>
               </a:rPr>
-              <a:t>1 a 3 h .............. 39</a:t>
+              <a:t>1 a 3 h .............. 37</a:t>
             </a:r>
             <a:endParaRPr lang="es-PE" sz="1400"/>
           </a:p>
@@ -891,7 +891,7 @@
                 </a:solidFill>
                 <a:latin typeface="Calibri"/>
               </a:rPr>
-              <a:t>3 a 6 h .............. 12</a:t>
+              <a:t>3 a 6 h .............. 11</a:t>
             </a:r>
             <a:endParaRPr lang="es-PE" sz="1400"/>
           </a:p>
@@ -907,7 +907,7 @@
                 </a:solidFill>
                 <a:latin typeface="Calibri"/>
               </a:rPr>
-              <a:t>6 a 12 h ............. 5</a:t>
+              <a:t>6 a 12 h ............. 6</a:t>
             </a:r>
             <a:endParaRPr lang="es-PE" sz="1400"/>
           </a:p>
@@ -923,7 +923,7 @@
                 </a:solidFill>
                 <a:latin typeface="Calibri"/>
               </a:rPr>
-              <a:t>12 a 24 h ............ 5</a:t>
+              <a:t>12 a 24 h ............ 4</a:t>
             </a:r>
             <a:endParaRPr lang="es-PE" sz="1400"/>
           </a:p>
@@ -939,7 +939,7 @@
                 </a:solidFill>
                 <a:latin typeface="Calibri"/>
               </a:rPr>
-              <a:t>Mas de 24 h ......... 2</a:t>
+              <a:t>Mas de 24 h ......... 1</a:t>
             </a:r>
             <a:endParaRPr lang="es-PE" sz="1400"/>
           </a:p>
@@ -954,7 +954,7 @@
                 </a:solidFill>
                 <a:latin typeface="Calibri"/>
               </a:rPr>
-              <a:t>Conjunto completo (246 convenios): mediana 0 h 25 min, media 1 h 42 min.</a:t>
+              <a:t>Conjunto completo (248 convenios): mediana 0 h 26 min, media 1 h 27 min.</a:t>
             </a:r>
             <a:endParaRPr lang="es-PE" sz="1300"/>
           </a:p>
@@ -969,7 +969,7 @@
                 </a:solidFill>
                 <a:latin typeface="Calibri"/>
               </a:rPr>
-              <a:t>IPRESS con traslado terrestre mayor a 1 h: 63 convenios (26 % del total).</a:t>
+              <a:t>IPRESS con traslado terrestre mayor a 1 h: 59 convenios (24 % del total).</a:t>
             </a:r>
             <a:endParaRPr lang="es-PE" sz="1500"/>
           </a:p>
@@ -985,7 +985,7 @@
                 </a:solidFill>
                 <a:latin typeface="Calibri"/>
               </a:rPr>
-              <a:t>En ese grupo la mediana del tiempo de ruta es 2 h 30 min y la media es 5 h 30 min.</a:t>
+              <a:t>En ese grupo la mediana del tiempo de ruta es 2 h 30 min y la media es 4 h 52 min.</a:t>
             </a:r>
             <a:endParaRPr lang="es-PE" sz="1500"/>
           </a:p>
@@ -1359,7 +1359,7 @@
                         <a:rPr lang="es-PE" sz="1050">
                           <a:latin typeface="Calibri"/>
                         </a:rPr>
-                        <a:t>2 d 6 h</a:t>
+                        <a:t>2 d 5 h</a:t>
                       </a:r>
                     </a:p>
                   </a:txBody>
@@ -1404,102 +1404,102 @@
                         <a:rPr lang="es-PE" sz="1050">
                           <a:latin typeface="Calibri"/>
                         </a:rPr>
-                        <a:t>24</a:t>
-                      </a:r>
-                    </a:p>
-                  </a:txBody>
-                  <a:tcPr>
-                    <a:solidFill>
-                      <a:srgbClr val="EEF1F6"/>
-                    </a:solidFill>
-                  </a:tcPr>
-                </a:tc>
-                <a:tc>
-                  <a:txBody>
-                    <a:bodyPr/>
-                    <a:lstStyle/>
-                    <a:p>
-                      <a:r>
-                        <a:rPr lang="es-PE" sz="1050">
-                          <a:latin typeface="Calibri"/>
-                        </a:rPr>
-                        <a:t>INSTITUTO REGIONAL DE ENF…</a:t>
-                      </a:r>
-                    </a:p>
-                  </a:txBody>
-                  <a:tcPr>
-                    <a:solidFill>
-                      <a:srgbClr val="EEF1F6"/>
-                    </a:solidFill>
-                  </a:tcPr>
-                </a:tc>
-                <a:tc>
-                  <a:txBody>
-                    <a:bodyPr/>
-                    <a:lstStyle/>
-                    <a:p>
-                      <a:r>
-                        <a:rPr lang="es-PE" sz="1050">
-                          <a:latin typeface="Calibri"/>
-                        </a:rPr>
-                        <a:t>Hospital Militar Division…</a:t>
-                      </a:r>
-                    </a:p>
-                  </a:txBody>
-                  <a:tcPr>
-                    <a:solidFill>
-                      <a:srgbClr val="EEF1F6"/>
-                    </a:solidFill>
-                  </a:tcPr>
-                </a:tc>
-                <a:tc>
-                  <a:txBody>
-                    <a:bodyPr/>
-                    <a:lstStyle/>
-                    <a:p>
-                      <a:r>
-                        <a:rPr lang="es-PE" sz="1050">
-                          <a:latin typeface="Calibri"/>
-                        </a:rPr>
-                        <a:t>1,974</a:t>
-                      </a:r>
-                    </a:p>
-                  </a:txBody>
-                  <a:tcPr>
-                    <a:solidFill>
-                      <a:srgbClr val="EEF1F6"/>
-                    </a:solidFill>
-                  </a:tcPr>
-                </a:tc>
-                <a:tc>
-                  <a:txBody>
-                    <a:bodyPr/>
-                    <a:lstStyle/>
-                    <a:p>
-                      <a:r>
-                        <a:rPr lang="es-PE" sz="1050">
-                          <a:latin typeface="Calibri"/>
-                        </a:rPr>
-                        <a:t>1 d 16 h</a:t>
-                      </a:r>
-                    </a:p>
-                  </a:txBody>
-                  <a:tcPr>
-                    <a:solidFill>
-                      <a:srgbClr val="EEF1F6"/>
-                    </a:solidFill>
-                  </a:tcPr>
-                </a:tc>
-                <a:tc>
-                  <a:txBody>
-                    <a:bodyPr/>
-                    <a:lstStyle/>
-                    <a:p>
-                      <a:r>
-                        <a:rPr lang="es-PE" sz="1050">
-                          <a:latin typeface="Calibri"/>
-                        </a:rPr>
-                        <a:t>sierra / ceja de selva</a:t>
+                        <a:t>211</a:t>
+                      </a:r>
+                    </a:p>
+                  </a:txBody>
+                  <a:tcPr>
+                    <a:solidFill>
+                      <a:srgbClr val="EEF1F6"/>
+                    </a:solidFill>
+                  </a:tcPr>
+                </a:tc>
+                <a:tc>
+                  <a:txBody>
+                    <a:bodyPr/>
+                    <a:lstStyle/>
+                    <a:p>
+                      <a:r>
+                        <a:rPr lang="es-PE" sz="1050">
+                          <a:latin typeface="Calibri"/>
+                        </a:rPr>
+                        <a:t>MEDIC SER SAC -AUNA CLINI…</a:t>
+                      </a:r>
+                    </a:p>
+                  </a:txBody>
+                  <a:tcPr>
+                    <a:solidFill>
+                      <a:srgbClr val="EEF1F6"/>
+                    </a:solidFill>
+                  </a:tcPr>
+                </a:tc>
+                <a:tc>
+                  <a:txBody>
+                    <a:bodyPr/>
+                    <a:lstStyle/>
+                    <a:p>
+                      <a:r>
+                        <a:rPr lang="es-PE" sz="1050">
+                          <a:latin typeface="Calibri"/>
+                        </a:rPr>
+                        <a:t>CLÍNICAS AUNA SEDE PIURA -</a:t>
+                      </a:r>
+                    </a:p>
+                  </a:txBody>
+                  <a:tcPr>
+                    <a:solidFill>
+                      <a:srgbClr val="EEF1F6"/>
+                    </a:solidFill>
+                  </a:tcPr>
+                </a:tc>
+                <a:tc>
+                  <a:txBody>
+                    <a:bodyPr/>
+                    <a:lstStyle/>
+                    <a:p>
+                      <a:r>
+                        <a:rPr lang="es-PE" sz="1050">
+                          <a:latin typeface="Calibri"/>
+                        </a:rPr>
+                        <a:t>977</a:t>
+                      </a:r>
+                    </a:p>
+                  </a:txBody>
+                  <a:tcPr>
+                    <a:solidFill>
+                      <a:srgbClr val="EEF1F6"/>
+                    </a:solidFill>
+                  </a:tcPr>
+                </a:tc>
+                <a:tc>
+                  <a:txBody>
+                    <a:bodyPr/>
+                    <a:lstStyle/>
+                    <a:p>
+                      <a:r>
+                        <a:rPr lang="es-PE" sz="1050">
+                          <a:latin typeface="Calibri"/>
+                        </a:rPr>
+                        <a:t>18 h 21 min</a:t>
+                      </a:r>
+                    </a:p>
+                  </a:txBody>
+                  <a:tcPr>
+                    <a:solidFill>
+                      <a:srgbClr val="EEF1F6"/>
+                    </a:solidFill>
+                  </a:tcPr>
+                </a:tc>
+                <a:tc>
+                  <a:txBody>
+                    <a:bodyPr/>
+                    <a:lstStyle/>
+                    <a:p>
+                      <a:r>
+                        <a:rPr lang="es-PE" sz="1050">
+                          <a:latin typeface="Calibri"/>
+                        </a:rPr>
+                        <a:t>costa / llano</a:t>
                       </a:r>
                     </a:p>
                   </a:txBody>
@@ -1582,26 +1582,26 @@
                         <a:rPr lang="es-PE" sz="1050">
                           <a:latin typeface="Calibri"/>
                         </a:rPr>
-                        <a:t>977</a:t>
-                      </a:r>
-                    </a:p>
-                  </a:txBody>
-                  <a:tcPr>
-                    <a:solidFill>
-                      <a:srgbClr val="FFFFFF"/>
-                    </a:solidFill>
-                  </a:tcPr>
-                </a:tc>
-                <a:tc>
-                  <a:txBody>
-                    <a:bodyPr/>
-                    <a:lstStyle/>
-                    <a:p>
-                      <a:r>
-                        <a:rPr lang="es-PE" sz="1050">
-                          <a:latin typeface="Calibri"/>
-                        </a:rPr>
-                        <a:t>18 h 21 min</a:t>
+                        <a:t>978</a:t>
+                      </a:r>
+                    </a:p>
+                  </a:txBody>
+                  <a:tcPr>
+                    <a:solidFill>
+                      <a:srgbClr val="FFFFFF"/>
+                    </a:solidFill>
+                  </a:tcPr>
+                </a:tc>
+                <a:tc>
+                  <a:txBody>
+                    <a:bodyPr/>
+                    <a:lstStyle/>
+                    <a:p>
+                      <a:r>
+                        <a:rPr lang="es-PE" sz="1050">
+                          <a:latin typeface="Calibri"/>
+                        </a:rPr>
+                        <a:t>18 h 20 min</a:t>
                       </a:r>
                     </a:p>
                   </a:txBody>
@@ -1646,7 +1646,7 @@
                         <a:rPr lang="es-PE" sz="1050">
                           <a:latin typeface="Calibri"/>
                         </a:rPr>
-                        <a:t>211</a:t>
+                        <a:t>209</a:t>
                       </a:r>
                     </a:p>
                   </a:txBody>
@@ -1684,64 +1684,64 @@
                         <a:rPr lang="es-PE" sz="1050">
                           <a:latin typeface="Calibri"/>
                         </a:rPr>
-                        <a:t>CLÍNICAS AUNA SEDE PIURA -</a:t>
-                      </a:r>
-                    </a:p>
-                  </a:txBody>
-                  <a:tcPr>
-                    <a:solidFill>
-                      <a:srgbClr val="EEF1F6"/>
-                    </a:solidFill>
-                  </a:tcPr>
-                </a:tc>
-                <a:tc>
-                  <a:txBody>
-                    <a:bodyPr/>
-                    <a:lstStyle/>
-                    <a:p>
-                      <a:r>
-                        <a:rPr lang="es-PE" sz="1050">
-                          <a:latin typeface="Calibri"/>
-                        </a:rPr>
-                        <a:t>977</a:t>
-                      </a:r>
-                    </a:p>
-                  </a:txBody>
-                  <a:tcPr>
-                    <a:solidFill>
-                      <a:srgbClr val="EEF1F6"/>
-                    </a:solidFill>
-                  </a:tcPr>
-                </a:tc>
-                <a:tc>
-                  <a:txBody>
-                    <a:bodyPr/>
-                    <a:lstStyle/>
-                    <a:p>
-                      <a:r>
-                        <a:rPr lang="es-PE" sz="1050">
-                          <a:latin typeface="Calibri"/>
-                        </a:rPr>
-                        <a:t>18 h 20 min</a:t>
-                      </a:r>
-                    </a:p>
-                  </a:txBody>
-                  <a:tcPr>
-                    <a:solidFill>
-                      <a:srgbClr val="EEF1F6"/>
-                    </a:solidFill>
-                  </a:tcPr>
-                </a:tc>
-                <a:tc>
-                  <a:txBody>
-                    <a:bodyPr/>
-                    <a:lstStyle/>
-                    <a:p>
-                      <a:r>
-                        <a:rPr lang="es-PE" sz="1050">
-                          <a:latin typeface="Calibri"/>
-                        </a:rPr>
-                        <a:t>costa / llano</a:t>
+                        <a:t>CLINICAS AUNA SEDE VALLE…</a:t>
+                      </a:r>
+                    </a:p>
+                  </a:txBody>
+                  <a:tcPr>
+                    <a:solidFill>
+                      <a:srgbClr val="EEF1F6"/>
+                    </a:solidFill>
+                  </a:tcPr>
+                </a:tc>
+                <a:tc>
+                  <a:txBody>
+                    <a:bodyPr/>
+                    <a:lstStyle/>
+                    <a:p>
+                      <a:r>
+                        <a:rPr lang="es-PE" sz="1050">
+                          <a:latin typeface="Calibri"/>
+                        </a:rPr>
+                        <a:t>993</a:t>
+                      </a:r>
+                    </a:p>
+                  </a:txBody>
+                  <a:tcPr>
+                    <a:solidFill>
+                      <a:srgbClr val="EEF1F6"/>
+                    </a:solidFill>
+                  </a:tcPr>
+                </a:tc>
+                <a:tc>
+                  <a:txBody>
+                    <a:bodyPr/>
+                    <a:lstStyle/>
+                    <a:p>
+                      <a:r>
+                        <a:rPr lang="es-PE" sz="1050">
+                          <a:latin typeface="Calibri"/>
+                        </a:rPr>
+                        <a:t>17 h 36 min</a:t>
+                      </a:r>
+                    </a:p>
+                  </a:txBody>
+                  <a:tcPr>
+                    <a:solidFill>
+                      <a:srgbClr val="EEF1F6"/>
+                    </a:solidFill>
+                  </a:tcPr>
+                </a:tc>
+                <a:tc>
+                  <a:txBody>
+                    <a:bodyPr/>
+                    <a:lstStyle/>
+                    <a:p>
+                      <a:r>
+                        <a:rPr lang="es-PE" sz="1050">
+                          <a:latin typeface="Calibri"/>
+                        </a:rPr>
+                        <a:t>tramos de altura</a:t>
                       </a:r>
                     </a:p>
                   </a:txBody>
@@ -1767,83 +1767,83 @@
                         <a:rPr lang="es-PE" sz="1050">
                           <a:latin typeface="Calibri"/>
                         </a:rPr>
-                        <a:t>246</a:t>
-                      </a:r>
-                    </a:p>
-                  </a:txBody>
-                  <a:tcPr>
-                    <a:solidFill>
-                      <a:srgbClr val="FFFFFF"/>
-                    </a:solidFill>
-                  </a:tcPr>
-                </a:tc>
-                <a:tc>
-                  <a:txBody>
-                    <a:bodyPr/>
-                    <a:lstStyle/>
-                    <a:p>
-                      <a:r>
-                        <a:rPr lang="es-PE" sz="1050">
-                          <a:latin typeface="Calibri"/>
-                        </a:rPr>
-                        <a:t>HOSPITAL DE LA AMISTAD PE…</a:t>
-                      </a:r>
-                    </a:p>
-                  </a:txBody>
-                  <a:tcPr>
-                    <a:solidFill>
-                      <a:srgbClr val="FFFFFF"/>
-                    </a:solidFill>
-                  </a:tcPr>
-                </a:tc>
-                <a:tc>
-                  <a:txBody>
-                    <a:bodyPr/>
-                    <a:lstStyle/>
-                    <a:p>
-                      <a:r>
-                        <a:rPr lang="es-PE" sz="1050">
-                          <a:latin typeface="Calibri"/>
-                        </a:rPr>
-                        <a:t>HOGAR CLÍNICA MONTE SINAÍ</a:t>
-                      </a:r>
-                    </a:p>
-                  </a:txBody>
-                  <a:tcPr>
-                    <a:solidFill>
-                      <a:srgbClr val="FFFFFF"/>
-                    </a:solidFill>
-                  </a:tcPr>
-                </a:tc>
-                <a:tc>
-                  <a:txBody>
-                    <a:bodyPr/>
-                    <a:lstStyle/>
-                    <a:p>
-                      <a:r>
-                        <a:rPr lang="es-PE" sz="1050">
-                          <a:latin typeface="Calibri"/>
-                        </a:rPr>
-                        <a:t>968</a:t>
-                      </a:r>
-                    </a:p>
-                  </a:txBody>
-                  <a:tcPr>
-                    <a:solidFill>
-                      <a:srgbClr val="FFFFFF"/>
-                    </a:solidFill>
-                  </a:tcPr>
-                </a:tc>
-                <a:tc>
-                  <a:txBody>
-                    <a:bodyPr/>
-                    <a:lstStyle/>
-                    <a:p>
-                      <a:r>
-                        <a:rPr lang="es-PE" sz="1050">
-                          <a:latin typeface="Calibri"/>
-                        </a:rPr>
-                        <a:t>17 h 40 min</a:t>
+                        <a:t>212</a:t>
+                      </a:r>
+                    </a:p>
+                  </a:txBody>
+                  <a:tcPr>
+                    <a:solidFill>
+                      <a:srgbClr val="FFFFFF"/>
+                    </a:solidFill>
+                  </a:tcPr>
+                </a:tc>
+                <a:tc>
+                  <a:txBody>
+                    <a:bodyPr/>
+                    <a:lstStyle/>
+                    <a:p>
+                      <a:r>
+                        <a:rPr lang="es-PE" sz="1050">
+                          <a:latin typeface="Calibri"/>
+                        </a:rPr>
+                        <a:t>MEDIC SER SAC -AUNA CLINI…</a:t>
+                      </a:r>
+                    </a:p>
+                  </a:txBody>
+                  <a:tcPr>
+                    <a:solidFill>
+                      <a:srgbClr val="FFFFFF"/>
+                    </a:solidFill>
+                  </a:tcPr>
+                </a:tc>
+                <a:tc>
+                  <a:txBody>
+                    <a:bodyPr/>
+                    <a:lstStyle/>
+                    <a:p>
+                      <a:r>
+                        <a:rPr lang="es-PE" sz="1050">
+                          <a:latin typeface="Calibri"/>
+                        </a:rPr>
+                        <a:t>GSP TRUJILLO</a:t>
+                      </a:r>
+                    </a:p>
+                  </a:txBody>
+                  <a:tcPr>
+                    <a:solidFill>
+                      <a:srgbClr val="FFFFFF"/>
+                    </a:solidFill>
+                  </a:tcPr>
+                </a:tc>
+                <a:tc>
+                  <a:txBody>
+                    <a:bodyPr/>
+                    <a:lstStyle/>
+                    <a:p>
+                      <a:r>
+                        <a:rPr lang="es-PE" sz="1050">
+                          <a:latin typeface="Calibri"/>
+                        </a:rPr>
+                        <a:t>764</a:t>
+                      </a:r>
+                    </a:p>
+                  </a:txBody>
+                  <a:tcPr>
+                    <a:solidFill>
+                      <a:srgbClr val="FFFFFF"/>
+                    </a:solidFill>
+                  </a:tcPr>
+                </a:tc>
+                <a:tc>
+                  <a:txBody>
+                    <a:bodyPr/>
+                    <a:lstStyle/>
+                    <a:p>
+                      <a:r>
+                        <a:rPr lang="es-PE" sz="1050">
+                          <a:latin typeface="Calibri"/>
+                        </a:rPr>
+                        <a:t>14 h 56 min</a:t>
                       </a:r>
                     </a:p>
                   </a:txBody>
@@ -1888,102 +1888,102 @@
                         <a:rPr lang="es-PE" sz="1050">
                           <a:latin typeface="Calibri"/>
                         </a:rPr>
-                        <a:t>209</a:t>
-                      </a:r>
-                    </a:p>
-                  </a:txBody>
-                  <a:tcPr>
-                    <a:solidFill>
-                      <a:srgbClr val="EEF1F6"/>
-                    </a:solidFill>
-                  </a:tcPr>
-                </a:tc>
-                <a:tc>
-                  <a:txBody>
-                    <a:bodyPr/>
-                    <a:lstStyle/>
-                    <a:p>
-                      <a:r>
-                        <a:rPr lang="es-PE" sz="1050">
-                          <a:latin typeface="Calibri"/>
-                        </a:rPr>
-                        <a:t>MEDIC SER SAC -AUNA CLINI…</a:t>
-                      </a:r>
-                    </a:p>
-                  </a:txBody>
-                  <a:tcPr>
-                    <a:solidFill>
-                      <a:srgbClr val="EEF1F6"/>
-                    </a:solidFill>
-                  </a:tcPr>
-                </a:tc>
-                <a:tc>
-                  <a:txBody>
-                    <a:bodyPr/>
-                    <a:lstStyle/>
-                    <a:p>
-                      <a:r>
-                        <a:rPr lang="es-PE" sz="1050">
-                          <a:latin typeface="Calibri"/>
-                        </a:rPr>
-                        <a:t>CLINICAS AUNA SEDE VALLE…</a:t>
-                      </a:r>
-                    </a:p>
-                  </a:txBody>
-                  <a:tcPr>
-                    <a:solidFill>
-                      <a:srgbClr val="EEF1F6"/>
-                    </a:solidFill>
-                  </a:tcPr>
-                </a:tc>
-                <a:tc>
-                  <a:txBody>
-                    <a:bodyPr/>
-                    <a:lstStyle/>
-                    <a:p>
-                      <a:r>
-                        <a:rPr lang="es-PE" sz="1050">
-                          <a:latin typeface="Calibri"/>
-                        </a:rPr>
-                        <a:t>991</a:t>
-                      </a:r>
-                    </a:p>
-                  </a:txBody>
-                  <a:tcPr>
-                    <a:solidFill>
-                      <a:srgbClr val="EEF1F6"/>
-                    </a:solidFill>
-                  </a:tcPr>
-                </a:tc>
-                <a:tc>
-                  <a:txBody>
-                    <a:bodyPr/>
-                    <a:lstStyle/>
-                    <a:p>
-                      <a:r>
-                        <a:rPr lang="es-PE" sz="1050">
-                          <a:latin typeface="Calibri"/>
-                        </a:rPr>
-                        <a:t>17 h 32 min</a:t>
-                      </a:r>
-                    </a:p>
-                  </a:txBody>
-                  <a:tcPr>
-                    <a:solidFill>
-                      <a:srgbClr val="EEF1F6"/>
-                    </a:solidFill>
-                  </a:tcPr>
-                </a:tc>
-                <a:tc>
-                  <a:txBody>
-                    <a:bodyPr/>
-                    <a:lstStyle/>
-                    <a:p>
-                      <a:r>
-                        <a:rPr lang="es-PE" sz="1050">
-                          <a:latin typeface="Calibri"/>
-                        </a:rPr>
-                        <a:t>tramos de altura</a:t>
+                        <a:t>100</a:t>
+                      </a:r>
+                    </a:p>
+                  </a:txBody>
+                  <a:tcPr>
+                    <a:solidFill>
+                      <a:srgbClr val="EEF1F6"/>
+                    </a:solidFill>
+                  </a:tcPr>
+                </a:tc>
+                <a:tc>
+                  <a:txBody>
+                    <a:bodyPr/>
+                    <a:lstStyle/>
+                    <a:p>
+                      <a:r>
+                        <a:rPr lang="es-PE" sz="1050">
+                          <a:latin typeface="Calibri"/>
+                        </a:rPr>
+                        <a:t>HOSPITAL REGIONAL DOCENTE…</a:t>
+                      </a:r>
+                    </a:p>
+                  </a:txBody>
+                  <a:tcPr>
+                    <a:solidFill>
+                      <a:srgbClr val="EEF1F6"/>
+                    </a:solidFill>
+                  </a:tcPr>
+                </a:tc>
+                <a:tc>
+                  <a:txBody>
+                    <a:bodyPr/>
+                    <a:lstStyle/>
+                    <a:p>
+                      <a:r>
+                        <a:rPr lang="es-PE" sz="1050">
+                          <a:latin typeface="Calibri"/>
+                        </a:rPr>
+                        <a:t>CLINICA CAMINO REAL</a:t>
+                      </a:r>
+                    </a:p>
+                  </a:txBody>
+                  <a:tcPr>
+                    <a:solidFill>
+                      <a:srgbClr val="EEF1F6"/>
+                    </a:solidFill>
+                  </a:tcPr>
+                </a:tc>
+                <a:tc>
+                  <a:txBody>
+                    <a:bodyPr/>
+                    <a:lstStyle/>
+                    <a:p>
+                      <a:r>
+                        <a:rPr lang="es-PE" sz="1050">
+                          <a:latin typeface="Calibri"/>
+                        </a:rPr>
+                        <a:t>559</a:t>
+                      </a:r>
+                    </a:p>
+                  </a:txBody>
+                  <a:tcPr>
+                    <a:solidFill>
+                      <a:srgbClr val="EEF1F6"/>
+                    </a:solidFill>
+                  </a:tcPr>
+                </a:tc>
+                <a:tc>
+                  <a:txBody>
+                    <a:bodyPr/>
+                    <a:lstStyle/>
+                    <a:p>
+                      <a:r>
+                        <a:rPr lang="es-PE" sz="1050">
+                          <a:latin typeface="Calibri"/>
+                        </a:rPr>
+                        <a:t>10 h 24 min</a:t>
+                      </a:r>
+                    </a:p>
+                  </a:txBody>
+                  <a:tcPr>
+                    <a:solidFill>
+                      <a:srgbClr val="EEF1F6"/>
+                    </a:solidFill>
+                  </a:tcPr>
+                </a:tc>
+                <a:tc>
+                  <a:txBody>
+                    <a:bodyPr/>
+                    <a:lstStyle/>
+                    <a:p>
+                      <a:r>
+                        <a:rPr lang="es-PE" sz="1050">
+                          <a:latin typeface="Calibri"/>
+                        </a:rPr>
+                        <a:t>costa / llano</a:t>
                       </a:r>
                     </a:p>
                   </a:txBody>
@@ -2009,102 +2009,102 @@
                         <a:rPr lang="es-PE" sz="1050">
                           <a:latin typeface="Calibri"/>
                         </a:rPr>
-                        <a:t>212</a:t>
-                      </a:r>
-                    </a:p>
-                  </a:txBody>
-                  <a:tcPr>
-                    <a:solidFill>
-                      <a:srgbClr val="FFFFFF"/>
-                    </a:solidFill>
-                  </a:tcPr>
-                </a:tc>
-                <a:tc>
-                  <a:txBody>
-                    <a:bodyPr/>
-                    <a:lstStyle/>
-                    <a:p>
-                      <a:r>
-                        <a:rPr lang="es-PE" sz="1050">
-                          <a:latin typeface="Calibri"/>
-                        </a:rPr>
-                        <a:t>MEDIC SER SAC -AUNA CLINI…</a:t>
-                      </a:r>
-                    </a:p>
-                  </a:txBody>
-                  <a:tcPr>
-                    <a:solidFill>
-                      <a:srgbClr val="FFFFFF"/>
-                    </a:solidFill>
-                  </a:tcPr>
-                </a:tc>
-                <a:tc>
-                  <a:txBody>
-                    <a:bodyPr/>
-                    <a:lstStyle/>
-                    <a:p>
-                      <a:r>
-                        <a:rPr lang="es-PE" sz="1050">
-                          <a:latin typeface="Calibri"/>
-                        </a:rPr>
-                        <a:t>GSP TRUJILLO</a:t>
-                      </a:r>
-                    </a:p>
-                  </a:txBody>
-                  <a:tcPr>
-                    <a:solidFill>
-                      <a:srgbClr val="FFFFFF"/>
-                    </a:solidFill>
-                  </a:tcPr>
-                </a:tc>
-                <a:tc>
-                  <a:txBody>
-                    <a:bodyPr/>
-                    <a:lstStyle/>
-                    <a:p>
-                      <a:r>
-                        <a:rPr lang="es-PE" sz="1050">
-                          <a:latin typeface="Calibri"/>
-                        </a:rPr>
-                        <a:t>765</a:t>
-                      </a:r>
-                    </a:p>
-                  </a:txBody>
-                  <a:tcPr>
-                    <a:solidFill>
-                      <a:srgbClr val="FFFFFF"/>
-                    </a:solidFill>
-                  </a:tcPr>
-                </a:tc>
-                <a:tc>
-                  <a:txBody>
-                    <a:bodyPr/>
-                    <a:lstStyle/>
-                    <a:p>
-                      <a:r>
-                        <a:rPr lang="es-PE" sz="1050">
-                          <a:latin typeface="Calibri"/>
-                        </a:rPr>
-                        <a:t>14 h 56 min</a:t>
-                      </a:r>
-                    </a:p>
-                  </a:txBody>
-                  <a:tcPr>
-                    <a:solidFill>
-                      <a:srgbClr val="FFFFFF"/>
-                    </a:solidFill>
-                  </a:tcPr>
-                </a:tc>
-                <a:tc>
-                  <a:txBody>
-                    <a:bodyPr/>
-                    <a:lstStyle/>
-                    <a:p>
-                      <a:r>
-                        <a:rPr lang="es-PE" sz="1050">
-                          <a:latin typeface="Calibri"/>
-                        </a:rPr>
-                        <a:t>costa / llano</a:t>
+                        <a:t>48</a:t>
+                      </a:r>
+                    </a:p>
+                  </a:txBody>
+                  <a:tcPr>
+                    <a:solidFill>
+                      <a:srgbClr val="FFFFFF"/>
+                    </a:solidFill>
+                  </a:tcPr>
+                </a:tc>
+                <a:tc>
+                  <a:txBody>
+                    <a:bodyPr/>
+                    <a:lstStyle/>
+                    <a:p>
+                      <a:r>
+                        <a:rPr lang="es-PE" sz="1050">
+                          <a:latin typeface="Calibri"/>
+                        </a:rPr>
+                        <a:t>Hospital Antonio Lorena d…</a:t>
+                      </a:r>
+                    </a:p>
+                  </a:txBody>
+                  <a:tcPr>
+                    <a:solidFill>
+                      <a:srgbClr val="FFFFFF"/>
+                    </a:solidFill>
+                  </a:tcPr>
+                </a:tc>
+                <a:tc>
+                  <a:txBody>
+                    <a:bodyPr/>
+                    <a:lstStyle/>
+                    <a:p>
+                      <a:r>
+                        <a:rPr lang="es-PE" sz="1050">
+                          <a:latin typeface="Calibri"/>
+                        </a:rPr>
+                        <a:t>QUILLABAMBA-ESSALUD</a:t>
+                      </a:r>
+                    </a:p>
+                  </a:txBody>
+                  <a:tcPr>
+                    <a:solidFill>
+                      <a:srgbClr val="FFFFFF"/>
+                    </a:solidFill>
+                  </a:tcPr>
+                </a:tc>
+                <a:tc>
+                  <a:txBody>
+                    <a:bodyPr/>
+                    <a:lstStyle/>
+                    <a:p>
+                      <a:r>
+                        <a:rPr lang="es-PE" sz="1050">
+                          <a:latin typeface="Calibri"/>
+                        </a:rPr>
+                        <a:t>202</a:t>
+                      </a:r>
+                    </a:p>
+                  </a:txBody>
+                  <a:tcPr>
+                    <a:solidFill>
+                      <a:srgbClr val="FFFFFF"/>
+                    </a:solidFill>
+                  </a:tcPr>
+                </a:tc>
+                <a:tc>
+                  <a:txBody>
+                    <a:bodyPr/>
+                    <a:lstStyle/>
+                    <a:p>
+                      <a:r>
+                        <a:rPr lang="es-PE" sz="1050">
+                          <a:latin typeface="Calibri"/>
+                        </a:rPr>
+                        <a:t>6 h 57 min</a:t>
+                      </a:r>
+                    </a:p>
+                  </a:txBody>
+                  <a:tcPr>
+                    <a:solidFill>
+                      <a:srgbClr val="FFFFFF"/>
+                    </a:solidFill>
+                  </a:tcPr>
+                </a:tc>
+                <a:tc>
+                  <a:txBody>
+                    <a:bodyPr/>
+                    <a:lstStyle/>
+                    <a:p>
+                      <a:r>
+                        <a:rPr lang="es-PE" sz="1050">
+                          <a:latin typeface="Calibri"/>
+                        </a:rPr>
+                        <a:t>sierra alta sostenida</a:t>
                       </a:r>
                     </a:p>
                   </a:txBody>
@@ -2130,102 +2130,102 @@
                         <a:rPr lang="es-PE" sz="1050">
                           <a:latin typeface="Calibri"/>
                         </a:rPr>
-                        <a:t>100</a:t>
-                      </a:r>
-                    </a:p>
-                  </a:txBody>
-                  <a:tcPr>
-                    <a:solidFill>
-                      <a:srgbClr val="EEF1F6"/>
-                    </a:solidFill>
-                  </a:tcPr>
-                </a:tc>
-                <a:tc>
-                  <a:txBody>
-                    <a:bodyPr/>
-                    <a:lstStyle/>
-                    <a:p>
-                      <a:r>
-                        <a:rPr lang="es-PE" sz="1050">
-                          <a:latin typeface="Calibri"/>
-                        </a:rPr>
-                        <a:t>HOSPITAL REGIONAL DOCENTE…</a:t>
-                      </a:r>
-                    </a:p>
-                  </a:txBody>
-                  <a:tcPr>
-                    <a:solidFill>
-                      <a:srgbClr val="EEF1F6"/>
-                    </a:solidFill>
-                  </a:tcPr>
-                </a:tc>
-                <a:tc>
-                  <a:txBody>
-                    <a:bodyPr/>
-                    <a:lstStyle/>
-                    <a:p>
-                      <a:r>
-                        <a:rPr lang="es-PE" sz="1050">
-                          <a:latin typeface="Calibri"/>
-                        </a:rPr>
-                        <a:t>CLINICA CAMINO REAL</a:t>
-                      </a:r>
-                    </a:p>
-                  </a:txBody>
-                  <a:tcPr>
-                    <a:solidFill>
-                      <a:srgbClr val="EEF1F6"/>
-                    </a:solidFill>
-                  </a:tcPr>
-                </a:tc>
-                <a:tc>
-                  <a:txBody>
-                    <a:bodyPr/>
-                    <a:lstStyle/>
-                    <a:p>
-                      <a:r>
-                        <a:rPr lang="es-PE" sz="1050">
-                          <a:latin typeface="Calibri"/>
-                        </a:rPr>
-                        <a:t>559</a:t>
-                      </a:r>
-                    </a:p>
-                  </a:txBody>
-                  <a:tcPr>
-                    <a:solidFill>
-                      <a:srgbClr val="EEF1F6"/>
-                    </a:solidFill>
-                  </a:tcPr>
-                </a:tc>
-                <a:tc>
-                  <a:txBody>
-                    <a:bodyPr/>
-                    <a:lstStyle/>
-                    <a:p>
-                      <a:r>
-                        <a:rPr lang="es-PE" sz="1050">
-                          <a:latin typeface="Calibri"/>
-                        </a:rPr>
-                        <a:t>10 h 22 min</a:t>
-                      </a:r>
-                    </a:p>
-                  </a:txBody>
-                  <a:tcPr>
-                    <a:solidFill>
-                      <a:srgbClr val="EEF1F6"/>
-                    </a:solidFill>
-                  </a:tcPr>
-                </a:tc>
-                <a:tc>
-                  <a:txBody>
-                    <a:bodyPr/>
-                    <a:lstStyle/>
-                    <a:p>
-                      <a:r>
-                        <a:rPr lang="es-PE" sz="1050">
-                          <a:latin typeface="Calibri"/>
-                        </a:rPr>
-                        <a:t>costa / llano</a:t>
+                        <a:t>57</a:t>
+                      </a:r>
+                    </a:p>
+                  </a:txBody>
+                  <a:tcPr>
+                    <a:solidFill>
+                      <a:srgbClr val="EEF1F6"/>
+                    </a:solidFill>
+                  </a:tcPr>
+                </a:tc>
+                <a:tc>
+                  <a:txBody>
+                    <a:bodyPr/>
+                    <a:lstStyle/>
+                    <a:p>
+                      <a:r>
+                        <a:rPr lang="es-PE" sz="1050">
+                          <a:latin typeface="Calibri"/>
+                        </a:rPr>
+                        <a:t>Hospital Antonio Lorena d…</a:t>
+                      </a:r>
+                    </a:p>
+                  </a:txBody>
+                  <a:tcPr>
+                    <a:solidFill>
+                      <a:srgbClr val="EEF1F6"/>
+                    </a:solidFill>
+                  </a:tcPr>
+                </a:tc>
+                <a:tc>
+                  <a:txBody>
+                    <a:bodyPr/>
+                    <a:lstStyle/>
+                    <a:p>
+                      <a:r>
+                        <a:rPr lang="es-PE" sz="1050">
+                          <a:latin typeface="Calibri"/>
+                        </a:rPr>
+                        <a:t>SR DE TORRECHAYOC</a:t>
+                      </a:r>
+                    </a:p>
+                  </a:txBody>
+                  <a:tcPr>
+                    <a:solidFill>
+                      <a:srgbClr val="EEF1F6"/>
+                    </a:solidFill>
+                  </a:tcPr>
+                </a:tc>
+                <a:tc>
+                  <a:txBody>
+                    <a:bodyPr/>
+                    <a:lstStyle/>
+                    <a:p>
+                      <a:r>
+                        <a:rPr lang="es-PE" sz="1050">
+                          <a:latin typeface="Calibri"/>
+                        </a:rPr>
+                        <a:t>202</a:t>
+                      </a:r>
+                    </a:p>
+                  </a:txBody>
+                  <a:tcPr>
+                    <a:solidFill>
+                      <a:srgbClr val="EEF1F6"/>
+                    </a:solidFill>
+                  </a:tcPr>
+                </a:tc>
+                <a:tc>
+                  <a:txBody>
+                    <a:bodyPr/>
+                    <a:lstStyle/>
+                    <a:p>
+                      <a:r>
+                        <a:rPr lang="es-PE" sz="1050">
+                          <a:latin typeface="Calibri"/>
+                        </a:rPr>
+                        <a:t>6 h 57 min</a:t>
+                      </a:r>
+                    </a:p>
+                  </a:txBody>
+                  <a:tcPr>
+                    <a:solidFill>
+                      <a:srgbClr val="EEF1F6"/>
+                    </a:solidFill>
+                  </a:tcPr>
+                </a:tc>
+                <a:tc>
+                  <a:txBody>
+                    <a:bodyPr/>
+                    <a:lstStyle/>
+                    <a:p>
+                      <a:r>
+                        <a:rPr lang="es-PE" sz="1050">
+                          <a:latin typeface="Calibri"/>
+                        </a:rPr>
+                        <a:t>sierra alta sostenida</a:t>
                       </a:r>
                     </a:p>
                   </a:txBody>
@@ -2251,7 +2251,7 @@
                         <a:rPr lang="es-PE" sz="1050">
                           <a:latin typeface="Calibri"/>
                         </a:rPr>
-                        <a:t>48</a:t>
+                        <a:t>49</a:t>
                       </a:r>
                     </a:p>
                   </a:txBody>
@@ -2289,45 +2289,45 @@
                         <a:rPr lang="es-PE" sz="1050">
                           <a:latin typeface="Calibri"/>
                         </a:rPr>
-                        <a:t>QUILLABAMBA-ESSALUD</a:t>
-                      </a:r>
-                    </a:p>
-                  </a:txBody>
-                  <a:tcPr>
-                    <a:solidFill>
-                      <a:srgbClr val="FFFFFF"/>
-                    </a:solidFill>
-                  </a:tcPr>
-                </a:tc>
-                <a:tc>
-                  <a:txBody>
-                    <a:bodyPr/>
-                    <a:lstStyle/>
-                    <a:p>
-                      <a:r>
-                        <a:rPr lang="es-PE" sz="1050">
-                          <a:latin typeface="Calibri"/>
-                        </a:rPr>
-                        <a:t>204</a:t>
-                      </a:r>
-                    </a:p>
-                  </a:txBody>
-                  <a:tcPr>
-                    <a:solidFill>
-                      <a:srgbClr val="FFFFFF"/>
-                    </a:solidFill>
-                  </a:tcPr>
-                </a:tc>
-                <a:tc>
-                  <a:txBody>
-                    <a:bodyPr/>
-                    <a:lstStyle/>
-                    <a:p>
-                      <a:r>
-                        <a:rPr lang="es-PE" sz="1050">
-                          <a:latin typeface="Calibri"/>
-                        </a:rPr>
-                        <a:t>7 h 04 min</a:t>
+                        <a:t>HOSPITAL DE ESPINAR</a:t>
+                      </a:r>
+                    </a:p>
+                  </a:txBody>
+                  <a:tcPr>
+                    <a:solidFill>
+                      <a:srgbClr val="FFFFFF"/>
+                    </a:solidFill>
+                  </a:tcPr>
+                </a:tc>
+                <a:tc>
+                  <a:txBody>
+                    <a:bodyPr/>
+                    <a:lstStyle/>
+                    <a:p>
+                      <a:r>
+                        <a:rPr lang="es-PE" sz="1050">
+                          <a:latin typeface="Calibri"/>
+                        </a:rPr>
+                        <a:t>221</a:t>
+                      </a:r>
+                    </a:p>
+                  </a:txBody>
+                  <a:tcPr>
+                    <a:solidFill>
+                      <a:srgbClr val="FFFFFF"/>
+                    </a:solidFill>
+                  </a:tcPr>
+                </a:tc>
+                <a:tc>
+                  <a:txBody>
+                    <a:bodyPr/>
+                    <a:lstStyle/>
+                    <a:p>
+                      <a:r>
+                        <a:rPr lang="es-PE" sz="1050">
+                          <a:latin typeface="Calibri"/>
+                        </a:rPr>
+                        <a:t>6 h 09 min</a:t>
                       </a:r>
                     </a:p>
                   </a:txBody>
@@ -2372,83 +2372,83 @@
                         <a:rPr lang="es-PE" sz="1050">
                           <a:latin typeface="Calibri"/>
                         </a:rPr>
-                        <a:t>57</a:t>
-                      </a:r>
-                    </a:p>
-                  </a:txBody>
-                  <a:tcPr>
-                    <a:solidFill>
-                      <a:srgbClr val="EEF1F6"/>
-                    </a:solidFill>
-                  </a:tcPr>
-                </a:tc>
-                <a:tc>
-                  <a:txBody>
-                    <a:bodyPr/>
-                    <a:lstStyle/>
-                    <a:p>
-                      <a:r>
-                        <a:rPr lang="es-PE" sz="1050">
-                          <a:latin typeface="Calibri"/>
-                        </a:rPr>
-                        <a:t>Hospital Antonio Lorena d…</a:t>
-                      </a:r>
-                    </a:p>
-                  </a:txBody>
-                  <a:tcPr>
-                    <a:solidFill>
-                      <a:srgbClr val="EEF1F6"/>
-                    </a:solidFill>
-                  </a:tcPr>
-                </a:tc>
-                <a:tc>
-                  <a:txBody>
-                    <a:bodyPr/>
-                    <a:lstStyle/>
-                    <a:p>
-                      <a:r>
-                        <a:rPr lang="es-PE" sz="1050">
-                          <a:latin typeface="Calibri"/>
-                        </a:rPr>
-                        <a:t>SR DE TORRECHAYOC</a:t>
-                      </a:r>
-                    </a:p>
-                  </a:txBody>
-                  <a:tcPr>
-                    <a:solidFill>
-                      <a:srgbClr val="EEF1F6"/>
-                    </a:solidFill>
-                  </a:tcPr>
-                </a:tc>
-                <a:tc>
-                  <a:txBody>
-                    <a:bodyPr/>
-                    <a:lstStyle/>
-                    <a:p>
-                      <a:r>
-                        <a:rPr lang="es-PE" sz="1050">
-                          <a:latin typeface="Calibri"/>
-                        </a:rPr>
-                        <a:t>203</a:t>
-                      </a:r>
-                    </a:p>
-                  </a:txBody>
-                  <a:tcPr>
-                    <a:solidFill>
-                      <a:srgbClr val="EEF1F6"/>
-                    </a:solidFill>
-                  </a:tcPr>
-                </a:tc>
-                <a:tc>
-                  <a:txBody>
-                    <a:bodyPr/>
-                    <a:lstStyle/>
-                    <a:p>
-                      <a:r>
-                        <a:rPr lang="es-PE" sz="1050">
-                          <a:latin typeface="Calibri"/>
-                        </a:rPr>
-                        <a:t>7 h 01 min</a:t>
+                        <a:t>40</a:t>
+                      </a:r>
+                    </a:p>
+                  </a:txBody>
+                  <a:tcPr>
+                    <a:solidFill>
+                      <a:srgbClr val="EEF1F6"/>
+                    </a:solidFill>
+                  </a:tcPr>
+                </a:tc>
+                <a:tc>
+                  <a:txBody>
+                    <a:bodyPr/>
+                    <a:lstStyle/>
+                    <a:p>
+                      <a:r>
+                        <a:rPr lang="es-PE" sz="1050">
+                          <a:latin typeface="Calibri"/>
+                        </a:rPr>
+                        <a:t>Hospital Regional de Ayac…</a:t>
+                      </a:r>
+                    </a:p>
+                  </a:txBody>
+                  <a:tcPr>
+                    <a:solidFill>
+                      <a:srgbClr val="EEF1F6"/>
+                    </a:solidFill>
+                  </a:tcPr>
+                </a:tc>
+                <a:tc>
+                  <a:txBody>
+                    <a:bodyPr/>
+                    <a:lstStyle/>
+                    <a:p>
+                      <a:r>
+                        <a:rPr lang="es-PE" sz="1050">
+                          <a:latin typeface="Calibri"/>
+                        </a:rPr>
+                        <a:t>SAN JUAN DE KIMBIRI-VRAEM</a:t>
+                      </a:r>
+                    </a:p>
+                  </a:txBody>
+                  <a:tcPr>
+                    <a:solidFill>
+                      <a:srgbClr val="EEF1F6"/>
+                    </a:solidFill>
+                  </a:tcPr>
+                </a:tc>
+                <a:tc>
+                  <a:txBody>
+                    <a:bodyPr/>
+                    <a:lstStyle/>
+                    <a:p>
+                      <a:r>
+                        <a:rPr lang="es-PE" sz="1050">
+                          <a:latin typeface="Calibri"/>
+                        </a:rPr>
+                        <a:t>186</a:t>
+                      </a:r>
+                    </a:p>
+                  </a:txBody>
+                  <a:tcPr>
+                    <a:solidFill>
+                      <a:srgbClr val="EEF1F6"/>
+                    </a:solidFill>
+                  </a:tcPr>
+                </a:tc>
+                <a:tc>
+                  <a:txBody>
+                    <a:bodyPr/>
+                    <a:lstStyle/>
+                    <a:p>
+                      <a:r>
+                        <a:rPr lang="es-PE" sz="1050">
+                          <a:latin typeface="Calibri"/>
+                        </a:rPr>
+                        <a:t>6 h 04 min</a:t>
                       </a:r>
                     </a:p>
                   </a:txBody>
@@ -2493,83 +2493,83 @@
                         <a:rPr lang="es-PE" sz="1050">
                           <a:latin typeface="Calibri"/>
                         </a:rPr>
-                        <a:t>49</a:t>
-                      </a:r>
-                    </a:p>
-                  </a:txBody>
-                  <a:tcPr>
-                    <a:solidFill>
-                      <a:srgbClr val="FFFFFF"/>
-                    </a:solidFill>
-                  </a:tcPr>
-                </a:tc>
-                <a:tc>
-                  <a:txBody>
-                    <a:bodyPr/>
-                    <a:lstStyle/>
-                    <a:p>
-                      <a:r>
-                        <a:rPr lang="es-PE" sz="1050">
-                          <a:latin typeface="Calibri"/>
-                        </a:rPr>
-                        <a:t>Hospital Antonio Lorena d…</a:t>
-                      </a:r>
-                    </a:p>
-                  </a:txBody>
-                  <a:tcPr>
-                    <a:solidFill>
-                      <a:srgbClr val="FFFFFF"/>
-                    </a:solidFill>
-                  </a:tcPr>
-                </a:tc>
-                <a:tc>
-                  <a:txBody>
-                    <a:bodyPr/>
-                    <a:lstStyle/>
-                    <a:p>
-                      <a:r>
-                        <a:rPr lang="es-PE" sz="1050">
-                          <a:latin typeface="Calibri"/>
-                        </a:rPr>
-                        <a:t>HOSPITAL DE ESPINAR</a:t>
-                      </a:r>
-                    </a:p>
-                  </a:txBody>
-                  <a:tcPr>
-                    <a:solidFill>
-                      <a:srgbClr val="FFFFFF"/>
-                    </a:solidFill>
-                  </a:tcPr>
-                </a:tc>
-                <a:tc>
-                  <a:txBody>
-                    <a:bodyPr/>
-                    <a:lstStyle/>
-                    <a:p>
-                      <a:r>
-                        <a:rPr lang="es-PE" sz="1050">
-                          <a:latin typeface="Calibri"/>
-                        </a:rPr>
-                        <a:t>222</a:t>
-                      </a:r>
-                    </a:p>
-                  </a:txBody>
-                  <a:tcPr>
-                    <a:solidFill>
-                      <a:srgbClr val="FFFFFF"/>
-                    </a:solidFill>
-                  </a:tcPr>
-                </a:tc>
-                <a:tc>
-                  <a:txBody>
-                    <a:bodyPr/>
-                    <a:lstStyle/>
-                    <a:p>
-                      <a:r>
-                        <a:rPr lang="es-PE" sz="1050">
-                          <a:latin typeface="Calibri"/>
-                        </a:rPr>
-                        <a:t>6 h 12 min</a:t>
+                        <a:t>241</a:t>
+                      </a:r>
+                    </a:p>
+                  </a:txBody>
+                  <a:tcPr>
+                    <a:solidFill>
+                      <a:srgbClr val="FFFFFF"/>
+                    </a:solidFill>
+                  </a:tcPr>
+                </a:tc>
+                <a:tc>
+                  <a:txBody>
+                    <a:bodyPr/>
+                    <a:lstStyle/>
+                    <a:p>
+                      <a:r>
+                        <a:rPr lang="es-PE" sz="1050">
+                          <a:latin typeface="Calibri"/>
+                        </a:rPr>
+                        <a:t>HOSPITAL II PASCO</a:t>
+                      </a:r>
+                    </a:p>
+                  </a:txBody>
+                  <a:tcPr>
+                    <a:solidFill>
+                      <a:srgbClr val="FFFFFF"/>
+                    </a:solidFill>
+                  </a:tcPr>
+                </a:tc>
+                <a:tc>
+                  <a:txBody>
+                    <a:bodyPr/>
+                    <a:lstStyle/>
+                    <a:p>
+                      <a:r>
+                        <a:rPr lang="es-PE" sz="1050">
+                          <a:latin typeface="Calibri"/>
+                        </a:rPr>
+                        <a:t>HOSPITAL I OXAPAMPA</a:t>
+                      </a:r>
+                    </a:p>
+                  </a:txBody>
+                  <a:tcPr>
+                    <a:solidFill>
+                      <a:srgbClr val="FFFFFF"/>
+                    </a:solidFill>
+                  </a:tcPr>
+                </a:tc>
+                <a:tc>
+                  <a:txBody>
+                    <a:bodyPr/>
+                    <a:lstStyle/>
+                    <a:p>
+                      <a:r>
+                        <a:rPr lang="es-PE" sz="1050">
+                          <a:latin typeface="Calibri"/>
+                        </a:rPr>
+                        <a:t>175</a:t>
+                      </a:r>
+                    </a:p>
+                  </a:txBody>
+                  <a:tcPr>
+                    <a:solidFill>
+                      <a:srgbClr val="FFFFFF"/>
+                    </a:solidFill>
+                  </a:tcPr>
+                </a:tc>
+                <a:tc>
+                  <a:txBody>
+                    <a:bodyPr/>
+                    <a:lstStyle/>
+                    <a:p>
+                      <a:r>
+                        <a:rPr lang="es-PE" sz="1050">
+                          <a:latin typeface="Calibri"/>
+                        </a:rPr>
+                        <a:t>6 h 02 min</a:t>
                       </a:r>
                     </a:p>
                   </a:txBody>
@@ -2614,83 +2614,83 @@
                         <a:rPr lang="es-PE" sz="1050">
                           <a:latin typeface="Calibri"/>
                         </a:rPr>
-                        <a:t>241</a:t>
-                      </a:r>
-                    </a:p>
-                  </a:txBody>
-                  <a:tcPr>
-                    <a:solidFill>
-                      <a:srgbClr val="EEF1F6"/>
-                    </a:solidFill>
-                  </a:tcPr>
-                </a:tc>
-                <a:tc>
-                  <a:txBody>
-                    <a:bodyPr/>
-                    <a:lstStyle/>
-                    <a:p>
-                      <a:r>
-                        <a:rPr lang="es-PE" sz="1050">
-                          <a:latin typeface="Calibri"/>
-                        </a:rPr>
-                        <a:t>HOSPITAL II PASCO</a:t>
-                      </a:r>
-                    </a:p>
-                  </a:txBody>
-                  <a:tcPr>
-                    <a:solidFill>
-                      <a:srgbClr val="EEF1F6"/>
-                    </a:solidFill>
-                  </a:tcPr>
-                </a:tc>
-                <a:tc>
-                  <a:txBody>
-                    <a:bodyPr/>
-                    <a:lstStyle/>
-                    <a:p>
-                      <a:r>
-                        <a:rPr lang="es-PE" sz="1050">
-                          <a:latin typeface="Calibri"/>
-                        </a:rPr>
-                        <a:t>HOSPITAL I OXAPAMPA</a:t>
-                      </a:r>
-                    </a:p>
-                  </a:txBody>
-                  <a:tcPr>
-                    <a:solidFill>
-                      <a:srgbClr val="EEF1F6"/>
-                    </a:solidFill>
-                  </a:tcPr>
-                </a:tc>
-                <a:tc>
-                  <a:txBody>
-                    <a:bodyPr/>
-                    <a:lstStyle/>
-                    <a:p>
-                      <a:r>
-                        <a:rPr lang="es-PE" sz="1050">
-                          <a:latin typeface="Calibri"/>
-                        </a:rPr>
-                        <a:t>176</a:t>
-                      </a:r>
-                    </a:p>
-                  </a:txBody>
-                  <a:tcPr>
-                    <a:solidFill>
-                      <a:srgbClr val="EEF1F6"/>
-                    </a:solidFill>
-                  </a:tcPr>
-                </a:tc>
-                <a:tc>
-                  <a:txBody>
-                    <a:bodyPr/>
-                    <a:lstStyle/>
-                    <a:p>
-                      <a:r>
-                        <a:rPr lang="es-PE" sz="1050">
-                          <a:latin typeface="Calibri"/>
-                        </a:rPr>
-                        <a:t>6 h 04 min</a:t>
+                        <a:t>41</a:t>
+                      </a:r>
+                    </a:p>
+                  </a:txBody>
+                  <a:tcPr>
+                    <a:solidFill>
+                      <a:srgbClr val="EEF1F6"/>
+                    </a:solidFill>
+                  </a:tcPr>
+                </a:tc>
+                <a:tc>
+                  <a:txBody>
+                    <a:bodyPr/>
+                    <a:lstStyle/>
+                    <a:p>
+                      <a:r>
+                        <a:rPr lang="es-PE" sz="1050">
+                          <a:latin typeface="Calibri"/>
+                        </a:rPr>
+                        <a:t>Hospital Regional de Ayac…</a:t>
+                      </a:r>
+                    </a:p>
+                  </a:txBody>
+                  <a:tcPr>
+                    <a:solidFill>
+                      <a:srgbClr val="EEF1F6"/>
+                    </a:solidFill>
+                  </a:tcPr>
+                </a:tc>
+                <a:tc>
+                  <a:txBody>
+                    <a:bodyPr/>
+                    <a:lstStyle/>
+                    <a:p>
+                      <a:r>
+                        <a:rPr lang="es-PE" sz="1050">
+                          <a:latin typeface="Calibri"/>
+                        </a:rPr>
+                        <a:t>HOSPITAL DE APOYO SAN FRA…</a:t>
+                      </a:r>
+                    </a:p>
+                  </a:txBody>
+                  <a:tcPr>
+                    <a:solidFill>
+                      <a:srgbClr val="EEF1F6"/>
+                    </a:solidFill>
+                  </a:tcPr>
+                </a:tc>
+                <a:tc>
+                  <a:txBody>
+                    <a:bodyPr/>
+                    <a:lstStyle/>
+                    <a:p>
+                      <a:r>
+                        <a:rPr lang="es-PE" sz="1050">
+                          <a:latin typeface="Calibri"/>
+                        </a:rPr>
+                        <a:t>175</a:t>
+                      </a:r>
+                    </a:p>
+                  </a:txBody>
+                  <a:tcPr>
+                    <a:solidFill>
+                      <a:srgbClr val="EEF1F6"/>
+                    </a:solidFill>
+                  </a:tcPr>
+                </a:tc>
+                <a:tc>
+                  <a:txBody>
+                    <a:bodyPr/>
+                    <a:lstStyle/>
+                    <a:p>
+                      <a:r>
+                        <a:rPr lang="es-PE" sz="1050">
+                          <a:latin typeface="Calibri"/>
+                        </a:rPr>
+                        <a:t>5 h 25 min</a:t>
                       </a:r>
                     </a:p>
                   </a:txBody>
@@ -2787,7 +2787,7 @@
                 </a:solidFill>
                 <a:latin typeface="Calibri"/>
               </a:rPr>
-              <a:t>Via aerea - 20 convenios con opcion aerea (por tiempo)</a:t>
+              <a:t>Via aerea - 18 convenios con opcion aerea (por tiempo)</a:t>
             </a:r>
             <a:endParaRPr lang="es-PE" sz="2600"/>
           </a:p>
@@ -2995,7 +2995,7 @@
                         <a:rPr lang="es-PE" sz="1050">
                           <a:latin typeface="Calibri"/>
                         </a:rPr>
-                        <a:t>Juliaca (JUL) -&gt; LIM -&gt; Jaen (JAE)</a:t>
+                        <a:t>Juliaca (JUL) -&gt; LIM -&gt; Jaén (JAE)</a:t>
                       </a:r>
                     </a:p>
                   </a:txBody>
@@ -3033,7 +3033,7 @@
                         <a:rPr lang="es-PE" sz="1050">
                           <a:latin typeface="Calibri"/>
                         </a:rPr>
-                        <a:t>9 h 45 min</a:t>
+                        <a:t>9 h 08 min</a:t>
                       </a:r>
                     </a:p>
                   </a:txBody>
@@ -3078,83 +3078,83 @@
                         <a:rPr lang="es-PE" sz="1050">
                           <a:latin typeface="Calibri"/>
                         </a:rPr>
-                        <a:t>177</a:t>
-                      </a:r>
-                    </a:p>
-                  </a:txBody>
-                  <a:tcPr>
-                    <a:solidFill>
-                      <a:srgbClr val="EEF1F6"/>
-                    </a:solidFill>
-                  </a:tcPr>
-                </a:tc>
-                <a:tc>
-                  <a:txBody>
-                    <a:bodyPr/>
-                    <a:lstStyle/>
-                    <a:p>
-                      <a:r>
-                        <a:rPr lang="es-PE" sz="1050">
-                          <a:latin typeface="Calibri"/>
-                        </a:rPr>
-                        <a:t>Lima (LIM) -&gt; Huaraz (ATA)</a:t>
-                      </a:r>
-                    </a:p>
-                  </a:txBody>
-                  <a:tcPr>
-                    <a:solidFill>
-                      <a:srgbClr val="EEF1F6"/>
-                    </a:solidFill>
-                  </a:tcPr>
-                </a:tc>
-                <a:tc>
-                  <a:txBody>
-                    <a:bodyPr/>
-                    <a:lstStyle/>
-                    <a:p>
-                      <a:r>
-                        <a:rPr lang="es-PE" sz="1050">
-                          <a:latin typeface="Calibri"/>
-                        </a:rPr>
-                        <a:t>302</a:t>
-                      </a:r>
-                    </a:p>
-                  </a:txBody>
-                  <a:tcPr>
-                    <a:solidFill>
-                      <a:srgbClr val="EEF1F6"/>
-                    </a:solidFill>
-                  </a:tcPr>
-                </a:tc>
-                <a:tc>
-                  <a:txBody>
-                    <a:bodyPr/>
-                    <a:lstStyle/>
-                    <a:p>
-                      <a:r>
-                        <a:rPr lang="es-PE" sz="1050">
-                          <a:latin typeface="Calibri"/>
-                        </a:rPr>
-                        <a:t>9 h 34 min</a:t>
-                      </a:r>
-                    </a:p>
-                  </a:txBody>
-                  <a:tcPr>
-                    <a:solidFill>
-                      <a:srgbClr val="EEF1F6"/>
-                    </a:solidFill>
-                  </a:tcPr>
-                </a:tc>
-                <a:tc>
-                  <a:txBody>
-                    <a:bodyPr/>
-                    <a:lstStyle/>
-                    <a:p>
-                      <a:r>
-                        <a:rPr lang="es-PE" sz="1050">
-                          <a:latin typeface="Calibri"/>
-                        </a:rPr>
-                        <a:t>HOSPITAL BARRANCA CAJAT…</a:t>
+                        <a:t>69</a:t>
+                      </a:r>
+                    </a:p>
+                  </a:txBody>
+                  <a:tcPr>
+                    <a:solidFill>
+                      <a:srgbClr val="EEF1F6"/>
+                    </a:solidFill>
+                  </a:tcPr>
+                </a:tc>
+                <a:tc>
+                  <a:txBody>
+                    <a:bodyPr/>
+                    <a:lstStyle/>
+                    <a:p>
+                      <a:r>
+                        <a:rPr lang="es-PE" sz="1050">
+                          <a:latin typeface="Calibri"/>
+                        </a:rPr>
+                        <a:t>Jauja (JAU) -&gt; LIM -&gt; Ayacucho (AYP)</a:t>
+                      </a:r>
+                    </a:p>
+                  </a:txBody>
+                  <a:tcPr>
+                    <a:solidFill>
+                      <a:srgbClr val="EEF1F6"/>
+                    </a:solidFill>
+                  </a:tcPr>
+                </a:tc>
+                <a:tc>
+                  <a:txBody>
+                    <a:bodyPr/>
+                    <a:lstStyle/>
+                    <a:p>
+                      <a:r>
+                        <a:rPr lang="es-PE" sz="1050">
+                          <a:latin typeface="Calibri"/>
+                        </a:rPr>
+                        <a:t>520</a:t>
+                      </a:r>
+                    </a:p>
+                  </a:txBody>
+                  <a:tcPr>
+                    <a:solidFill>
+                      <a:srgbClr val="EEF1F6"/>
+                    </a:solidFill>
+                  </a:tcPr>
+                </a:tc>
+                <a:tc>
+                  <a:txBody>
+                    <a:bodyPr/>
+                    <a:lstStyle/>
+                    <a:p>
+                      <a:r>
+                        <a:rPr lang="es-PE" sz="1050">
+                          <a:latin typeface="Calibri"/>
+                        </a:rPr>
+                        <a:t>7 h 49 min</a:t>
+                      </a:r>
+                    </a:p>
+                  </a:txBody>
+                  <a:tcPr>
+                    <a:solidFill>
+                      <a:srgbClr val="EEF1F6"/>
+                    </a:solidFill>
+                  </a:tcPr>
+                </a:tc>
+                <a:tc>
+                  <a:txBody>
+                    <a:bodyPr/>
+                    <a:lstStyle/>
+                    <a:p>
+                      <a:r>
+                        <a:rPr lang="es-PE" sz="1050">
+                          <a:latin typeface="Calibri"/>
+                        </a:rPr>
+                        <a:t>HOSPITAL DE LIRCAY</a:t>
                       </a:r>
                     </a:p>
                   </a:txBody>
@@ -3237,7 +3237,7 @@
                         <a:rPr lang="es-PE" sz="1050">
                           <a:latin typeface="Calibri"/>
                         </a:rPr>
-                        <a:t>8 h 04 min</a:t>
+                        <a:t>7 h 42 min</a:t>
                       </a:r>
                     </a:p>
                   </a:txBody>
@@ -3282,7 +3282,7 @@
                         <a:rPr lang="es-PE" sz="1050">
                           <a:latin typeface="Calibri"/>
                         </a:rPr>
-                        <a:t>69</a:t>
+                        <a:t>68</a:t>
                       </a:r>
                     </a:p>
                   </a:txBody>
@@ -3339,26 +3339,26 @@
                         <a:rPr lang="es-PE" sz="1050">
                           <a:latin typeface="Calibri"/>
                         </a:rPr>
-                        <a:t>7 h 06 min</a:t>
-                      </a:r>
-                    </a:p>
-                  </a:txBody>
-                  <a:tcPr>
-                    <a:solidFill>
-                      <a:srgbClr val="EEF1F6"/>
-                    </a:solidFill>
-                  </a:tcPr>
-                </a:tc>
-                <a:tc>
-                  <a:txBody>
-                    <a:bodyPr/>
-                    <a:lstStyle/>
-                    <a:p>
-                      <a:r>
-                        <a:rPr lang="es-PE" sz="1050">
-                          <a:latin typeface="Calibri"/>
-                        </a:rPr>
-                        <a:t>HOSPITAL DE LIRCAY</a:t>
+                        <a:t>7 h 34 min</a:t>
+                      </a:r>
+                    </a:p>
+                  </a:txBody>
+                  <a:tcPr>
+                    <a:solidFill>
+                      <a:srgbClr val="EEF1F6"/>
+                    </a:solidFill>
+                  </a:tcPr>
+                </a:tc>
+                <a:tc>
+                  <a:txBody>
+                    <a:bodyPr/>
+                    <a:lstStyle/>
+                    <a:p>
+                      <a:r>
+                        <a:rPr lang="es-PE" sz="1050">
+                          <a:latin typeface="Calibri"/>
+                        </a:rPr>
+                        <a:t>HOSPITAL PROVINCIAL DE…</a:t>
                       </a:r>
                     </a:p>
                   </a:txBody>
@@ -3384,83 +3384,83 @@
                         <a:rPr lang="es-PE" sz="1050">
                           <a:latin typeface="Calibri"/>
                         </a:rPr>
-                        <a:t>102</a:t>
-                      </a:r>
-                    </a:p>
-                  </a:txBody>
-                  <a:tcPr>
-                    <a:solidFill>
-                      <a:srgbClr val="FFFFFF"/>
-                    </a:solidFill>
-                  </a:tcPr>
-                </a:tc>
-                <a:tc>
-                  <a:txBody>
-                    <a:bodyPr/>
-                    <a:lstStyle/>
-                    <a:p>
-                      <a:r>
-                        <a:rPr lang="es-PE" sz="1050">
-                          <a:latin typeface="Calibri"/>
-                        </a:rPr>
-                        <a:t>Trujillo (TRU) -&gt; LIM -&gt; Chiclayo (CIX)</a:t>
-                      </a:r>
-                    </a:p>
-                  </a:txBody>
-                  <a:tcPr>
-                    <a:solidFill>
-                      <a:srgbClr val="FFFFFF"/>
-                    </a:solidFill>
-                  </a:tcPr>
-                </a:tc>
-                <a:tc>
-                  <a:txBody>
-                    <a:bodyPr/>
-                    <a:lstStyle/>
-                    <a:p>
-                      <a:r>
-                        <a:rPr lang="es-PE" sz="1050">
-                          <a:latin typeface="Calibri"/>
-                        </a:rPr>
-                        <a:t>1,143</a:t>
-                      </a:r>
-                    </a:p>
-                  </a:txBody>
-                  <a:tcPr>
-                    <a:solidFill>
-                      <a:srgbClr val="FFFFFF"/>
-                    </a:solidFill>
-                  </a:tcPr>
-                </a:tc>
-                <a:tc>
-                  <a:txBody>
-                    <a:bodyPr/>
-                    <a:lstStyle/>
-                    <a:p>
-                      <a:r>
-                        <a:rPr lang="es-PE" sz="1050">
-                          <a:latin typeface="Calibri"/>
-                        </a:rPr>
-                        <a:t>6 h 57 min</a:t>
-                      </a:r>
-                    </a:p>
-                  </a:txBody>
-                  <a:tcPr>
-                    <a:solidFill>
-                      <a:srgbClr val="FFFFFF"/>
-                    </a:solidFill>
-                  </a:tcPr>
-                </a:tc>
-                <a:tc>
-                  <a:txBody>
-                    <a:bodyPr/>
-                    <a:lstStyle/>
-                    <a:p>
-                      <a:r>
-                        <a:rPr lang="es-PE" sz="1050">
-                          <a:latin typeface="Calibri"/>
-                        </a:rPr>
-                        <a:t>HOSPITAL TOMAS LA FORA</a:t>
+                        <a:t>177</a:t>
+                      </a:r>
+                    </a:p>
+                  </a:txBody>
+                  <a:tcPr>
+                    <a:solidFill>
+                      <a:srgbClr val="FFFFFF"/>
+                    </a:solidFill>
+                  </a:tcPr>
+                </a:tc>
+                <a:tc>
+                  <a:txBody>
+                    <a:bodyPr/>
+                    <a:lstStyle/>
+                    <a:p>
+                      <a:r>
+                        <a:rPr lang="es-PE" sz="1050">
+                          <a:latin typeface="Calibri"/>
+                        </a:rPr>
+                        <a:t>Lima (LIM) -&gt; Huaraz (Anta) (ATA)</a:t>
+                      </a:r>
+                    </a:p>
+                  </a:txBody>
+                  <a:tcPr>
+                    <a:solidFill>
+                      <a:srgbClr val="FFFFFF"/>
+                    </a:solidFill>
+                  </a:tcPr>
+                </a:tc>
+                <a:tc>
+                  <a:txBody>
+                    <a:bodyPr/>
+                    <a:lstStyle/>
+                    <a:p>
+                      <a:r>
+                        <a:rPr lang="es-PE" sz="1050">
+                          <a:latin typeface="Calibri"/>
+                        </a:rPr>
+                        <a:t>302</a:t>
+                      </a:r>
+                    </a:p>
+                  </a:txBody>
+                  <a:tcPr>
+                    <a:solidFill>
+                      <a:srgbClr val="FFFFFF"/>
+                    </a:solidFill>
+                  </a:tcPr>
+                </a:tc>
+                <a:tc>
+                  <a:txBody>
+                    <a:bodyPr/>
+                    <a:lstStyle/>
+                    <a:p>
+                      <a:r>
+                        <a:rPr lang="es-PE" sz="1050">
+                          <a:latin typeface="Calibri"/>
+                        </a:rPr>
+                        <a:t>7 h 10 min</a:t>
+                      </a:r>
+                    </a:p>
+                  </a:txBody>
+                  <a:tcPr>
+                    <a:solidFill>
+                      <a:srgbClr val="FFFFFF"/>
+                    </a:solidFill>
+                  </a:tcPr>
+                </a:tc>
+                <a:tc>
+                  <a:txBody>
+                    <a:bodyPr/>
+                    <a:lstStyle/>
+                    <a:p>
+                      <a:r>
+                        <a:rPr lang="es-PE" sz="1050">
+                          <a:latin typeface="Calibri"/>
+                        </a:rPr>
+                        <a:t>HOSPITAL BARRANCA CAJAT…</a:t>
                       </a:r>
                     </a:p>
                   </a:txBody>
@@ -3486,83 +3486,83 @@
                         <a:rPr lang="es-PE" sz="1050">
                           <a:latin typeface="Calibri"/>
                         </a:rPr>
-                        <a:t>68</a:t>
-                      </a:r>
-                    </a:p>
-                  </a:txBody>
-                  <a:tcPr>
-                    <a:solidFill>
-                      <a:srgbClr val="EEF1F6"/>
-                    </a:solidFill>
-                  </a:tcPr>
-                </a:tc>
-                <a:tc>
-                  <a:txBody>
-                    <a:bodyPr/>
-                    <a:lstStyle/>
-                    <a:p>
-                      <a:r>
-                        <a:rPr lang="es-PE" sz="1050">
-                          <a:latin typeface="Calibri"/>
-                        </a:rPr>
-                        <a:t>Jauja (JAU) -&gt; LIM -&gt; Ayacucho (AYP)</a:t>
-                      </a:r>
-                    </a:p>
-                  </a:txBody>
-                  <a:tcPr>
-                    <a:solidFill>
-                      <a:srgbClr val="EEF1F6"/>
-                    </a:solidFill>
-                  </a:tcPr>
-                </a:tc>
-                <a:tc>
-                  <a:txBody>
-                    <a:bodyPr/>
-                    <a:lstStyle/>
-                    <a:p>
-                      <a:r>
-                        <a:rPr lang="es-PE" sz="1050">
-                          <a:latin typeface="Calibri"/>
-                        </a:rPr>
-                        <a:t>520</a:t>
-                      </a:r>
-                    </a:p>
-                  </a:txBody>
-                  <a:tcPr>
-                    <a:solidFill>
-                      <a:srgbClr val="EEF1F6"/>
-                    </a:solidFill>
-                  </a:tcPr>
-                </a:tc>
-                <a:tc>
-                  <a:txBody>
-                    <a:bodyPr/>
-                    <a:lstStyle/>
-                    <a:p>
-                      <a:r>
-                        <a:rPr lang="es-PE" sz="1050">
-                          <a:latin typeface="Calibri"/>
-                        </a:rPr>
-                        <a:t>6 h 54 min</a:t>
-                      </a:r>
-                    </a:p>
-                  </a:txBody>
-                  <a:tcPr>
-                    <a:solidFill>
-                      <a:srgbClr val="EEF1F6"/>
-                    </a:solidFill>
-                  </a:tcPr>
-                </a:tc>
-                <a:tc>
-                  <a:txBody>
-                    <a:bodyPr/>
-                    <a:lstStyle/>
-                    <a:p>
-                      <a:r>
-                        <a:rPr lang="es-PE" sz="1050">
-                          <a:latin typeface="Calibri"/>
-                        </a:rPr>
-                        <a:t>HOSPITAL PROVINCIAL DE…</a:t>
+                        <a:t>102</a:t>
+                      </a:r>
+                    </a:p>
+                  </a:txBody>
+                  <a:tcPr>
+                    <a:solidFill>
+                      <a:srgbClr val="EEF1F6"/>
+                    </a:solidFill>
+                  </a:tcPr>
+                </a:tc>
+                <a:tc>
+                  <a:txBody>
+                    <a:bodyPr/>
+                    <a:lstStyle/>
+                    <a:p>
+                      <a:r>
+                        <a:rPr lang="es-PE" sz="1050">
+                          <a:latin typeface="Calibri"/>
+                        </a:rPr>
+                        <a:t>Trujillo (TRU) -&gt; LIM -&gt; Chiclayo (CIX)</a:t>
+                      </a:r>
+                    </a:p>
+                  </a:txBody>
+                  <a:tcPr>
+                    <a:solidFill>
+                      <a:srgbClr val="EEF1F6"/>
+                    </a:solidFill>
+                  </a:tcPr>
+                </a:tc>
+                <a:tc>
+                  <a:txBody>
+                    <a:bodyPr/>
+                    <a:lstStyle/>
+                    <a:p>
+                      <a:r>
+                        <a:rPr lang="es-PE" sz="1050">
+                          <a:latin typeface="Calibri"/>
+                        </a:rPr>
+                        <a:t>1,143</a:t>
+                      </a:r>
+                    </a:p>
+                  </a:txBody>
+                  <a:tcPr>
+                    <a:solidFill>
+                      <a:srgbClr val="EEF1F6"/>
+                    </a:solidFill>
+                  </a:tcPr>
+                </a:tc>
+                <a:tc>
+                  <a:txBody>
+                    <a:bodyPr/>
+                    <a:lstStyle/>
+                    <a:p>
+                      <a:r>
+                        <a:rPr lang="es-PE" sz="1050">
+                          <a:latin typeface="Calibri"/>
+                        </a:rPr>
+                        <a:t>6 h 31 min</a:t>
+                      </a:r>
+                    </a:p>
+                  </a:txBody>
+                  <a:tcPr>
+                    <a:solidFill>
+                      <a:srgbClr val="EEF1F6"/>
+                    </a:solidFill>
+                  </a:tcPr>
+                </a:tc>
+                <a:tc>
+                  <a:txBody>
+                    <a:bodyPr/>
+                    <a:lstStyle/>
+                    <a:p>
+                      <a:r>
+                        <a:rPr lang="es-PE" sz="1050">
+                          <a:latin typeface="Calibri"/>
+                        </a:rPr>
+                        <a:t>HOSPITAL TOMAS LA FORA</a:t>
                       </a:r>
                     </a:p>
                   </a:txBody>
@@ -3588,7 +3588,7 @@
                         <a:rPr lang="es-PE" sz="1050">
                           <a:latin typeface="Calibri"/>
                         </a:rPr>
-                        <a:t>274</a:t>
+                        <a:t>263</a:t>
                       </a:r>
                     </a:p>
                   </a:txBody>
@@ -3645,26 +3645,26 @@
                         <a:rPr lang="es-PE" sz="1050">
                           <a:latin typeface="Calibri"/>
                         </a:rPr>
-                        <a:t>5 h 45 min</a:t>
-                      </a:r>
-                    </a:p>
-                  </a:txBody>
-                  <a:tcPr>
-                    <a:solidFill>
-                      <a:srgbClr val="FFFFFF"/>
-                    </a:solidFill>
-                  </a:tcPr>
-                </a:tc>
-                <a:tc>
-                  <a:txBody>
-                    <a:bodyPr/>
-                    <a:lstStyle/>
-                    <a:p>
-                      <a:r>
-                        <a:rPr lang="es-PE" sz="1050">
-                          <a:latin typeface="Calibri"/>
-                        </a:rPr>
-                        <a:t>CENTRO MEDICO LUZ DIVINA</a:t>
+                        <a:t>5 h 35 min</a:t>
+                      </a:r>
+                    </a:p>
+                  </a:txBody>
+                  <a:tcPr>
+                    <a:solidFill>
+                      <a:srgbClr val="FFFFFF"/>
+                    </a:solidFill>
+                  </a:tcPr>
+                </a:tc>
+                <a:tc>
+                  <a:txBody>
+                    <a:bodyPr/>
+                    <a:lstStyle/>
+                    <a:p>
+                      <a:r>
+                        <a:rPr lang="es-PE" sz="1050">
+                          <a:latin typeface="Calibri"/>
+                        </a:rPr>
+                        <a:t>HOSPITAL MOYOBAMBA</a:t>
                       </a:r>
                     </a:p>
                   </a:txBody>
@@ -3690,83 +3690,83 @@
                         <a:rPr lang="es-PE" sz="1050">
                           <a:latin typeface="Calibri"/>
                         </a:rPr>
-                        <a:t>24</a:t>
-                      </a:r>
-                    </a:p>
-                  </a:txBody>
-                  <a:tcPr>
-                    <a:solidFill>
-                      <a:srgbClr val="EEF1F6"/>
-                    </a:solidFill>
-                  </a:tcPr>
-                </a:tc>
-                <a:tc>
-                  <a:txBody>
-                    <a:bodyPr/>
-                    <a:lstStyle/>
-                    <a:p>
-                      <a:r>
-                        <a:rPr lang="es-PE" sz="1050">
-                          <a:latin typeface="Calibri"/>
-                        </a:rPr>
-                        <a:t>Arequipa (AQP) -&gt; LIM -&gt; Piura (PIU)</a:t>
-                      </a:r>
-                    </a:p>
-                  </a:txBody>
-                  <a:tcPr>
-                    <a:solidFill>
-                      <a:srgbClr val="EEF1F6"/>
-                    </a:solidFill>
-                  </a:tcPr>
-                </a:tc>
-                <a:tc>
-                  <a:txBody>
-                    <a:bodyPr/>
-                    <a:lstStyle/>
-                    <a:p>
-                      <a:r>
-                        <a:rPr lang="es-PE" sz="1050">
-                          <a:latin typeface="Calibri"/>
-                        </a:rPr>
-                        <a:t>1,616</a:t>
-                      </a:r>
-                    </a:p>
-                  </a:txBody>
-                  <a:tcPr>
-                    <a:solidFill>
-                      <a:srgbClr val="EEF1F6"/>
-                    </a:solidFill>
-                  </a:tcPr>
-                </a:tc>
-                <a:tc>
-                  <a:txBody>
-                    <a:bodyPr/>
-                    <a:lstStyle/>
-                    <a:p>
-                      <a:r>
-                        <a:rPr lang="es-PE" sz="1050">
-                          <a:latin typeface="Calibri"/>
-                        </a:rPr>
-                        <a:t>5 h 43 min</a:t>
-                      </a:r>
-                    </a:p>
-                  </a:txBody>
-                  <a:tcPr>
-                    <a:solidFill>
-                      <a:srgbClr val="EEF1F6"/>
-                    </a:solidFill>
-                  </a:tcPr>
-                </a:tc>
-                <a:tc>
-                  <a:txBody>
-                    <a:bodyPr/>
-                    <a:lstStyle/>
-                    <a:p>
-                      <a:r>
-                        <a:rPr lang="es-PE" sz="1050">
-                          <a:latin typeface="Calibri"/>
-                        </a:rPr>
-                        <a:t>Hospital Militar Divisi…</a:t>
+                        <a:t>274</a:t>
+                      </a:r>
+                    </a:p>
+                  </a:txBody>
+                  <a:tcPr>
+                    <a:solidFill>
+                      <a:srgbClr val="EEF1F6"/>
+                    </a:solidFill>
+                  </a:tcPr>
+                </a:tc>
+                <a:tc>
+                  <a:txBody>
+                    <a:bodyPr/>
+                    <a:lstStyle/>
+                    <a:p>
+                      <a:r>
+                        <a:rPr lang="es-PE" sz="1050">
+                          <a:latin typeface="Calibri"/>
+                        </a:rPr>
+                        <a:t>Tarapoto (TPP) -&gt; LIM -&gt; Rioja (RIJ)</a:t>
+                      </a:r>
+                    </a:p>
+                  </a:txBody>
+                  <a:tcPr>
+                    <a:solidFill>
+                      <a:srgbClr val="EEF1F6"/>
+                    </a:solidFill>
+                  </a:tcPr>
+                </a:tc>
+                <a:tc>
+                  <a:txBody>
+                    <a:bodyPr/>
+                    <a:lstStyle/>
+                    <a:p>
+                      <a:r>
+                        <a:rPr lang="es-PE" sz="1050">
+                          <a:latin typeface="Calibri"/>
+                        </a:rPr>
+                        <a:t>1,280</a:t>
+                      </a:r>
+                    </a:p>
+                  </a:txBody>
+                  <a:tcPr>
+                    <a:solidFill>
+                      <a:srgbClr val="EEF1F6"/>
+                    </a:solidFill>
+                  </a:tcPr>
+                </a:tc>
+                <a:tc>
+                  <a:txBody>
+                    <a:bodyPr/>
+                    <a:lstStyle/>
+                    <a:p>
+                      <a:r>
+                        <a:rPr lang="es-PE" sz="1050">
+                          <a:latin typeface="Calibri"/>
+                        </a:rPr>
+                        <a:t>5 h 33 min</a:t>
+                      </a:r>
+                    </a:p>
+                  </a:txBody>
+                  <a:tcPr>
+                    <a:solidFill>
+                      <a:srgbClr val="EEF1F6"/>
+                    </a:solidFill>
+                  </a:tcPr>
+                </a:tc>
+                <a:tc>
+                  <a:txBody>
+                    <a:bodyPr/>
+                    <a:lstStyle/>
+                    <a:p>
+                      <a:r>
+                        <a:rPr lang="es-PE" sz="1050">
+                          <a:latin typeface="Calibri"/>
+                        </a:rPr>
+                        <a:t>CENTRO MEDICO LUZ DIVINA</a:t>
                       </a:r>
                     </a:p>
                   </a:txBody>
@@ -3792,7 +3792,7 @@
                         <a:rPr lang="es-PE" sz="1050">
                           <a:latin typeface="Calibri"/>
                         </a:rPr>
-                        <a:t>263</a:t>
+                        <a:t>269</a:t>
                       </a:r>
                     </a:p>
                   </a:txBody>
@@ -3849,26 +3849,26 @@
                         <a:rPr lang="es-PE" sz="1050">
                           <a:latin typeface="Calibri"/>
                         </a:rPr>
-                        <a:t>5 h 43 min</a:t>
-                      </a:r>
-                    </a:p>
-                  </a:txBody>
-                  <a:tcPr>
-                    <a:solidFill>
-                      <a:srgbClr val="FFFFFF"/>
-                    </a:solidFill>
-                  </a:tcPr>
-                </a:tc>
-                <a:tc>
-                  <a:txBody>
-                    <a:bodyPr/>
-                    <a:lstStyle/>
-                    <a:p>
-                      <a:r>
-                        <a:rPr lang="es-PE" sz="1050">
-                          <a:latin typeface="Calibri"/>
-                        </a:rPr>
-                        <a:t>HOSPITAL MOYOBAMBA</a:t>
+                        <a:t>5 h 29 min</a:t>
+                      </a:r>
+                    </a:p>
+                  </a:txBody>
+                  <a:tcPr>
+                    <a:solidFill>
+                      <a:srgbClr val="FFFFFF"/>
+                    </a:solidFill>
+                  </a:tcPr>
+                </a:tc>
+                <a:tc>
+                  <a:txBody>
+                    <a:bodyPr/>
+                    <a:lstStyle/>
+                    <a:p>
+                      <a:r>
+                        <a:rPr lang="es-PE" sz="1050">
+                          <a:latin typeface="Calibri"/>
+                        </a:rPr>
+                        <a:t>CLINICA YANTALO -</a:t>
                       </a:r>
                     </a:p>
                   </a:txBody>
@@ -3894,7 +3894,7 @@
                         <a:rPr lang="es-PE" sz="1050">
                           <a:latin typeface="Calibri"/>
                         </a:rPr>
-                        <a:t>269</a:t>
+                        <a:t>260</a:t>
                       </a:r>
                     </a:p>
                   </a:txBody>
@@ -3951,26 +3951,26 @@
                         <a:rPr lang="es-PE" sz="1050">
                           <a:latin typeface="Calibri"/>
                         </a:rPr>
-                        <a:t>5 h 29 min</a:t>
-                      </a:r>
-                    </a:p>
-                  </a:txBody>
-                  <a:tcPr>
-                    <a:solidFill>
-                      <a:srgbClr val="EEF1F6"/>
-                    </a:solidFill>
-                  </a:tcPr>
-                </a:tc>
-                <a:tc>
-                  <a:txBody>
-                    <a:bodyPr/>
-                    <a:lstStyle/>
-                    <a:p>
-                      <a:r>
-                        <a:rPr lang="es-PE" sz="1050">
-                          <a:latin typeface="Calibri"/>
-                        </a:rPr>
-                        <a:t>CLINICA YANTALO -</a:t>
+                        <a:t>5 h 10 min</a:t>
+                      </a:r>
+                    </a:p>
+                  </a:txBody>
+                  <a:tcPr>
+                    <a:solidFill>
+                      <a:srgbClr val="EEF1F6"/>
+                    </a:solidFill>
+                  </a:tcPr>
+                </a:tc>
+                <a:tc>
+                  <a:txBody>
+                    <a:bodyPr/>
+                    <a:lstStyle/>
+                    <a:p>
+                      <a:r>
+                        <a:rPr lang="es-PE" sz="1050">
+                          <a:latin typeface="Calibri"/>
+                        </a:rPr>
+                        <a:t>Nombre comercial: Centr…</a:t>
                       </a:r>
                     </a:p>
                   </a:txBody>
@@ -4088,7 +4088,7 @@
                 </a:solidFill>
                 <a:latin typeface="Calibri"/>
               </a:rPr>
-              <a:t>La via aerea solo se evalua cuando origen y destino usan aeropuertos distintos con servicio comercial; por eso solo 20 de 278 convenios la tienen.</a:t>
+              <a:t>La via aerea solo se evalua cuando origen y destino usan aeropuertos distintos con servicio comercial; por eso solo 18 de 278 convenios la tienen.</a:t>
             </a:r>
             <a:endParaRPr lang="es-PE" sz="1500"/>
           </a:p>
@@ -4104,7 +4104,7 @@
                 </a:solidFill>
                 <a:latin typeface="Calibri"/>
               </a:rPr>
-              <a:t>Rutas largas reales donde el avion es la opcion sensata: Arequipa-Piura (AQP-PIU, 5 h 43), Juliaca-Jaen (JUL-JAE, 9 h 45), Trujillo-Chiclayo via Lima (6 h 57).</a:t>
+              <a:t>Rutas largas reales donde el avion es la opcion sensata (el terrestre de la misma fila es varias veces mas largo): Juliaca-Jaen (JUL-JAE, 9 h 08 vs 2 d 5 h por tierra), Lima-Piura (LIM-PIU, 2 h 44-2 h 48 vs 18 h 20-18 h 21 por tierra), Lima-Arequipa (LIM-AQP, 3 h 06 vs 17 h 36), Lima-Chiclayo (LIM-CIX, 2 h 39 vs 14 h 56), Trujillo-Lima (TRU-LIM, 2 h 38 vs 10 h 24).</a:t>
             </a:r>
             <a:endParaRPr lang="es-PE" sz="1500"/>
           </a:p>
@@ -4120,7 +4120,7 @@
                 </a:solidFill>
                 <a:latin typeface="Calibri"/>
               </a:rPr>
-              <a:t>Casos con numero alto pero poco realistas (mismo eje vial, se resuelven mejor por carretera): Tarapoto-Rioja y Jauja-Ayacucho, forzados a escala en Lima por falta de vuelo directo; Lima-Huaraz (LIM-ATA) sale 9 h 34 por el traslado terrestre al aeropuerto de Anta.</a:t>
+              <a:t>Casos con numero alto pero poco realistas (el terrestre de la misma fila es mas corto: el aeropuerto mas cercano queda lejos o exige escala en Lima): Jauja-Ayacucho (JAU-AYP, 7 h 34-7 h 49 vs 4 h 27-5 h 14 por tierra), Tacna-Ilo (TCQ-ILQ, 7 h 42 vs 3 h 36), Lima-Huaraz/Anta (LIM-ATA, 7 h 10 vs solo 1 h por tierra), Trujillo-Chiclayo via Lima (6 h 31 vs 2 h 35), Tarapoto-Rioja via Lima (5 h 10-5 h 35 vs 2 h 05-2 h 57).</a:t>
             </a:r>
             <a:endParaRPr lang="es-PE" sz="1400"/>
           </a:p>
@@ -4254,7 +4254,7 @@
                 </a:solidFill>
                 <a:latin typeface="Calibri"/>
               </a:rPr>
-              <a:t>En los 246 convenios geolocalizados, para cada par se busco un puerto fluvial navegable a &lt;=150 km de cada extremo y una ruta de rio entre ambos (red curada: Yurimaguas, Iquitos, Pucallpa, Nauta, Contamana, etc.).</a:t>
+              <a:t>En los 248 convenios geolocalizados, para cada par se busco un puerto fluvial navegable a &lt;=150 km de cada extremo y una ruta de rio entre ambos (red curada: Yurimaguas, Iquitos, Pucallpa, Nauta, Contamana, etc.).</a:t>
             </a:r>
             <a:endParaRPr lang="es-PE" sz="1500"/>
           </a:p>
@@ -4270,7 +4270,7 @@
                 </a:solidFill>
                 <a:latin typeface="Calibri"/>
               </a:rPr>
-              <a:t>Resultado: 229 convenios no tienen puerto navegable cerca de al menos un extremo; 17 (San Martin) tienen ambos extremos junto al mismo puerto. En todos hay carretera.</a:t>
+              <a:t>Resultado: 231 convenios no tienen puerto navegable cerca de al menos un extremo; 17 (San Martin) tienen ambos extremos junto al mismo puerto. En todos hay carretera.</a:t>
             </a:r>
             <a:endParaRPr lang="es-PE" sz="1500"/>
           </a:p>
@@ -4389,7 +4389,7 @@
                 </a:solidFill>
                 <a:latin typeface="Calibri"/>
               </a:rPr>
-              <a:t>El convenio con mayor tiempo terrestre es N 253: HOSPITAL CARLOS MONGE MEDRANO -&gt; SANTA MARIA DE NIEVA (2,546 km, 2 d 6 h).</a:t>
+              <a:t>El convenio con mayor tiempo terrestre es N 253: HOSPITAL CARLOS MONGE MEDRANO -&gt; SANTA MARIA DE NIEVA (2,546 km, 2 d 5 h).</a:t>
             </a:r>
             <a:endParaRPr lang="es-PE" sz="1500"/>
           </a:p>
@@ -4421,7 +4421,7 @@
                 </a:solidFill>
                 <a:latin typeface="Calibri"/>
               </a:rPr>
-              <a:t>Para los 20 convenios inter-regionales, la via aerea reduce el tiempo puerta a puerta frente al terrestre; en los demas el traslado es y debe seguir siendo por carretera.</a:t>
+              <a:t>De los 18 convenios con opcion aerea, en 5 el avion realmente reduce el tiempo puerta a puerta frente al terrestre (todos con Lima de por medio); en los demas el terrestre sigue siendo mas rapido pese a la distancia de vuelo. En los que no tienen opcion aerea el traslado es y debe seguir siendo por carretera.</a:t>
             </a:r>
             <a:endParaRPr lang="es-PE" sz="1500"/>
           </a:p>
@@ -4437,7 +4437,7 @@
                 </a:solidFill>
                 <a:latin typeface="Calibri"/>
               </a:rPr>
-              <a:t>Recomendaciones: (1) priorizar la actualizacion de ubicacion RENIPRESS de los 32 receptores sin dato; (2) revisar la pertinencia operativa de convenios con traslado terrestre &gt; 12 h; (3) el detalle fila a fila esta en el Excel adjunto.</a:t>
+              <a:t>Recomendaciones: (1) priorizar la actualizacion de ubicacion RENIPRESS de los 30 receptores sin dato; (2) revisar la pertinencia operativa de convenios con traslado terrestre &gt; 12 h; (3) el detalle fila a fila esta en el Excel adjunto.</a:t>
             </a:r>
             <a:endParaRPr lang="es-PE" sz="1400"/>
           </a:p>

--- a/datos/Resumen_tiempos_convenios_BS.pptx
+++ b/datos/Resumen_tiempos_convenios_BS.pptx
@@ -661,7 +661,7 @@
                 </a:solidFill>
                 <a:latin typeface="Calibri"/>
               </a:rPr>
-              <a:t>278 convenios evaluados (banco productor tipo II -&gt; hospital receptor tipo I).</a:t>
+              <a:t>277 convenios evaluados (banco productor tipo II -&gt; hospital receptor tipo I).</a:t>
             </a:r>
             <a:endParaRPr lang="es-PE" sz="1600"/>
           </a:p>
@@ -677,7 +677,7 @@
                 </a:solidFill>
                 <a:latin typeface="Calibri"/>
               </a:rPr>
-              <a:t>248 con ruta terrestre calculada. Ningun convenio resulto sin acceso por carretera.</a:t>
+              <a:t>247 con ruta terrestre calculada. Ningun convenio resulto sin acceso por carretera.</a:t>
             </a:r>
             <a:endParaRPr lang="es-PE" sz="1600"/>
           </a:p>
@@ -693,7 +693,7 @@
                 </a:solidFill>
                 <a:latin typeface="Calibri"/>
               </a:rPr>
-              <a:t>18 con opcion de via aerea util (origen y destino en ciudades con aeropuertos distintos).</a:t>
+              <a:t>17 con opcion de via aerea util (origen y destino en ciudades con aeropuertos distintos).</a:t>
             </a:r>
             <a:endParaRPr lang="es-PE" sz="1600"/>
           </a:p>
@@ -843,7 +843,7 @@
                 </a:solidFill>
                 <a:latin typeface="Calibri"/>
               </a:rPr>
-              <a:t>Distribucion de los 248 convenios por tiempo de traslado terrestre (auto particular):</a:t>
+              <a:t>Distribucion de los 247 convenios por tiempo de traslado terrestre (auto particular):</a:t>
             </a:r>
             <a:endParaRPr lang="es-PE" sz="1400"/>
           </a:p>
@@ -939,7 +939,7 @@
                 </a:solidFill>
                 <a:latin typeface="Calibri"/>
               </a:rPr>
-              <a:t>Mas de 24 h ......... 1</a:t>
+              <a:t>Mas de 24 h ......... 0</a:t>
             </a:r>
             <a:endParaRPr lang="es-PE" sz="1400"/>
           </a:p>
@@ -954,7 +954,7 @@
                 </a:solidFill>
                 <a:latin typeface="Calibri"/>
               </a:rPr>
-              <a:t>Conjunto completo (248 convenios): mediana 0 h 26 min, media 1 h 27 min.</a:t>
+              <a:t>Conjunto completo (247 convenios): mediana 0 h 26 min, media 1 h 15 min.</a:t>
             </a:r>
             <a:endParaRPr lang="es-PE" sz="1300"/>
           </a:p>
@@ -969,7 +969,7 @@
                 </a:solidFill>
                 <a:latin typeface="Calibri"/>
               </a:rPr>
-              <a:t>IPRESS con traslado terrestre mayor a 1 h: 59 convenios (24 % del total).</a:t>
+              <a:t>IPRESS con traslado terrestre mayor a 1 h: 58 convenios (23 % del total).</a:t>
             </a:r>
             <a:endParaRPr lang="es-PE" sz="1500"/>
           </a:p>
@@ -985,7 +985,7 @@
                 </a:solidFill>
                 <a:latin typeface="Calibri"/>
               </a:rPr>
-              <a:t>En ese grupo la mediana del tiempo de ruta es 2 h 30 min y la media es 4 h 52 min.</a:t>
+              <a:t>En ese grupo la mediana del tiempo de ruta es 2 h 29 min y la media es 4 h 02 min.</a:t>
             </a:r>
             <a:endParaRPr lang="es-PE" sz="1500"/>
           </a:p>
@@ -1000,7 +1000,7 @@
                 </a:solidFill>
                 <a:latin typeface="Calibri"/>
               </a:rPr>
-              <a:t>La media es mayor que la mediana porque unos pocos convenios inter-regionales de sierra y selva (12 h a 2 dias) elevan el promedio; para la mitad del grupo el traslado sigue por debajo de 2 h 30 min.</a:t>
+              <a:t>La media es mayor que la mediana porque unos pocos convenios inter-regionales de sierra y selva (12 h a 2 dias) elevan el promedio; para la mitad del grupo el traslado sigue por debajo de 2 h 29 min.</a:t>
             </a:r>
             <a:endParaRPr lang="es-PE" sz="1200"/>
           </a:p>
@@ -1283,102 +1283,102 @@
                         <a:rPr lang="es-PE" sz="1050">
                           <a:latin typeface="Calibri"/>
                         </a:rPr>
-                        <a:t>253</a:t>
-                      </a:r>
-                    </a:p>
-                  </a:txBody>
-                  <a:tcPr>
-                    <a:solidFill>
-                      <a:srgbClr val="FFFFFF"/>
-                    </a:solidFill>
-                  </a:tcPr>
-                </a:tc>
-                <a:tc>
-                  <a:txBody>
-                    <a:bodyPr/>
-                    <a:lstStyle/>
-                    <a:p>
-                      <a:r>
-                        <a:rPr lang="es-PE" sz="1050">
-                          <a:latin typeface="Calibri"/>
-                        </a:rPr>
-                        <a:t>HOSPITAL CARLOS MONGE MED…</a:t>
-                      </a:r>
-                    </a:p>
-                  </a:txBody>
-                  <a:tcPr>
-                    <a:solidFill>
-                      <a:srgbClr val="FFFFFF"/>
-                    </a:solidFill>
-                  </a:tcPr>
-                </a:tc>
-                <a:tc>
-                  <a:txBody>
-                    <a:bodyPr/>
-                    <a:lstStyle/>
-                    <a:p>
-                      <a:r>
-                        <a:rPr lang="es-PE" sz="1050">
-                          <a:latin typeface="Calibri"/>
-                        </a:rPr>
-                        <a:t>SANTA MARIA DE NIEVA</a:t>
-                      </a:r>
-                    </a:p>
-                  </a:txBody>
-                  <a:tcPr>
-                    <a:solidFill>
-                      <a:srgbClr val="FFFFFF"/>
-                    </a:solidFill>
-                  </a:tcPr>
-                </a:tc>
-                <a:tc>
-                  <a:txBody>
-                    <a:bodyPr/>
-                    <a:lstStyle/>
-                    <a:p>
-                      <a:r>
-                        <a:rPr lang="es-PE" sz="1050">
-                          <a:latin typeface="Calibri"/>
-                        </a:rPr>
-                        <a:t>2,546</a:t>
-                      </a:r>
-                    </a:p>
-                  </a:txBody>
-                  <a:tcPr>
-                    <a:solidFill>
-                      <a:srgbClr val="FFFFFF"/>
-                    </a:solidFill>
-                  </a:tcPr>
-                </a:tc>
-                <a:tc>
-                  <a:txBody>
-                    <a:bodyPr/>
-                    <a:lstStyle/>
-                    <a:p>
-                      <a:r>
-                        <a:rPr lang="es-PE" sz="1050">
-                          <a:latin typeface="Calibri"/>
-                        </a:rPr>
-                        <a:t>2 d 5 h</a:t>
-                      </a:r>
-                    </a:p>
-                  </a:txBody>
-                  <a:tcPr>
-                    <a:solidFill>
-                      <a:srgbClr val="FFFFFF"/>
-                    </a:solidFill>
-                  </a:tcPr>
-                </a:tc>
-                <a:tc>
-                  <a:txBody>
-                    <a:bodyPr/>
-                    <a:lstStyle/>
-                    <a:p>
-                      <a:r>
-                        <a:rPr lang="es-PE" sz="1050">
-                          <a:latin typeface="Calibri"/>
-                        </a:rPr>
-                        <a:t>paso de altura</a:t>
+                        <a:t>211</a:t>
+                      </a:r>
+                    </a:p>
+                  </a:txBody>
+                  <a:tcPr>
+                    <a:solidFill>
+                      <a:srgbClr val="FFFFFF"/>
+                    </a:solidFill>
+                  </a:tcPr>
+                </a:tc>
+                <a:tc>
+                  <a:txBody>
+                    <a:bodyPr/>
+                    <a:lstStyle/>
+                    <a:p>
+                      <a:r>
+                        <a:rPr lang="es-PE" sz="1050">
+                          <a:latin typeface="Calibri"/>
+                        </a:rPr>
+                        <a:t>MEDIC SER SAC -AUNA CLINI…</a:t>
+                      </a:r>
+                    </a:p>
+                  </a:txBody>
+                  <a:tcPr>
+                    <a:solidFill>
+                      <a:srgbClr val="FFFFFF"/>
+                    </a:solidFill>
+                  </a:tcPr>
+                </a:tc>
+                <a:tc>
+                  <a:txBody>
+                    <a:bodyPr/>
+                    <a:lstStyle/>
+                    <a:p>
+                      <a:r>
+                        <a:rPr lang="es-PE" sz="1050">
+                          <a:latin typeface="Calibri"/>
+                        </a:rPr>
+                        <a:t>CLÍNICAS AUNA SEDE PIURA -</a:t>
+                      </a:r>
+                    </a:p>
+                  </a:txBody>
+                  <a:tcPr>
+                    <a:solidFill>
+                      <a:srgbClr val="FFFFFF"/>
+                    </a:solidFill>
+                  </a:tcPr>
+                </a:tc>
+                <a:tc>
+                  <a:txBody>
+                    <a:bodyPr/>
+                    <a:lstStyle/>
+                    <a:p>
+                      <a:r>
+                        <a:rPr lang="es-PE" sz="1050">
+                          <a:latin typeface="Calibri"/>
+                        </a:rPr>
+                        <a:t>977</a:t>
+                      </a:r>
+                    </a:p>
+                  </a:txBody>
+                  <a:tcPr>
+                    <a:solidFill>
+                      <a:srgbClr val="FFFFFF"/>
+                    </a:solidFill>
+                  </a:tcPr>
+                </a:tc>
+                <a:tc>
+                  <a:txBody>
+                    <a:bodyPr/>
+                    <a:lstStyle/>
+                    <a:p>
+                      <a:r>
+                        <a:rPr lang="es-PE" sz="1050">
+                          <a:latin typeface="Calibri"/>
+                        </a:rPr>
+                        <a:t>18 h 21 min</a:t>
+                      </a:r>
+                    </a:p>
+                  </a:txBody>
+                  <a:tcPr>
+                    <a:solidFill>
+                      <a:srgbClr val="FFFFFF"/>
+                    </a:solidFill>
+                  </a:tcPr>
+                </a:tc>
+                <a:tc>
+                  <a:txBody>
+                    <a:bodyPr/>
+                    <a:lstStyle/>
+                    <a:p>
+                      <a:r>
+                        <a:rPr lang="es-PE" sz="1050">
+                          <a:latin typeface="Calibri"/>
+                        </a:rPr>
+                        <a:t>costa / llano</a:t>
                       </a:r>
                     </a:p>
                   </a:txBody>
@@ -1404,83 +1404,83 @@
                         <a:rPr lang="es-PE" sz="1050">
                           <a:latin typeface="Calibri"/>
                         </a:rPr>
-                        <a:t>211</a:t>
-                      </a:r>
-                    </a:p>
-                  </a:txBody>
-                  <a:tcPr>
-                    <a:solidFill>
-                      <a:srgbClr val="EEF1F6"/>
-                    </a:solidFill>
-                  </a:tcPr>
-                </a:tc>
-                <a:tc>
-                  <a:txBody>
-                    <a:bodyPr/>
-                    <a:lstStyle/>
-                    <a:p>
-                      <a:r>
-                        <a:rPr lang="es-PE" sz="1050">
-                          <a:latin typeface="Calibri"/>
-                        </a:rPr>
-                        <a:t>MEDIC SER SAC -AUNA CLINI…</a:t>
-                      </a:r>
-                    </a:p>
-                  </a:txBody>
-                  <a:tcPr>
-                    <a:solidFill>
-                      <a:srgbClr val="EEF1F6"/>
-                    </a:solidFill>
-                  </a:tcPr>
-                </a:tc>
-                <a:tc>
-                  <a:txBody>
-                    <a:bodyPr/>
-                    <a:lstStyle/>
-                    <a:p>
-                      <a:r>
-                        <a:rPr lang="es-PE" sz="1050">
-                          <a:latin typeface="Calibri"/>
-                        </a:rPr>
-                        <a:t>CLÍNICAS AUNA SEDE PIURA -</a:t>
-                      </a:r>
-                    </a:p>
-                  </a:txBody>
-                  <a:tcPr>
-                    <a:solidFill>
-                      <a:srgbClr val="EEF1F6"/>
-                    </a:solidFill>
-                  </a:tcPr>
-                </a:tc>
-                <a:tc>
-                  <a:txBody>
-                    <a:bodyPr/>
-                    <a:lstStyle/>
-                    <a:p>
-                      <a:r>
-                        <a:rPr lang="es-PE" sz="1050">
-                          <a:latin typeface="Calibri"/>
-                        </a:rPr>
-                        <a:t>977</a:t>
-                      </a:r>
-                    </a:p>
-                  </a:txBody>
-                  <a:tcPr>
-                    <a:solidFill>
-                      <a:srgbClr val="EEF1F6"/>
-                    </a:solidFill>
-                  </a:tcPr>
-                </a:tc>
-                <a:tc>
-                  <a:txBody>
-                    <a:bodyPr/>
-                    <a:lstStyle/>
-                    <a:p>
-                      <a:r>
-                        <a:rPr lang="es-PE" sz="1050">
-                          <a:latin typeface="Calibri"/>
-                        </a:rPr>
-                        <a:t>18 h 21 min</a:t>
+                        <a:t>226</a:t>
+                      </a:r>
+                    </a:p>
+                  </a:txBody>
+                  <a:tcPr>
+                    <a:solidFill>
+                      <a:srgbClr val="EEF1F6"/>
+                    </a:solidFill>
+                  </a:tcPr>
+                </a:tc>
+                <a:tc>
+                  <a:txBody>
+                    <a:bodyPr/>
+                    <a:lstStyle/>
+                    <a:p>
+                      <a:r>
+                        <a:rPr lang="es-PE" sz="1050">
+                          <a:latin typeface="Calibri"/>
+                        </a:rPr>
+                        <a:t>CLINICA SAN BORJA</a:t>
+                      </a:r>
+                    </a:p>
+                  </a:txBody>
+                  <a:tcPr>
+                    <a:solidFill>
+                      <a:srgbClr val="EEF1F6"/>
+                    </a:solidFill>
+                  </a:tcPr>
+                </a:tc>
+                <a:tc>
+                  <a:txBody>
+                    <a:bodyPr/>
+                    <a:lstStyle/>
+                    <a:p>
+                      <a:r>
+                        <a:rPr lang="es-PE" sz="1050">
+                          <a:latin typeface="Calibri"/>
+                        </a:rPr>
+                        <a:t>SANNA - CLINICA BELEN</a:t>
+                      </a:r>
+                    </a:p>
+                  </a:txBody>
+                  <a:tcPr>
+                    <a:solidFill>
+                      <a:srgbClr val="EEF1F6"/>
+                    </a:solidFill>
+                  </a:tcPr>
+                </a:tc>
+                <a:tc>
+                  <a:txBody>
+                    <a:bodyPr/>
+                    <a:lstStyle/>
+                    <a:p>
+                      <a:r>
+                        <a:rPr lang="es-PE" sz="1050">
+                          <a:latin typeface="Calibri"/>
+                        </a:rPr>
+                        <a:t>978</a:t>
+                      </a:r>
+                    </a:p>
+                  </a:txBody>
+                  <a:tcPr>
+                    <a:solidFill>
+                      <a:srgbClr val="EEF1F6"/>
+                    </a:solidFill>
+                  </a:tcPr>
+                </a:tc>
+                <a:tc>
+                  <a:txBody>
+                    <a:bodyPr/>
+                    <a:lstStyle/>
+                    <a:p>
+                      <a:r>
+                        <a:rPr lang="es-PE" sz="1050">
+                          <a:latin typeface="Calibri"/>
+                        </a:rPr>
+                        <a:t>18 h 20 min</a:t>
                       </a:r>
                     </a:p>
                   </a:txBody>
@@ -1525,102 +1525,102 @@
                         <a:rPr lang="es-PE" sz="1050">
                           <a:latin typeface="Calibri"/>
                         </a:rPr>
-                        <a:t>226</a:t>
-                      </a:r>
-                    </a:p>
-                  </a:txBody>
-                  <a:tcPr>
-                    <a:solidFill>
-                      <a:srgbClr val="FFFFFF"/>
-                    </a:solidFill>
-                  </a:tcPr>
-                </a:tc>
-                <a:tc>
-                  <a:txBody>
-                    <a:bodyPr/>
-                    <a:lstStyle/>
-                    <a:p>
-                      <a:r>
-                        <a:rPr lang="es-PE" sz="1050">
-                          <a:latin typeface="Calibri"/>
-                        </a:rPr>
-                        <a:t>CLINICA SAN BORJA</a:t>
-                      </a:r>
-                    </a:p>
-                  </a:txBody>
-                  <a:tcPr>
-                    <a:solidFill>
-                      <a:srgbClr val="FFFFFF"/>
-                    </a:solidFill>
-                  </a:tcPr>
-                </a:tc>
-                <a:tc>
-                  <a:txBody>
-                    <a:bodyPr/>
-                    <a:lstStyle/>
-                    <a:p>
-                      <a:r>
-                        <a:rPr lang="es-PE" sz="1050">
-                          <a:latin typeface="Calibri"/>
-                        </a:rPr>
-                        <a:t>SANNA - CLINICA BELEN</a:t>
-                      </a:r>
-                    </a:p>
-                  </a:txBody>
-                  <a:tcPr>
-                    <a:solidFill>
-                      <a:srgbClr val="FFFFFF"/>
-                    </a:solidFill>
-                  </a:tcPr>
-                </a:tc>
-                <a:tc>
-                  <a:txBody>
-                    <a:bodyPr/>
-                    <a:lstStyle/>
-                    <a:p>
-                      <a:r>
-                        <a:rPr lang="es-PE" sz="1050">
-                          <a:latin typeface="Calibri"/>
-                        </a:rPr>
-                        <a:t>978</a:t>
-                      </a:r>
-                    </a:p>
-                  </a:txBody>
-                  <a:tcPr>
-                    <a:solidFill>
-                      <a:srgbClr val="FFFFFF"/>
-                    </a:solidFill>
-                  </a:tcPr>
-                </a:tc>
-                <a:tc>
-                  <a:txBody>
-                    <a:bodyPr/>
-                    <a:lstStyle/>
-                    <a:p>
-                      <a:r>
-                        <a:rPr lang="es-PE" sz="1050">
-                          <a:latin typeface="Calibri"/>
-                        </a:rPr>
-                        <a:t>18 h 20 min</a:t>
-                      </a:r>
-                    </a:p>
-                  </a:txBody>
-                  <a:tcPr>
-                    <a:solidFill>
-                      <a:srgbClr val="FFFFFF"/>
-                    </a:solidFill>
-                  </a:tcPr>
-                </a:tc>
-                <a:tc>
-                  <a:txBody>
-                    <a:bodyPr/>
-                    <a:lstStyle/>
-                    <a:p>
-                      <a:r>
-                        <a:rPr lang="es-PE" sz="1050">
-                          <a:latin typeface="Calibri"/>
-                        </a:rPr>
-                        <a:t>costa / llano</a:t>
+                        <a:t>209</a:t>
+                      </a:r>
+                    </a:p>
+                  </a:txBody>
+                  <a:tcPr>
+                    <a:solidFill>
+                      <a:srgbClr val="FFFFFF"/>
+                    </a:solidFill>
+                  </a:tcPr>
+                </a:tc>
+                <a:tc>
+                  <a:txBody>
+                    <a:bodyPr/>
+                    <a:lstStyle/>
+                    <a:p>
+                      <a:r>
+                        <a:rPr lang="es-PE" sz="1050">
+                          <a:latin typeface="Calibri"/>
+                        </a:rPr>
+                        <a:t>MEDIC SER SAC -AUNA CLINI…</a:t>
+                      </a:r>
+                    </a:p>
+                  </a:txBody>
+                  <a:tcPr>
+                    <a:solidFill>
+                      <a:srgbClr val="FFFFFF"/>
+                    </a:solidFill>
+                  </a:tcPr>
+                </a:tc>
+                <a:tc>
+                  <a:txBody>
+                    <a:bodyPr/>
+                    <a:lstStyle/>
+                    <a:p>
+                      <a:r>
+                        <a:rPr lang="es-PE" sz="1050">
+                          <a:latin typeface="Calibri"/>
+                        </a:rPr>
+                        <a:t>CLINICAS AUNA SEDE VALLE…</a:t>
+                      </a:r>
+                    </a:p>
+                  </a:txBody>
+                  <a:tcPr>
+                    <a:solidFill>
+                      <a:srgbClr val="FFFFFF"/>
+                    </a:solidFill>
+                  </a:tcPr>
+                </a:tc>
+                <a:tc>
+                  <a:txBody>
+                    <a:bodyPr/>
+                    <a:lstStyle/>
+                    <a:p>
+                      <a:r>
+                        <a:rPr lang="es-PE" sz="1050">
+                          <a:latin typeface="Calibri"/>
+                        </a:rPr>
+                        <a:t>993</a:t>
+                      </a:r>
+                    </a:p>
+                  </a:txBody>
+                  <a:tcPr>
+                    <a:solidFill>
+                      <a:srgbClr val="FFFFFF"/>
+                    </a:solidFill>
+                  </a:tcPr>
+                </a:tc>
+                <a:tc>
+                  <a:txBody>
+                    <a:bodyPr/>
+                    <a:lstStyle/>
+                    <a:p>
+                      <a:r>
+                        <a:rPr lang="es-PE" sz="1050">
+                          <a:latin typeface="Calibri"/>
+                        </a:rPr>
+                        <a:t>17 h 36 min</a:t>
+                      </a:r>
+                    </a:p>
+                  </a:txBody>
+                  <a:tcPr>
+                    <a:solidFill>
+                      <a:srgbClr val="FFFFFF"/>
+                    </a:solidFill>
+                  </a:tcPr>
+                </a:tc>
+                <a:tc>
+                  <a:txBody>
+                    <a:bodyPr/>
+                    <a:lstStyle/>
+                    <a:p>
+                      <a:r>
+                        <a:rPr lang="es-PE" sz="1050">
+                          <a:latin typeface="Calibri"/>
+                        </a:rPr>
+                        <a:t>tramos de altura</a:t>
                       </a:r>
                     </a:p>
                   </a:txBody>
@@ -1646,7 +1646,7 @@
                         <a:rPr lang="es-PE" sz="1050">
                           <a:latin typeface="Calibri"/>
                         </a:rPr>
-                        <a:t>209</a:t>
+                        <a:t>212</a:t>
                       </a:r>
                     </a:p>
                   </a:txBody>
@@ -1684,64 +1684,64 @@
                         <a:rPr lang="es-PE" sz="1050">
                           <a:latin typeface="Calibri"/>
                         </a:rPr>
-                        <a:t>CLINICAS AUNA SEDE VALLE…</a:t>
-                      </a:r>
-                    </a:p>
-                  </a:txBody>
-                  <a:tcPr>
-                    <a:solidFill>
-                      <a:srgbClr val="EEF1F6"/>
-                    </a:solidFill>
-                  </a:tcPr>
-                </a:tc>
-                <a:tc>
-                  <a:txBody>
-                    <a:bodyPr/>
-                    <a:lstStyle/>
-                    <a:p>
-                      <a:r>
-                        <a:rPr lang="es-PE" sz="1050">
-                          <a:latin typeface="Calibri"/>
-                        </a:rPr>
-                        <a:t>993</a:t>
-                      </a:r>
-                    </a:p>
-                  </a:txBody>
-                  <a:tcPr>
-                    <a:solidFill>
-                      <a:srgbClr val="EEF1F6"/>
-                    </a:solidFill>
-                  </a:tcPr>
-                </a:tc>
-                <a:tc>
-                  <a:txBody>
-                    <a:bodyPr/>
-                    <a:lstStyle/>
-                    <a:p>
-                      <a:r>
-                        <a:rPr lang="es-PE" sz="1050">
-                          <a:latin typeface="Calibri"/>
-                        </a:rPr>
-                        <a:t>17 h 36 min</a:t>
-                      </a:r>
-                    </a:p>
-                  </a:txBody>
-                  <a:tcPr>
-                    <a:solidFill>
-                      <a:srgbClr val="EEF1F6"/>
-                    </a:solidFill>
-                  </a:tcPr>
-                </a:tc>
-                <a:tc>
-                  <a:txBody>
-                    <a:bodyPr/>
-                    <a:lstStyle/>
-                    <a:p>
-                      <a:r>
-                        <a:rPr lang="es-PE" sz="1050">
-                          <a:latin typeface="Calibri"/>
-                        </a:rPr>
-                        <a:t>tramos de altura</a:t>
+                        <a:t>GSP TRUJILLO</a:t>
+                      </a:r>
+                    </a:p>
+                  </a:txBody>
+                  <a:tcPr>
+                    <a:solidFill>
+                      <a:srgbClr val="EEF1F6"/>
+                    </a:solidFill>
+                  </a:tcPr>
+                </a:tc>
+                <a:tc>
+                  <a:txBody>
+                    <a:bodyPr/>
+                    <a:lstStyle/>
+                    <a:p>
+                      <a:r>
+                        <a:rPr lang="es-PE" sz="1050">
+                          <a:latin typeface="Calibri"/>
+                        </a:rPr>
+                        <a:t>764</a:t>
+                      </a:r>
+                    </a:p>
+                  </a:txBody>
+                  <a:tcPr>
+                    <a:solidFill>
+                      <a:srgbClr val="EEF1F6"/>
+                    </a:solidFill>
+                  </a:tcPr>
+                </a:tc>
+                <a:tc>
+                  <a:txBody>
+                    <a:bodyPr/>
+                    <a:lstStyle/>
+                    <a:p>
+                      <a:r>
+                        <a:rPr lang="es-PE" sz="1050">
+                          <a:latin typeface="Calibri"/>
+                        </a:rPr>
+                        <a:t>14 h 56 min</a:t>
+                      </a:r>
+                    </a:p>
+                  </a:txBody>
+                  <a:tcPr>
+                    <a:solidFill>
+                      <a:srgbClr val="EEF1F6"/>
+                    </a:solidFill>
+                  </a:tcPr>
+                </a:tc>
+                <a:tc>
+                  <a:txBody>
+                    <a:bodyPr/>
+                    <a:lstStyle/>
+                    <a:p>
+                      <a:r>
+                        <a:rPr lang="es-PE" sz="1050">
+                          <a:latin typeface="Calibri"/>
+                        </a:rPr>
+                        <a:t>costa / llano</a:t>
                       </a:r>
                     </a:p>
                   </a:txBody>
@@ -1767,83 +1767,83 @@
                         <a:rPr lang="es-PE" sz="1050">
                           <a:latin typeface="Calibri"/>
                         </a:rPr>
-                        <a:t>212</a:t>
-                      </a:r>
-                    </a:p>
-                  </a:txBody>
-                  <a:tcPr>
-                    <a:solidFill>
-                      <a:srgbClr val="FFFFFF"/>
-                    </a:solidFill>
-                  </a:tcPr>
-                </a:tc>
-                <a:tc>
-                  <a:txBody>
-                    <a:bodyPr/>
-                    <a:lstStyle/>
-                    <a:p>
-                      <a:r>
-                        <a:rPr lang="es-PE" sz="1050">
-                          <a:latin typeface="Calibri"/>
-                        </a:rPr>
-                        <a:t>MEDIC SER SAC -AUNA CLINI…</a:t>
-                      </a:r>
-                    </a:p>
-                  </a:txBody>
-                  <a:tcPr>
-                    <a:solidFill>
-                      <a:srgbClr val="FFFFFF"/>
-                    </a:solidFill>
-                  </a:tcPr>
-                </a:tc>
-                <a:tc>
-                  <a:txBody>
-                    <a:bodyPr/>
-                    <a:lstStyle/>
-                    <a:p>
-                      <a:r>
-                        <a:rPr lang="es-PE" sz="1050">
-                          <a:latin typeface="Calibri"/>
-                        </a:rPr>
-                        <a:t>GSP TRUJILLO</a:t>
-                      </a:r>
-                    </a:p>
-                  </a:txBody>
-                  <a:tcPr>
-                    <a:solidFill>
-                      <a:srgbClr val="FFFFFF"/>
-                    </a:solidFill>
-                  </a:tcPr>
-                </a:tc>
-                <a:tc>
-                  <a:txBody>
-                    <a:bodyPr/>
-                    <a:lstStyle/>
-                    <a:p>
-                      <a:r>
-                        <a:rPr lang="es-PE" sz="1050">
-                          <a:latin typeface="Calibri"/>
-                        </a:rPr>
-                        <a:t>764</a:t>
-                      </a:r>
-                    </a:p>
-                  </a:txBody>
-                  <a:tcPr>
-                    <a:solidFill>
-                      <a:srgbClr val="FFFFFF"/>
-                    </a:solidFill>
-                  </a:tcPr>
-                </a:tc>
-                <a:tc>
-                  <a:txBody>
-                    <a:bodyPr/>
-                    <a:lstStyle/>
-                    <a:p>
-                      <a:r>
-                        <a:rPr lang="es-PE" sz="1050">
-                          <a:latin typeface="Calibri"/>
-                        </a:rPr>
-                        <a:t>14 h 56 min</a:t>
+                        <a:t>100</a:t>
+                      </a:r>
+                    </a:p>
+                  </a:txBody>
+                  <a:tcPr>
+                    <a:solidFill>
+                      <a:srgbClr val="FFFFFF"/>
+                    </a:solidFill>
+                  </a:tcPr>
+                </a:tc>
+                <a:tc>
+                  <a:txBody>
+                    <a:bodyPr/>
+                    <a:lstStyle/>
+                    <a:p>
+                      <a:r>
+                        <a:rPr lang="es-PE" sz="1050">
+                          <a:latin typeface="Calibri"/>
+                        </a:rPr>
+                        <a:t>HOSPITAL REGIONAL DOCENTE…</a:t>
+                      </a:r>
+                    </a:p>
+                  </a:txBody>
+                  <a:tcPr>
+                    <a:solidFill>
+                      <a:srgbClr val="FFFFFF"/>
+                    </a:solidFill>
+                  </a:tcPr>
+                </a:tc>
+                <a:tc>
+                  <a:txBody>
+                    <a:bodyPr/>
+                    <a:lstStyle/>
+                    <a:p>
+                      <a:r>
+                        <a:rPr lang="es-PE" sz="1050">
+                          <a:latin typeface="Calibri"/>
+                        </a:rPr>
+                        <a:t>CLINICA CAMINO REAL</a:t>
+                      </a:r>
+                    </a:p>
+                  </a:txBody>
+                  <a:tcPr>
+                    <a:solidFill>
+                      <a:srgbClr val="FFFFFF"/>
+                    </a:solidFill>
+                  </a:tcPr>
+                </a:tc>
+                <a:tc>
+                  <a:txBody>
+                    <a:bodyPr/>
+                    <a:lstStyle/>
+                    <a:p>
+                      <a:r>
+                        <a:rPr lang="es-PE" sz="1050">
+                          <a:latin typeface="Calibri"/>
+                        </a:rPr>
+                        <a:t>559</a:t>
+                      </a:r>
+                    </a:p>
+                  </a:txBody>
+                  <a:tcPr>
+                    <a:solidFill>
+                      <a:srgbClr val="FFFFFF"/>
+                    </a:solidFill>
+                  </a:tcPr>
+                </a:tc>
+                <a:tc>
+                  <a:txBody>
+                    <a:bodyPr/>
+                    <a:lstStyle/>
+                    <a:p>
+                      <a:r>
+                        <a:rPr lang="es-PE" sz="1050">
+                          <a:latin typeface="Calibri"/>
+                        </a:rPr>
+                        <a:t>10 h 24 min</a:t>
                       </a:r>
                     </a:p>
                   </a:txBody>
@@ -1888,102 +1888,102 @@
                         <a:rPr lang="es-PE" sz="1050">
                           <a:latin typeface="Calibri"/>
                         </a:rPr>
-                        <a:t>100</a:t>
-                      </a:r>
-                    </a:p>
-                  </a:txBody>
-                  <a:tcPr>
-                    <a:solidFill>
-                      <a:srgbClr val="EEF1F6"/>
-                    </a:solidFill>
-                  </a:tcPr>
-                </a:tc>
-                <a:tc>
-                  <a:txBody>
-                    <a:bodyPr/>
-                    <a:lstStyle/>
-                    <a:p>
-                      <a:r>
-                        <a:rPr lang="es-PE" sz="1050">
-                          <a:latin typeface="Calibri"/>
-                        </a:rPr>
-                        <a:t>HOSPITAL REGIONAL DOCENTE…</a:t>
-                      </a:r>
-                    </a:p>
-                  </a:txBody>
-                  <a:tcPr>
-                    <a:solidFill>
-                      <a:srgbClr val="EEF1F6"/>
-                    </a:solidFill>
-                  </a:tcPr>
-                </a:tc>
-                <a:tc>
-                  <a:txBody>
-                    <a:bodyPr/>
-                    <a:lstStyle/>
-                    <a:p>
-                      <a:r>
-                        <a:rPr lang="es-PE" sz="1050">
-                          <a:latin typeface="Calibri"/>
-                        </a:rPr>
-                        <a:t>CLINICA CAMINO REAL</a:t>
-                      </a:r>
-                    </a:p>
-                  </a:txBody>
-                  <a:tcPr>
-                    <a:solidFill>
-                      <a:srgbClr val="EEF1F6"/>
-                    </a:solidFill>
-                  </a:tcPr>
-                </a:tc>
-                <a:tc>
-                  <a:txBody>
-                    <a:bodyPr/>
-                    <a:lstStyle/>
-                    <a:p>
-                      <a:r>
-                        <a:rPr lang="es-PE" sz="1050">
-                          <a:latin typeface="Calibri"/>
-                        </a:rPr>
-                        <a:t>559</a:t>
-                      </a:r>
-                    </a:p>
-                  </a:txBody>
-                  <a:tcPr>
-                    <a:solidFill>
-                      <a:srgbClr val="EEF1F6"/>
-                    </a:solidFill>
-                  </a:tcPr>
-                </a:tc>
-                <a:tc>
-                  <a:txBody>
-                    <a:bodyPr/>
-                    <a:lstStyle/>
-                    <a:p>
-                      <a:r>
-                        <a:rPr lang="es-PE" sz="1050">
-                          <a:latin typeface="Calibri"/>
-                        </a:rPr>
-                        <a:t>10 h 24 min</a:t>
-                      </a:r>
-                    </a:p>
-                  </a:txBody>
-                  <a:tcPr>
-                    <a:solidFill>
-                      <a:srgbClr val="EEF1F6"/>
-                    </a:solidFill>
-                  </a:tcPr>
-                </a:tc>
-                <a:tc>
-                  <a:txBody>
-                    <a:bodyPr/>
-                    <a:lstStyle/>
-                    <a:p>
-                      <a:r>
-                        <a:rPr lang="es-PE" sz="1050">
-                          <a:latin typeface="Calibri"/>
-                        </a:rPr>
-                        <a:t>costa / llano</a:t>
+                        <a:t>57</a:t>
+                      </a:r>
+                    </a:p>
+                  </a:txBody>
+                  <a:tcPr>
+                    <a:solidFill>
+                      <a:srgbClr val="EEF1F6"/>
+                    </a:solidFill>
+                  </a:tcPr>
+                </a:tc>
+                <a:tc>
+                  <a:txBody>
+                    <a:bodyPr/>
+                    <a:lstStyle/>
+                    <a:p>
+                      <a:r>
+                        <a:rPr lang="es-PE" sz="1050">
+                          <a:latin typeface="Calibri"/>
+                        </a:rPr>
+                        <a:t>Hospital Antonio Lorena d…</a:t>
+                      </a:r>
+                    </a:p>
+                  </a:txBody>
+                  <a:tcPr>
+                    <a:solidFill>
+                      <a:srgbClr val="EEF1F6"/>
+                    </a:solidFill>
+                  </a:tcPr>
+                </a:tc>
+                <a:tc>
+                  <a:txBody>
+                    <a:bodyPr/>
+                    <a:lstStyle/>
+                    <a:p>
+                      <a:r>
+                        <a:rPr lang="es-PE" sz="1050">
+                          <a:latin typeface="Calibri"/>
+                        </a:rPr>
+                        <a:t>SR DE TORRECHAYOC</a:t>
+                      </a:r>
+                    </a:p>
+                  </a:txBody>
+                  <a:tcPr>
+                    <a:solidFill>
+                      <a:srgbClr val="EEF1F6"/>
+                    </a:solidFill>
+                  </a:tcPr>
+                </a:tc>
+                <a:tc>
+                  <a:txBody>
+                    <a:bodyPr/>
+                    <a:lstStyle/>
+                    <a:p>
+                      <a:r>
+                        <a:rPr lang="es-PE" sz="1050">
+                          <a:latin typeface="Calibri"/>
+                        </a:rPr>
+                        <a:t>202</a:t>
+                      </a:r>
+                    </a:p>
+                  </a:txBody>
+                  <a:tcPr>
+                    <a:solidFill>
+                      <a:srgbClr val="EEF1F6"/>
+                    </a:solidFill>
+                  </a:tcPr>
+                </a:tc>
+                <a:tc>
+                  <a:txBody>
+                    <a:bodyPr/>
+                    <a:lstStyle/>
+                    <a:p>
+                      <a:r>
+                        <a:rPr lang="es-PE" sz="1050">
+                          <a:latin typeface="Calibri"/>
+                        </a:rPr>
+                        <a:t>6 h 57 min</a:t>
+                      </a:r>
+                    </a:p>
+                  </a:txBody>
+                  <a:tcPr>
+                    <a:solidFill>
+                      <a:srgbClr val="EEF1F6"/>
+                    </a:solidFill>
+                  </a:tcPr>
+                </a:tc>
+                <a:tc>
+                  <a:txBody>
+                    <a:bodyPr/>
+                    <a:lstStyle/>
+                    <a:p>
+                      <a:r>
+                        <a:rPr lang="es-PE" sz="1050">
+                          <a:latin typeface="Calibri"/>
+                        </a:rPr>
+                        <a:t>sierra alta sostenida</a:t>
                       </a:r>
                     </a:p>
                   </a:txBody>
@@ -2130,7 +2130,7 @@
                         <a:rPr lang="es-PE" sz="1050">
                           <a:latin typeface="Calibri"/>
                         </a:rPr>
-                        <a:t>57</a:t>
+                        <a:t>49</a:t>
                       </a:r>
                     </a:p>
                   </a:txBody>
@@ -2168,45 +2168,45 @@
                         <a:rPr lang="es-PE" sz="1050">
                           <a:latin typeface="Calibri"/>
                         </a:rPr>
-                        <a:t>SR DE TORRECHAYOC</a:t>
-                      </a:r>
-                    </a:p>
-                  </a:txBody>
-                  <a:tcPr>
-                    <a:solidFill>
-                      <a:srgbClr val="EEF1F6"/>
-                    </a:solidFill>
-                  </a:tcPr>
-                </a:tc>
-                <a:tc>
-                  <a:txBody>
-                    <a:bodyPr/>
-                    <a:lstStyle/>
-                    <a:p>
-                      <a:r>
-                        <a:rPr lang="es-PE" sz="1050">
-                          <a:latin typeface="Calibri"/>
-                        </a:rPr>
-                        <a:t>202</a:t>
-                      </a:r>
-                    </a:p>
-                  </a:txBody>
-                  <a:tcPr>
-                    <a:solidFill>
-                      <a:srgbClr val="EEF1F6"/>
-                    </a:solidFill>
-                  </a:tcPr>
-                </a:tc>
-                <a:tc>
-                  <a:txBody>
-                    <a:bodyPr/>
-                    <a:lstStyle/>
-                    <a:p>
-                      <a:r>
-                        <a:rPr lang="es-PE" sz="1050">
-                          <a:latin typeface="Calibri"/>
-                        </a:rPr>
-                        <a:t>6 h 57 min</a:t>
+                        <a:t>HOSPITAL DE ESPINAR</a:t>
+                      </a:r>
+                    </a:p>
+                  </a:txBody>
+                  <a:tcPr>
+                    <a:solidFill>
+                      <a:srgbClr val="EEF1F6"/>
+                    </a:solidFill>
+                  </a:tcPr>
+                </a:tc>
+                <a:tc>
+                  <a:txBody>
+                    <a:bodyPr/>
+                    <a:lstStyle/>
+                    <a:p>
+                      <a:r>
+                        <a:rPr lang="es-PE" sz="1050">
+                          <a:latin typeface="Calibri"/>
+                        </a:rPr>
+                        <a:t>221</a:t>
+                      </a:r>
+                    </a:p>
+                  </a:txBody>
+                  <a:tcPr>
+                    <a:solidFill>
+                      <a:srgbClr val="EEF1F6"/>
+                    </a:solidFill>
+                  </a:tcPr>
+                </a:tc>
+                <a:tc>
+                  <a:txBody>
+                    <a:bodyPr/>
+                    <a:lstStyle/>
+                    <a:p>
+                      <a:r>
+                        <a:rPr lang="es-PE" sz="1050">
+                          <a:latin typeface="Calibri"/>
+                        </a:rPr>
+                        <a:t>6 h 09 min</a:t>
                       </a:r>
                     </a:p>
                   </a:txBody>
@@ -2251,83 +2251,83 @@
                         <a:rPr lang="es-PE" sz="1050">
                           <a:latin typeface="Calibri"/>
                         </a:rPr>
-                        <a:t>49</a:t>
-                      </a:r>
-                    </a:p>
-                  </a:txBody>
-                  <a:tcPr>
-                    <a:solidFill>
-                      <a:srgbClr val="FFFFFF"/>
-                    </a:solidFill>
-                  </a:tcPr>
-                </a:tc>
-                <a:tc>
-                  <a:txBody>
-                    <a:bodyPr/>
-                    <a:lstStyle/>
-                    <a:p>
-                      <a:r>
-                        <a:rPr lang="es-PE" sz="1050">
-                          <a:latin typeface="Calibri"/>
-                        </a:rPr>
-                        <a:t>Hospital Antonio Lorena d…</a:t>
-                      </a:r>
-                    </a:p>
-                  </a:txBody>
-                  <a:tcPr>
-                    <a:solidFill>
-                      <a:srgbClr val="FFFFFF"/>
-                    </a:solidFill>
-                  </a:tcPr>
-                </a:tc>
-                <a:tc>
-                  <a:txBody>
-                    <a:bodyPr/>
-                    <a:lstStyle/>
-                    <a:p>
-                      <a:r>
-                        <a:rPr lang="es-PE" sz="1050">
-                          <a:latin typeface="Calibri"/>
-                        </a:rPr>
-                        <a:t>HOSPITAL DE ESPINAR</a:t>
-                      </a:r>
-                    </a:p>
-                  </a:txBody>
-                  <a:tcPr>
-                    <a:solidFill>
-                      <a:srgbClr val="FFFFFF"/>
-                    </a:solidFill>
-                  </a:tcPr>
-                </a:tc>
-                <a:tc>
-                  <a:txBody>
-                    <a:bodyPr/>
-                    <a:lstStyle/>
-                    <a:p>
-                      <a:r>
-                        <a:rPr lang="es-PE" sz="1050">
-                          <a:latin typeface="Calibri"/>
-                        </a:rPr>
-                        <a:t>221</a:t>
-                      </a:r>
-                    </a:p>
-                  </a:txBody>
-                  <a:tcPr>
-                    <a:solidFill>
-                      <a:srgbClr val="FFFFFF"/>
-                    </a:solidFill>
-                  </a:tcPr>
-                </a:tc>
-                <a:tc>
-                  <a:txBody>
-                    <a:bodyPr/>
-                    <a:lstStyle/>
-                    <a:p>
-                      <a:r>
-                        <a:rPr lang="es-PE" sz="1050">
-                          <a:latin typeface="Calibri"/>
-                        </a:rPr>
-                        <a:t>6 h 09 min</a:t>
+                        <a:t>40</a:t>
+                      </a:r>
+                    </a:p>
+                  </a:txBody>
+                  <a:tcPr>
+                    <a:solidFill>
+                      <a:srgbClr val="FFFFFF"/>
+                    </a:solidFill>
+                  </a:tcPr>
+                </a:tc>
+                <a:tc>
+                  <a:txBody>
+                    <a:bodyPr/>
+                    <a:lstStyle/>
+                    <a:p>
+                      <a:r>
+                        <a:rPr lang="es-PE" sz="1050">
+                          <a:latin typeface="Calibri"/>
+                        </a:rPr>
+                        <a:t>Hospital Regional de Ayac…</a:t>
+                      </a:r>
+                    </a:p>
+                  </a:txBody>
+                  <a:tcPr>
+                    <a:solidFill>
+                      <a:srgbClr val="FFFFFF"/>
+                    </a:solidFill>
+                  </a:tcPr>
+                </a:tc>
+                <a:tc>
+                  <a:txBody>
+                    <a:bodyPr/>
+                    <a:lstStyle/>
+                    <a:p>
+                      <a:r>
+                        <a:rPr lang="es-PE" sz="1050">
+                          <a:latin typeface="Calibri"/>
+                        </a:rPr>
+                        <a:t>SAN JUAN DE KIMBIRI-VRAEM</a:t>
+                      </a:r>
+                    </a:p>
+                  </a:txBody>
+                  <a:tcPr>
+                    <a:solidFill>
+                      <a:srgbClr val="FFFFFF"/>
+                    </a:solidFill>
+                  </a:tcPr>
+                </a:tc>
+                <a:tc>
+                  <a:txBody>
+                    <a:bodyPr/>
+                    <a:lstStyle/>
+                    <a:p>
+                      <a:r>
+                        <a:rPr lang="es-PE" sz="1050">
+                          <a:latin typeface="Calibri"/>
+                        </a:rPr>
+                        <a:t>186</a:t>
+                      </a:r>
+                    </a:p>
+                  </a:txBody>
+                  <a:tcPr>
+                    <a:solidFill>
+                      <a:srgbClr val="FFFFFF"/>
+                    </a:solidFill>
+                  </a:tcPr>
+                </a:tc>
+                <a:tc>
+                  <a:txBody>
+                    <a:bodyPr/>
+                    <a:lstStyle/>
+                    <a:p>
+                      <a:r>
+                        <a:rPr lang="es-PE" sz="1050">
+                          <a:latin typeface="Calibri"/>
+                        </a:rPr>
+                        <a:t>6 h 04 min</a:t>
                       </a:r>
                     </a:p>
                   </a:txBody>
@@ -2372,83 +2372,83 @@
                         <a:rPr lang="es-PE" sz="1050">
                           <a:latin typeface="Calibri"/>
                         </a:rPr>
-                        <a:t>40</a:t>
-                      </a:r>
-                    </a:p>
-                  </a:txBody>
-                  <a:tcPr>
-                    <a:solidFill>
-                      <a:srgbClr val="EEF1F6"/>
-                    </a:solidFill>
-                  </a:tcPr>
-                </a:tc>
-                <a:tc>
-                  <a:txBody>
-                    <a:bodyPr/>
-                    <a:lstStyle/>
-                    <a:p>
-                      <a:r>
-                        <a:rPr lang="es-PE" sz="1050">
-                          <a:latin typeface="Calibri"/>
-                        </a:rPr>
-                        <a:t>Hospital Regional de Ayac…</a:t>
-                      </a:r>
-                    </a:p>
-                  </a:txBody>
-                  <a:tcPr>
-                    <a:solidFill>
-                      <a:srgbClr val="EEF1F6"/>
-                    </a:solidFill>
-                  </a:tcPr>
-                </a:tc>
-                <a:tc>
-                  <a:txBody>
-                    <a:bodyPr/>
-                    <a:lstStyle/>
-                    <a:p>
-                      <a:r>
-                        <a:rPr lang="es-PE" sz="1050">
-                          <a:latin typeface="Calibri"/>
-                        </a:rPr>
-                        <a:t>SAN JUAN DE KIMBIRI-VRAEM</a:t>
-                      </a:r>
-                    </a:p>
-                  </a:txBody>
-                  <a:tcPr>
-                    <a:solidFill>
-                      <a:srgbClr val="EEF1F6"/>
-                    </a:solidFill>
-                  </a:tcPr>
-                </a:tc>
-                <a:tc>
-                  <a:txBody>
-                    <a:bodyPr/>
-                    <a:lstStyle/>
-                    <a:p>
-                      <a:r>
-                        <a:rPr lang="es-PE" sz="1050">
-                          <a:latin typeface="Calibri"/>
-                        </a:rPr>
-                        <a:t>186</a:t>
-                      </a:r>
-                    </a:p>
-                  </a:txBody>
-                  <a:tcPr>
-                    <a:solidFill>
-                      <a:srgbClr val="EEF1F6"/>
-                    </a:solidFill>
-                  </a:tcPr>
-                </a:tc>
-                <a:tc>
-                  <a:txBody>
-                    <a:bodyPr/>
-                    <a:lstStyle/>
-                    <a:p>
-                      <a:r>
-                        <a:rPr lang="es-PE" sz="1050">
-                          <a:latin typeface="Calibri"/>
-                        </a:rPr>
-                        <a:t>6 h 04 min</a:t>
+                        <a:t>241</a:t>
+                      </a:r>
+                    </a:p>
+                  </a:txBody>
+                  <a:tcPr>
+                    <a:solidFill>
+                      <a:srgbClr val="EEF1F6"/>
+                    </a:solidFill>
+                  </a:tcPr>
+                </a:tc>
+                <a:tc>
+                  <a:txBody>
+                    <a:bodyPr/>
+                    <a:lstStyle/>
+                    <a:p>
+                      <a:r>
+                        <a:rPr lang="es-PE" sz="1050">
+                          <a:latin typeface="Calibri"/>
+                        </a:rPr>
+                        <a:t>HOSPITAL II PASCO</a:t>
+                      </a:r>
+                    </a:p>
+                  </a:txBody>
+                  <a:tcPr>
+                    <a:solidFill>
+                      <a:srgbClr val="EEF1F6"/>
+                    </a:solidFill>
+                  </a:tcPr>
+                </a:tc>
+                <a:tc>
+                  <a:txBody>
+                    <a:bodyPr/>
+                    <a:lstStyle/>
+                    <a:p>
+                      <a:r>
+                        <a:rPr lang="es-PE" sz="1050">
+                          <a:latin typeface="Calibri"/>
+                        </a:rPr>
+                        <a:t>HOSPITAL I OXAPAMPA</a:t>
+                      </a:r>
+                    </a:p>
+                  </a:txBody>
+                  <a:tcPr>
+                    <a:solidFill>
+                      <a:srgbClr val="EEF1F6"/>
+                    </a:solidFill>
+                  </a:tcPr>
+                </a:tc>
+                <a:tc>
+                  <a:txBody>
+                    <a:bodyPr/>
+                    <a:lstStyle/>
+                    <a:p>
+                      <a:r>
+                        <a:rPr lang="es-PE" sz="1050">
+                          <a:latin typeface="Calibri"/>
+                        </a:rPr>
+                        <a:t>175</a:t>
+                      </a:r>
+                    </a:p>
+                  </a:txBody>
+                  <a:tcPr>
+                    <a:solidFill>
+                      <a:srgbClr val="EEF1F6"/>
+                    </a:solidFill>
+                  </a:tcPr>
+                </a:tc>
+                <a:tc>
+                  <a:txBody>
+                    <a:bodyPr/>
+                    <a:lstStyle/>
+                    <a:p>
+                      <a:r>
+                        <a:rPr lang="es-PE" sz="1050">
+                          <a:latin typeface="Calibri"/>
+                        </a:rPr>
+                        <a:t>6 h 02 min</a:t>
                       </a:r>
                     </a:p>
                   </a:txBody>
@@ -2493,45 +2493,45 @@
                         <a:rPr lang="es-PE" sz="1050">
                           <a:latin typeface="Calibri"/>
                         </a:rPr>
-                        <a:t>241</a:t>
-                      </a:r>
-                    </a:p>
-                  </a:txBody>
-                  <a:tcPr>
-                    <a:solidFill>
-                      <a:srgbClr val="FFFFFF"/>
-                    </a:solidFill>
-                  </a:tcPr>
-                </a:tc>
-                <a:tc>
-                  <a:txBody>
-                    <a:bodyPr/>
-                    <a:lstStyle/>
-                    <a:p>
-                      <a:r>
-                        <a:rPr lang="es-PE" sz="1050">
-                          <a:latin typeface="Calibri"/>
-                        </a:rPr>
-                        <a:t>HOSPITAL II PASCO</a:t>
-                      </a:r>
-                    </a:p>
-                  </a:txBody>
-                  <a:tcPr>
-                    <a:solidFill>
-                      <a:srgbClr val="FFFFFF"/>
-                    </a:solidFill>
-                  </a:tcPr>
-                </a:tc>
-                <a:tc>
-                  <a:txBody>
-                    <a:bodyPr/>
-                    <a:lstStyle/>
-                    <a:p>
-                      <a:r>
-                        <a:rPr lang="es-PE" sz="1050">
-                          <a:latin typeface="Calibri"/>
-                        </a:rPr>
-                        <a:t>HOSPITAL I OXAPAMPA</a:t>
+                        <a:t>41</a:t>
+                      </a:r>
+                    </a:p>
+                  </a:txBody>
+                  <a:tcPr>
+                    <a:solidFill>
+                      <a:srgbClr val="FFFFFF"/>
+                    </a:solidFill>
+                  </a:tcPr>
+                </a:tc>
+                <a:tc>
+                  <a:txBody>
+                    <a:bodyPr/>
+                    <a:lstStyle/>
+                    <a:p>
+                      <a:r>
+                        <a:rPr lang="es-PE" sz="1050">
+                          <a:latin typeface="Calibri"/>
+                        </a:rPr>
+                        <a:t>Hospital Regional de Ayac…</a:t>
+                      </a:r>
+                    </a:p>
+                  </a:txBody>
+                  <a:tcPr>
+                    <a:solidFill>
+                      <a:srgbClr val="FFFFFF"/>
+                    </a:solidFill>
+                  </a:tcPr>
+                </a:tc>
+                <a:tc>
+                  <a:txBody>
+                    <a:bodyPr/>
+                    <a:lstStyle/>
+                    <a:p>
+                      <a:r>
+                        <a:rPr lang="es-PE" sz="1050">
+                          <a:latin typeface="Calibri"/>
+                        </a:rPr>
+                        <a:t>HOSPITAL DE APOYO SAN FRA…</a:t>
                       </a:r>
                     </a:p>
                   </a:txBody>
@@ -2569,7 +2569,7 @@
                         <a:rPr lang="es-PE" sz="1050">
                           <a:latin typeface="Calibri"/>
                         </a:rPr>
-                        <a:t>6 h 02 min</a:t>
+                        <a:t>5 h 25 min</a:t>
                       </a:r>
                     </a:p>
                   </a:txBody>
@@ -2614,83 +2614,83 @@
                         <a:rPr lang="es-PE" sz="1050">
                           <a:latin typeface="Calibri"/>
                         </a:rPr>
-                        <a:t>41</a:t>
-                      </a:r>
-                    </a:p>
-                  </a:txBody>
-                  <a:tcPr>
-                    <a:solidFill>
-                      <a:srgbClr val="EEF1F6"/>
-                    </a:solidFill>
-                  </a:tcPr>
-                </a:tc>
-                <a:tc>
-                  <a:txBody>
-                    <a:bodyPr/>
-                    <a:lstStyle/>
-                    <a:p>
-                      <a:r>
-                        <a:rPr lang="es-PE" sz="1050">
-                          <a:latin typeface="Calibri"/>
-                        </a:rPr>
-                        <a:t>Hospital Regional de Ayac…</a:t>
-                      </a:r>
-                    </a:p>
-                  </a:txBody>
-                  <a:tcPr>
-                    <a:solidFill>
-                      <a:srgbClr val="EEF1F6"/>
-                    </a:solidFill>
-                  </a:tcPr>
-                </a:tc>
-                <a:tc>
-                  <a:txBody>
-                    <a:bodyPr/>
-                    <a:lstStyle/>
-                    <a:p>
-                      <a:r>
-                        <a:rPr lang="es-PE" sz="1050">
-                          <a:latin typeface="Calibri"/>
-                        </a:rPr>
-                        <a:t>HOSPITAL DE APOYO SAN FRA…</a:t>
-                      </a:r>
-                    </a:p>
-                  </a:txBody>
-                  <a:tcPr>
-                    <a:solidFill>
-                      <a:srgbClr val="EEF1F6"/>
-                    </a:solidFill>
-                  </a:tcPr>
-                </a:tc>
-                <a:tc>
-                  <a:txBody>
-                    <a:bodyPr/>
-                    <a:lstStyle/>
-                    <a:p>
-                      <a:r>
-                        <a:rPr lang="es-PE" sz="1050">
-                          <a:latin typeface="Calibri"/>
-                        </a:rPr>
-                        <a:t>175</a:t>
-                      </a:r>
-                    </a:p>
-                  </a:txBody>
-                  <a:tcPr>
-                    <a:solidFill>
-                      <a:srgbClr val="EEF1F6"/>
-                    </a:solidFill>
-                  </a:tcPr>
-                </a:tc>
-                <a:tc>
-                  <a:txBody>
-                    <a:bodyPr/>
-                    <a:lstStyle/>
-                    <a:p>
-                      <a:r>
-                        <a:rPr lang="es-PE" sz="1050">
-                          <a:latin typeface="Calibri"/>
-                        </a:rPr>
-                        <a:t>5 h 25 min</a:t>
+                        <a:t>51</a:t>
+                      </a:r>
+                    </a:p>
+                  </a:txBody>
+                  <a:tcPr>
+                    <a:solidFill>
+                      <a:srgbClr val="EEF1F6"/>
+                    </a:solidFill>
+                  </a:tcPr>
+                </a:tc>
+                <a:tc>
+                  <a:txBody>
+                    <a:bodyPr/>
+                    <a:lstStyle/>
+                    <a:p>
+                      <a:r>
+                        <a:rPr lang="es-PE" sz="1050">
+                          <a:latin typeface="Calibri"/>
+                        </a:rPr>
+                        <a:t>Hospital Antonio Lorena d…</a:t>
+                      </a:r>
+                    </a:p>
+                  </a:txBody>
+                  <a:tcPr>
+                    <a:solidFill>
+                      <a:srgbClr val="EEF1F6"/>
+                    </a:solidFill>
+                  </a:tcPr>
+                </a:tc>
+                <a:tc>
+                  <a:txBody>
+                    <a:bodyPr/>
+                    <a:lstStyle/>
+                    <a:p>
+                      <a:r>
+                        <a:rPr lang="es-PE" sz="1050">
+                          <a:latin typeface="Calibri"/>
+                        </a:rPr>
+                        <a:t>HOSPITAL DE SANTO TOMAS</a:t>
+                      </a:r>
+                    </a:p>
+                  </a:txBody>
+                  <a:tcPr>
+                    <a:solidFill>
+                      <a:srgbClr val="EEF1F6"/>
+                    </a:solidFill>
+                  </a:tcPr>
+                </a:tc>
+                <a:tc>
+                  <a:txBody>
+                    <a:bodyPr/>
+                    <a:lstStyle/>
+                    <a:p>
+                      <a:r>
+                        <a:rPr lang="es-PE" sz="1050">
+                          <a:latin typeface="Calibri"/>
+                        </a:rPr>
+                        <a:t>219</a:t>
+                      </a:r>
+                    </a:p>
+                  </a:txBody>
+                  <a:tcPr>
+                    <a:solidFill>
+                      <a:srgbClr val="EEF1F6"/>
+                    </a:solidFill>
+                  </a:tcPr>
+                </a:tc>
+                <a:tc>
+                  <a:txBody>
+                    <a:bodyPr/>
+                    <a:lstStyle/>
+                    <a:p>
+                      <a:r>
+                        <a:rPr lang="es-PE" sz="1050">
+                          <a:latin typeface="Calibri"/>
+                        </a:rPr>
+                        <a:t>5 h 21 min</a:t>
                       </a:r>
                     </a:p>
                   </a:txBody>
@@ -2787,7 +2787,7 @@
                 </a:solidFill>
                 <a:latin typeface="Calibri"/>
               </a:rPr>
-              <a:t>Via aerea - 18 convenios con opcion aerea (por tiempo)</a:t>
+              <a:t>Via aerea - 17 convenios con opcion aerea (por tiempo)</a:t>
             </a:r>
             <a:endParaRPr lang="es-PE" sz="2600"/>
           </a:p>
@@ -2976,83 +2976,83 @@
                         <a:rPr lang="es-PE" sz="1050">
                           <a:latin typeface="Calibri"/>
                         </a:rPr>
-                        <a:t>253</a:t>
-                      </a:r>
-                    </a:p>
-                  </a:txBody>
-                  <a:tcPr>
-                    <a:solidFill>
-                      <a:srgbClr val="FFFFFF"/>
-                    </a:solidFill>
-                  </a:tcPr>
-                </a:tc>
-                <a:tc>
-                  <a:txBody>
-                    <a:bodyPr/>
-                    <a:lstStyle/>
-                    <a:p>
-                      <a:r>
-                        <a:rPr lang="es-PE" sz="1050">
-                          <a:latin typeface="Calibri"/>
-                        </a:rPr>
-                        <a:t>Juliaca (JUL) -&gt; LIM -&gt; Jaén (JAE)</a:t>
-                      </a:r>
-                    </a:p>
-                  </a:txBody>
-                  <a:tcPr>
-                    <a:solidFill>
-                      <a:srgbClr val="FFFFFF"/>
-                    </a:solidFill>
-                  </a:tcPr>
-                </a:tc>
-                <a:tc>
-                  <a:txBody>
-                    <a:bodyPr/>
-                    <a:lstStyle/>
-                    <a:p>
-                      <a:r>
-                        <a:rPr lang="es-PE" sz="1050">
-                          <a:latin typeface="Calibri"/>
-                        </a:rPr>
-                        <a:t>1,581</a:t>
-                      </a:r>
-                    </a:p>
-                  </a:txBody>
-                  <a:tcPr>
-                    <a:solidFill>
-                      <a:srgbClr val="FFFFFF"/>
-                    </a:solidFill>
-                  </a:tcPr>
-                </a:tc>
-                <a:tc>
-                  <a:txBody>
-                    <a:bodyPr/>
-                    <a:lstStyle/>
-                    <a:p>
-                      <a:r>
-                        <a:rPr lang="es-PE" sz="1050">
-                          <a:latin typeface="Calibri"/>
-                        </a:rPr>
-                        <a:t>9 h 08 min</a:t>
-                      </a:r>
-                    </a:p>
-                  </a:txBody>
-                  <a:tcPr>
-                    <a:solidFill>
-                      <a:srgbClr val="FFFFFF"/>
-                    </a:solidFill>
-                  </a:tcPr>
-                </a:tc>
-                <a:tc>
-                  <a:txBody>
-                    <a:bodyPr/>
-                    <a:lstStyle/>
-                    <a:p>
-                      <a:r>
-                        <a:rPr lang="es-PE" sz="1050">
-                          <a:latin typeface="Calibri"/>
-                        </a:rPr>
-                        <a:t>SANTA MARIA DE NIEVA</a:t>
+                        <a:t>69</a:t>
+                      </a:r>
+                    </a:p>
+                  </a:txBody>
+                  <a:tcPr>
+                    <a:solidFill>
+                      <a:srgbClr val="FFFFFF"/>
+                    </a:solidFill>
+                  </a:tcPr>
+                </a:tc>
+                <a:tc>
+                  <a:txBody>
+                    <a:bodyPr/>
+                    <a:lstStyle/>
+                    <a:p>
+                      <a:r>
+                        <a:rPr lang="es-PE" sz="1050">
+                          <a:latin typeface="Calibri"/>
+                        </a:rPr>
+                        <a:t>Jauja (JAU) -&gt; LIM -&gt; Ayacucho (AYP)</a:t>
+                      </a:r>
+                    </a:p>
+                  </a:txBody>
+                  <a:tcPr>
+                    <a:solidFill>
+                      <a:srgbClr val="FFFFFF"/>
+                    </a:solidFill>
+                  </a:tcPr>
+                </a:tc>
+                <a:tc>
+                  <a:txBody>
+                    <a:bodyPr/>
+                    <a:lstStyle/>
+                    <a:p>
+                      <a:r>
+                        <a:rPr lang="es-PE" sz="1050">
+                          <a:latin typeface="Calibri"/>
+                        </a:rPr>
+                        <a:t>520</a:t>
+                      </a:r>
+                    </a:p>
+                  </a:txBody>
+                  <a:tcPr>
+                    <a:solidFill>
+                      <a:srgbClr val="FFFFFF"/>
+                    </a:solidFill>
+                  </a:tcPr>
+                </a:tc>
+                <a:tc>
+                  <a:txBody>
+                    <a:bodyPr/>
+                    <a:lstStyle/>
+                    <a:p>
+                      <a:r>
+                        <a:rPr lang="es-PE" sz="1050">
+                          <a:latin typeface="Calibri"/>
+                        </a:rPr>
+                        <a:t>7 h 49 min</a:t>
+                      </a:r>
+                    </a:p>
+                  </a:txBody>
+                  <a:tcPr>
+                    <a:solidFill>
+                      <a:srgbClr val="FFFFFF"/>
+                    </a:solidFill>
+                  </a:tcPr>
+                </a:tc>
+                <a:tc>
+                  <a:txBody>
+                    <a:bodyPr/>
+                    <a:lstStyle/>
+                    <a:p>
+                      <a:r>
+                        <a:rPr lang="es-PE" sz="1050">
+                          <a:latin typeface="Calibri"/>
+                        </a:rPr>
+                        <a:t>HOSPITAL DE LIRCAY</a:t>
                       </a:r>
                     </a:p>
                   </a:txBody>
@@ -3078,83 +3078,83 @@
                         <a:rPr lang="es-PE" sz="1050">
                           <a:latin typeface="Calibri"/>
                         </a:rPr>
-                        <a:t>69</a:t>
-                      </a:r>
-                    </a:p>
-                  </a:txBody>
-                  <a:tcPr>
-                    <a:solidFill>
-                      <a:srgbClr val="EEF1F6"/>
-                    </a:solidFill>
-                  </a:tcPr>
-                </a:tc>
-                <a:tc>
-                  <a:txBody>
-                    <a:bodyPr/>
-                    <a:lstStyle/>
-                    <a:p>
-                      <a:r>
-                        <a:rPr lang="es-PE" sz="1050">
-                          <a:latin typeface="Calibri"/>
-                        </a:rPr>
-                        <a:t>Jauja (JAU) -&gt; LIM -&gt; Ayacucho (AYP)</a:t>
-                      </a:r>
-                    </a:p>
-                  </a:txBody>
-                  <a:tcPr>
-                    <a:solidFill>
-                      <a:srgbClr val="EEF1F6"/>
-                    </a:solidFill>
-                  </a:tcPr>
-                </a:tc>
-                <a:tc>
-                  <a:txBody>
-                    <a:bodyPr/>
-                    <a:lstStyle/>
-                    <a:p>
-                      <a:r>
-                        <a:rPr lang="es-PE" sz="1050">
-                          <a:latin typeface="Calibri"/>
-                        </a:rPr>
-                        <a:t>520</a:t>
-                      </a:r>
-                    </a:p>
-                  </a:txBody>
-                  <a:tcPr>
-                    <a:solidFill>
-                      <a:srgbClr val="EEF1F6"/>
-                    </a:solidFill>
-                  </a:tcPr>
-                </a:tc>
-                <a:tc>
-                  <a:txBody>
-                    <a:bodyPr/>
-                    <a:lstStyle/>
-                    <a:p>
-                      <a:r>
-                        <a:rPr lang="es-PE" sz="1050">
-                          <a:latin typeface="Calibri"/>
-                        </a:rPr>
-                        <a:t>7 h 49 min</a:t>
-                      </a:r>
-                    </a:p>
-                  </a:txBody>
-                  <a:tcPr>
-                    <a:solidFill>
-                      <a:srgbClr val="EEF1F6"/>
-                    </a:solidFill>
-                  </a:tcPr>
-                </a:tc>
-                <a:tc>
-                  <a:txBody>
-                    <a:bodyPr/>
-                    <a:lstStyle/>
-                    <a:p>
-                      <a:r>
-                        <a:rPr lang="es-PE" sz="1050">
-                          <a:latin typeface="Calibri"/>
-                        </a:rPr>
-                        <a:t>HOSPITAL DE LIRCAY</a:t>
+                        <a:t>278</a:t>
+                      </a:r>
+                    </a:p>
+                  </a:txBody>
+                  <a:tcPr>
+                    <a:solidFill>
+                      <a:srgbClr val="EEF1F6"/>
+                    </a:solidFill>
+                  </a:tcPr>
+                </a:tc>
+                <a:tc>
+                  <a:txBody>
+                    <a:bodyPr/>
+                    <a:lstStyle/>
+                    <a:p>
+                      <a:r>
+                        <a:rPr lang="es-PE" sz="1050">
+                          <a:latin typeface="Calibri"/>
+                        </a:rPr>
+                        <a:t>Tacna (TCQ) -&gt; LIM -&gt; Ilo (ILQ)</a:t>
+                      </a:r>
+                    </a:p>
+                  </a:txBody>
+                  <a:tcPr>
+                    <a:solidFill>
+                      <a:srgbClr val="EEF1F6"/>
+                    </a:solidFill>
+                  </a:tcPr>
+                </a:tc>
+                <a:tc>
+                  <a:txBody>
+                    <a:bodyPr/>
+                    <a:lstStyle/>
+                    <a:p>
+                      <a:r>
+                        <a:rPr lang="es-PE" sz="1050">
+                          <a:latin typeface="Calibri"/>
+                        </a:rPr>
+                        <a:t>1,879</a:t>
+                      </a:r>
+                    </a:p>
+                  </a:txBody>
+                  <a:tcPr>
+                    <a:solidFill>
+                      <a:srgbClr val="EEF1F6"/>
+                    </a:solidFill>
+                  </a:tcPr>
+                </a:tc>
+                <a:tc>
+                  <a:txBody>
+                    <a:bodyPr/>
+                    <a:lstStyle/>
+                    <a:p>
+                      <a:r>
+                        <a:rPr lang="es-PE" sz="1050">
+                          <a:latin typeface="Calibri"/>
+                        </a:rPr>
+                        <a:t>7 h 42 min</a:t>
+                      </a:r>
+                    </a:p>
+                  </a:txBody>
+                  <a:tcPr>
+                    <a:solidFill>
+                      <a:srgbClr val="EEF1F6"/>
+                    </a:solidFill>
+                  </a:tcPr>
+                </a:tc>
+                <a:tc>
+                  <a:txBody>
+                    <a:bodyPr/>
+                    <a:lstStyle/>
+                    <a:p>
+                      <a:r>
+                        <a:rPr lang="es-PE" sz="1050">
+                          <a:latin typeface="Calibri"/>
+                        </a:rPr>
+                        <a:t>Hospital II Moquegua -…</a:t>
                       </a:r>
                     </a:p>
                   </a:txBody>
@@ -3180,83 +3180,83 @@
                         <a:rPr lang="es-PE" sz="1050">
                           <a:latin typeface="Calibri"/>
                         </a:rPr>
-                        <a:t>278</a:t>
-                      </a:r>
-                    </a:p>
-                  </a:txBody>
-                  <a:tcPr>
-                    <a:solidFill>
-                      <a:srgbClr val="FFFFFF"/>
-                    </a:solidFill>
-                  </a:tcPr>
-                </a:tc>
-                <a:tc>
-                  <a:txBody>
-                    <a:bodyPr/>
-                    <a:lstStyle/>
-                    <a:p>
-                      <a:r>
-                        <a:rPr lang="es-PE" sz="1050">
-                          <a:latin typeface="Calibri"/>
-                        </a:rPr>
-                        <a:t>Tacna (TCQ) -&gt; LIM -&gt; Ilo (ILQ)</a:t>
-                      </a:r>
-                    </a:p>
-                  </a:txBody>
-                  <a:tcPr>
-                    <a:solidFill>
-                      <a:srgbClr val="FFFFFF"/>
-                    </a:solidFill>
-                  </a:tcPr>
-                </a:tc>
-                <a:tc>
-                  <a:txBody>
-                    <a:bodyPr/>
-                    <a:lstStyle/>
-                    <a:p>
-                      <a:r>
-                        <a:rPr lang="es-PE" sz="1050">
-                          <a:latin typeface="Calibri"/>
-                        </a:rPr>
-                        <a:t>1,879</a:t>
-                      </a:r>
-                    </a:p>
-                  </a:txBody>
-                  <a:tcPr>
-                    <a:solidFill>
-                      <a:srgbClr val="FFFFFF"/>
-                    </a:solidFill>
-                  </a:tcPr>
-                </a:tc>
-                <a:tc>
-                  <a:txBody>
-                    <a:bodyPr/>
-                    <a:lstStyle/>
-                    <a:p>
-                      <a:r>
-                        <a:rPr lang="es-PE" sz="1050">
-                          <a:latin typeface="Calibri"/>
-                        </a:rPr>
-                        <a:t>7 h 42 min</a:t>
-                      </a:r>
-                    </a:p>
-                  </a:txBody>
-                  <a:tcPr>
-                    <a:solidFill>
-                      <a:srgbClr val="FFFFFF"/>
-                    </a:solidFill>
-                  </a:tcPr>
-                </a:tc>
-                <a:tc>
-                  <a:txBody>
-                    <a:bodyPr/>
-                    <a:lstStyle/>
-                    <a:p>
-                      <a:r>
-                        <a:rPr lang="es-PE" sz="1050">
-                          <a:latin typeface="Calibri"/>
-                        </a:rPr>
-                        <a:t>Hospital II Moquegua -…</a:t>
+                        <a:t>68</a:t>
+                      </a:r>
+                    </a:p>
+                  </a:txBody>
+                  <a:tcPr>
+                    <a:solidFill>
+                      <a:srgbClr val="FFFFFF"/>
+                    </a:solidFill>
+                  </a:tcPr>
+                </a:tc>
+                <a:tc>
+                  <a:txBody>
+                    <a:bodyPr/>
+                    <a:lstStyle/>
+                    <a:p>
+                      <a:r>
+                        <a:rPr lang="es-PE" sz="1050">
+                          <a:latin typeface="Calibri"/>
+                        </a:rPr>
+                        <a:t>Jauja (JAU) -&gt; LIM -&gt; Ayacucho (AYP)</a:t>
+                      </a:r>
+                    </a:p>
+                  </a:txBody>
+                  <a:tcPr>
+                    <a:solidFill>
+                      <a:srgbClr val="FFFFFF"/>
+                    </a:solidFill>
+                  </a:tcPr>
+                </a:tc>
+                <a:tc>
+                  <a:txBody>
+                    <a:bodyPr/>
+                    <a:lstStyle/>
+                    <a:p>
+                      <a:r>
+                        <a:rPr lang="es-PE" sz="1050">
+                          <a:latin typeface="Calibri"/>
+                        </a:rPr>
+                        <a:t>520</a:t>
+                      </a:r>
+                    </a:p>
+                  </a:txBody>
+                  <a:tcPr>
+                    <a:solidFill>
+                      <a:srgbClr val="FFFFFF"/>
+                    </a:solidFill>
+                  </a:tcPr>
+                </a:tc>
+                <a:tc>
+                  <a:txBody>
+                    <a:bodyPr/>
+                    <a:lstStyle/>
+                    <a:p>
+                      <a:r>
+                        <a:rPr lang="es-PE" sz="1050">
+                          <a:latin typeface="Calibri"/>
+                        </a:rPr>
+                        <a:t>7 h 34 min</a:t>
+                      </a:r>
+                    </a:p>
+                  </a:txBody>
+                  <a:tcPr>
+                    <a:solidFill>
+                      <a:srgbClr val="FFFFFF"/>
+                    </a:solidFill>
+                  </a:tcPr>
+                </a:tc>
+                <a:tc>
+                  <a:txBody>
+                    <a:bodyPr/>
+                    <a:lstStyle/>
+                    <a:p>
+                      <a:r>
+                        <a:rPr lang="es-PE" sz="1050">
+                          <a:latin typeface="Calibri"/>
+                        </a:rPr>
+                        <a:t>HOSPITAL PROVINCIAL DE…</a:t>
                       </a:r>
                     </a:p>
                   </a:txBody>
@@ -3282,83 +3282,83 @@
                         <a:rPr lang="es-PE" sz="1050">
                           <a:latin typeface="Calibri"/>
                         </a:rPr>
-                        <a:t>68</a:t>
-                      </a:r>
-                    </a:p>
-                  </a:txBody>
-                  <a:tcPr>
-                    <a:solidFill>
-                      <a:srgbClr val="EEF1F6"/>
-                    </a:solidFill>
-                  </a:tcPr>
-                </a:tc>
-                <a:tc>
-                  <a:txBody>
-                    <a:bodyPr/>
-                    <a:lstStyle/>
-                    <a:p>
-                      <a:r>
-                        <a:rPr lang="es-PE" sz="1050">
-                          <a:latin typeface="Calibri"/>
-                        </a:rPr>
-                        <a:t>Jauja (JAU) -&gt; LIM -&gt; Ayacucho (AYP)</a:t>
-                      </a:r>
-                    </a:p>
-                  </a:txBody>
-                  <a:tcPr>
-                    <a:solidFill>
-                      <a:srgbClr val="EEF1F6"/>
-                    </a:solidFill>
-                  </a:tcPr>
-                </a:tc>
-                <a:tc>
-                  <a:txBody>
-                    <a:bodyPr/>
-                    <a:lstStyle/>
-                    <a:p>
-                      <a:r>
-                        <a:rPr lang="es-PE" sz="1050">
-                          <a:latin typeface="Calibri"/>
-                        </a:rPr>
-                        <a:t>520</a:t>
-                      </a:r>
-                    </a:p>
-                  </a:txBody>
-                  <a:tcPr>
-                    <a:solidFill>
-                      <a:srgbClr val="EEF1F6"/>
-                    </a:solidFill>
-                  </a:tcPr>
-                </a:tc>
-                <a:tc>
-                  <a:txBody>
-                    <a:bodyPr/>
-                    <a:lstStyle/>
-                    <a:p>
-                      <a:r>
-                        <a:rPr lang="es-PE" sz="1050">
-                          <a:latin typeface="Calibri"/>
-                        </a:rPr>
-                        <a:t>7 h 34 min</a:t>
-                      </a:r>
-                    </a:p>
-                  </a:txBody>
-                  <a:tcPr>
-                    <a:solidFill>
-                      <a:srgbClr val="EEF1F6"/>
-                    </a:solidFill>
-                  </a:tcPr>
-                </a:tc>
-                <a:tc>
-                  <a:txBody>
-                    <a:bodyPr/>
-                    <a:lstStyle/>
-                    <a:p>
-                      <a:r>
-                        <a:rPr lang="es-PE" sz="1050">
-                          <a:latin typeface="Calibri"/>
-                        </a:rPr>
-                        <a:t>HOSPITAL PROVINCIAL DE…</a:t>
+                        <a:t>177</a:t>
+                      </a:r>
+                    </a:p>
+                  </a:txBody>
+                  <a:tcPr>
+                    <a:solidFill>
+                      <a:srgbClr val="EEF1F6"/>
+                    </a:solidFill>
+                  </a:tcPr>
+                </a:tc>
+                <a:tc>
+                  <a:txBody>
+                    <a:bodyPr/>
+                    <a:lstStyle/>
+                    <a:p>
+                      <a:r>
+                        <a:rPr lang="es-PE" sz="1050">
+                          <a:latin typeface="Calibri"/>
+                        </a:rPr>
+                        <a:t>Lima (LIM) -&gt; Huaraz (Anta) (ATA)</a:t>
+                      </a:r>
+                    </a:p>
+                  </a:txBody>
+                  <a:tcPr>
+                    <a:solidFill>
+                      <a:srgbClr val="EEF1F6"/>
+                    </a:solidFill>
+                  </a:tcPr>
+                </a:tc>
+                <a:tc>
+                  <a:txBody>
+                    <a:bodyPr/>
+                    <a:lstStyle/>
+                    <a:p>
+                      <a:r>
+                        <a:rPr lang="es-PE" sz="1050">
+                          <a:latin typeface="Calibri"/>
+                        </a:rPr>
+                        <a:t>302</a:t>
+                      </a:r>
+                    </a:p>
+                  </a:txBody>
+                  <a:tcPr>
+                    <a:solidFill>
+                      <a:srgbClr val="EEF1F6"/>
+                    </a:solidFill>
+                  </a:tcPr>
+                </a:tc>
+                <a:tc>
+                  <a:txBody>
+                    <a:bodyPr/>
+                    <a:lstStyle/>
+                    <a:p>
+                      <a:r>
+                        <a:rPr lang="es-PE" sz="1050">
+                          <a:latin typeface="Calibri"/>
+                        </a:rPr>
+                        <a:t>7 h 10 min</a:t>
+                      </a:r>
+                    </a:p>
+                  </a:txBody>
+                  <a:tcPr>
+                    <a:solidFill>
+                      <a:srgbClr val="EEF1F6"/>
+                    </a:solidFill>
+                  </a:tcPr>
+                </a:tc>
+                <a:tc>
+                  <a:txBody>
+                    <a:bodyPr/>
+                    <a:lstStyle/>
+                    <a:p>
+                      <a:r>
+                        <a:rPr lang="es-PE" sz="1050">
+                          <a:latin typeface="Calibri"/>
+                        </a:rPr>
+                        <a:t>HOSPITAL BARRANCA CAJAT…</a:t>
                       </a:r>
                     </a:p>
                   </a:txBody>
@@ -3384,83 +3384,83 @@
                         <a:rPr lang="es-PE" sz="1050">
                           <a:latin typeface="Calibri"/>
                         </a:rPr>
-                        <a:t>177</a:t>
-                      </a:r>
-                    </a:p>
-                  </a:txBody>
-                  <a:tcPr>
-                    <a:solidFill>
-                      <a:srgbClr val="FFFFFF"/>
-                    </a:solidFill>
-                  </a:tcPr>
-                </a:tc>
-                <a:tc>
-                  <a:txBody>
-                    <a:bodyPr/>
-                    <a:lstStyle/>
-                    <a:p>
-                      <a:r>
-                        <a:rPr lang="es-PE" sz="1050">
-                          <a:latin typeface="Calibri"/>
-                        </a:rPr>
-                        <a:t>Lima (LIM) -&gt; Huaraz (Anta) (ATA)</a:t>
-                      </a:r>
-                    </a:p>
-                  </a:txBody>
-                  <a:tcPr>
-                    <a:solidFill>
-                      <a:srgbClr val="FFFFFF"/>
-                    </a:solidFill>
-                  </a:tcPr>
-                </a:tc>
-                <a:tc>
-                  <a:txBody>
-                    <a:bodyPr/>
-                    <a:lstStyle/>
-                    <a:p>
-                      <a:r>
-                        <a:rPr lang="es-PE" sz="1050">
-                          <a:latin typeface="Calibri"/>
-                        </a:rPr>
-                        <a:t>302</a:t>
-                      </a:r>
-                    </a:p>
-                  </a:txBody>
-                  <a:tcPr>
-                    <a:solidFill>
-                      <a:srgbClr val="FFFFFF"/>
-                    </a:solidFill>
-                  </a:tcPr>
-                </a:tc>
-                <a:tc>
-                  <a:txBody>
-                    <a:bodyPr/>
-                    <a:lstStyle/>
-                    <a:p>
-                      <a:r>
-                        <a:rPr lang="es-PE" sz="1050">
-                          <a:latin typeface="Calibri"/>
-                        </a:rPr>
-                        <a:t>7 h 10 min</a:t>
-                      </a:r>
-                    </a:p>
-                  </a:txBody>
-                  <a:tcPr>
-                    <a:solidFill>
-                      <a:srgbClr val="FFFFFF"/>
-                    </a:solidFill>
-                  </a:tcPr>
-                </a:tc>
-                <a:tc>
-                  <a:txBody>
-                    <a:bodyPr/>
-                    <a:lstStyle/>
-                    <a:p>
-                      <a:r>
-                        <a:rPr lang="es-PE" sz="1050">
-                          <a:latin typeface="Calibri"/>
-                        </a:rPr>
-                        <a:t>HOSPITAL BARRANCA CAJAT…</a:t>
+                        <a:t>102</a:t>
+                      </a:r>
+                    </a:p>
+                  </a:txBody>
+                  <a:tcPr>
+                    <a:solidFill>
+                      <a:srgbClr val="FFFFFF"/>
+                    </a:solidFill>
+                  </a:tcPr>
+                </a:tc>
+                <a:tc>
+                  <a:txBody>
+                    <a:bodyPr/>
+                    <a:lstStyle/>
+                    <a:p>
+                      <a:r>
+                        <a:rPr lang="es-PE" sz="1050">
+                          <a:latin typeface="Calibri"/>
+                        </a:rPr>
+                        <a:t>Trujillo (TRU) -&gt; LIM -&gt; Chiclayo (CIX)</a:t>
+                      </a:r>
+                    </a:p>
+                  </a:txBody>
+                  <a:tcPr>
+                    <a:solidFill>
+                      <a:srgbClr val="FFFFFF"/>
+                    </a:solidFill>
+                  </a:tcPr>
+                </a:tc>
+                <a:tc>
+                  <a:txBody>
+                    <a:bodyPr/>
+                    <a:lstStyle/>
+                    <a:p>
+                      <a:r>
+                        <a:rPr lang="es-PE" sz="1050">
+                          <a:latin typeface="Calibri"/>
+                        </a:rPr>
+                        <a:t>1,143</a:t>
+                      </a:r>
+                    </a:p>
+                  </a:txBody>
+                  <a:tcPr>
+                    <a:solidFill>
+                      <a:srgbClr val="FFFFFF"/>
+                    </a:solidFill>
+                  </a:tcPr>
+                </a:tc>
+                <a:tc>
+                  <a:txBody>
+                    <a:bodyPr/>
+                    <a:lstStyle/>
+                    <a:p>
+                      <a:r>
+                        <a:rPr lang="es-PE" sz="1050">
+                          <a:latin typeface="Calibri"/>
+                        </a:rPr>
+                        <a:t>6 h 31 min</a:t>
+                      </a:r>
+                    </a:p>
+                  </a:txBody>
+                  <a:tcPr>
+                    <a:solidFill>
+                      <a:srgbClr val="FFFFFF"/>
+                    </a:solidFill>
+                  </a:tcPr>
+                </a:tc>
+                <a:tc>
+                  <a:txBody>
+                    <a:bodyPr/>
+                    <a:lstStyle/>
+                    <a:p>
+                      <a:r>
+                        <a:rPr lang="es-PE" sz="1050">
+                          <a:latin typeface="Calibri"/>
+                        </a:rPr>
+                        <a:t>HOSPITAL TOMAS LA FORA</a:t>
                       </a:r>
                     </a:p>
                   </a:txBody>
@@ -3486,83 +3486,83 @@
                         <a:rPr lang="es-PE" sz="1050">
                           <a:latin typeface="Calibri"/>
                         </a:rPr>
-                        <a:t>102</a:t>
-                      </a:r>
-                    </a:p>
-                  </a:txBody>
-                  <a:tcPr>
-                    <a:solidFill>
-                      <a:srgbClr val="EEF1F6"/>
-                    </a:solidFill>
-                  </a:tcPr>
-                </a:tc>
-                <a:tc>
-                  <a:txBody>
-                    <a:bodyPr/>
-                    <a:lstStyle/>
-                    <a:p>
-                      <a:r>
-                        <a:rPr lang="es-PE" sz="1050">
-                          <a:latin typeface="Calibri"/>
-                        </a:rPr>
-                        <a:t>Trujillo (TRU) -&gt; LIM -&gt; Chiclayo (CIX)</a:t>
-                      </a:r>
-                    </a:p>
-                  </a:txBody>
-                  <a:tcPr>
-                    <a:solidFill>
-                      <a:srgbClr val="EEF1F6"/>
-                    </a:solidFill>
-                  </a:tcPr>
-                </a:tc>
-                <a:tc>
-                  <a:txBody>
-                    <a:bodyPr/>
-                    <a:lstStyle/>
-                    <a:p>
-                      <a:r>
-                        <a:rPr lang="es-PE" sz="1050">
-                          <a:latin typeface="Calibri"/>
-                        </a:rPr>
-                        <a:t>1,143</a:t>
-                      </a:r>
-                    </a:p>
-                  </a:txBody>
-                  <a:tcPr>
-                    <a:solidFill>
-                      <a:srgbClr val="EEF1F6"/>
-                    </a:solidFill>
-                  </a:tcPr>
-                </a:tc>
-                <a:tc>
-                  <a:txBody>
-                    <a:bodyPr/>
-                    <a:lstStyle/>
-                    <a:p>
-                      <a:r>
-                        <a:rPr lang="es-PE" sz="1050">
-                          <a:latin typeface="Calibri"/>
-                        </a:rPr>
-                        <a:t>6 h 31 min</a:t>
-                      </a:r>
-                    </a:p>
-                  </a:txBody>
-                  <a:tcPr>
-                    <a:solidFill>
-                      <a:srgbClr val="EEF1F6"/>
-                    </a:solidFill>
-                  </a:tcPr>
-                </a:tc>
-                <a:tc>
-                  <a:txBody>
-                    <a:bodyPr/>
-                    <a:lstStyle/>
-                    <a:p>
-                      <a:r>
-                        <a:rPr lang="es-PE" sz="1050">
-                          <a:latin typeface="Calibri"/>
-                        </a:rPr>
-                        <a:t>HOSPITAL TOMAS LA FORA</a:t>
+                        <a:t>263</a:t>
+                      </a:r>
+                    </a:p>
+                  </a:txBody>
+                  <a:tcPr>
+                    <a:solidFill>
+                      <a:srgbClr val="EEF1F6"/>
+                    </a:solidFill>
+                  </a:tcPr>
+                </a:tc>
+                <a:tc>
+                  <a:txBody>
+                    <a:bodyPr/>
+                    <a:lstStyle/>
+                    <a:p>
+                      <a:r>
+                        <a:rPr lang="es-PE" sz="1050">
+                          <a:latin typeface="Calibri"/>
+                        </a:rPr>
+                        <a:t>Tarapoto (TPP) -&gt; LIM -&gt; Rioja (RIJ)</a:t>
+                      </a:r>
+                    </a:p>
+                  </a:txBody>
+                  <a:tcPr>
+                    <a:solidFill>
+                      <a:srgbClr val="EEF1F6"/>
+                    </a:solidFill>
+                  </a:tcPr>
+                </a:tc>
+                <a:tc>
+                  <a:txBody>
+                    <a:bodyPr/>
+                    <a:lstStyle/>
+                    <a:p>
+                      <a:r>
+                        <a:rPr lang="es-PE" sz="1050">
+                          <a:latin typeface="Calibri"/>
+                        </a:rPr>
+                        <a:t>1,280</a:t>
+                      </a:r>
+                    </a:p>
+                  </a:txBody>
+                  <a:tcPr>
+                    <a:solidFill>
+                      <a:srgbClr val="EEF1F6"/>
+                    </a:solidFill>
+                  </a:tcPr>
+                </a:tc>
+                <a:tc>
+                  <a:txBody>
+                    <a:bodyPr/>
+                    <a:lstStyle/>
+                    <a:p>
+                      <a:r>
+                        <a:rPr lang="es-PE" sz="1050">
+                          <a:latin typeface="Calibri"/>
+                        </a:rPr>
+                        <a:t>5 h 35 min</a:t>
+                      </a:r>
+                    </a:p>
+                  </a:txBody>
+                  <a:tcPr>
+                    <a:solidFill>
+                      <a:srgbClr val="EEF1F6"/>
+                    </a:solidFill>
+                  </a:tcPr>
+                </a:tc>
+                <a:tc>
+                  <a:txBody>
+                    <a:bodyPr/>
+                    <a:lstStyle/>
+                    <a:p>
+                      <a:r>
+                        <a:rPr lang="es-PE" sz="1050">
+                          <a:latin typeface="Calibri"/>
+                        </a:rPr>
+                        <a:t>HOSPITAL MOYOBAMBA</a:t>
                       </a:r>
                     </a:p>
                   </a:txBody>
@@ -3588,7 +3588,7 @@
                         <a:rPr lang="es-PE" sz="1050">
                           <a:latin typeface="Calibri"/>
                         </a:rPr>
-                        <a:t>263</a:t>
+                        <a:t>274</a:t>
                       </a:r>
                     </a:p>
                   </a:txBody>
@@ -3645,26 +3645,26 @@
                         <a:rPr lang="es-PE" sz="1050">
                           <a:latin typeface="Calibri"/>
                         </a:rPr>
-                        <a:t>5 h 35 min</a:t>
-                      </a:r>
-                    </a:p>
-                  </a:txBody>
-                  <a:tcPr>
-                    <a:solidFill>
-                      <a:srgbClr val="FFFFFF"/>
-                    </a:solidFill>
-                  </a:tcPr>
-                </a:tc>
-                <a:tc>
-                  <a:txBody>
-                    <a:bodyPr/>
-                    <a:lstStyle/>
-                    <a:p>
-                      <a:r>
-                        <a:rPr lang="es-PE" sz="1050">
-                          <a:latin typeface="Calibri"/>
-                        </a:rPr>
-                        <a:t>HOSPITAL MOYOBAMBA</a:t>
+                        <a:t>5 h 33 min</a:t>
+                      </a:r>
+                    </a:p>
+                  </a:txBody>
+                  <a:tcPr>
+                    <a:solidFill>
+                      <a:srgbClr val="FFFFFF"/>
+                    </a:solidFill>
+                  </a:tcPr>
+                </a:tc>
+                <a:tc>
+                  <a:txBody>
+                    <a:bodyPr/>
+                    <a:lstStyle/>
+                    <a:p>
+                      <a:r>
+                        <a:rPr lang="es-PE" sz="1050">
+                          <a:latin typeface="Calibri"/>
+                        </a:rPr>
+                        <a:t>CENTRO MEDICO LUZ DIVINA</a:t>
                       </a:r>
                     </a:p>
                   </a:txBody>
@@ -3690,7 +3690,7 @@
                         <a:rPr lang="es-PE" sz="1050">
                           <a:latin typeface="Calibri"/>
                         </a:rPr>
-                        <a:t>274</a:t>
+                        <a:t>269</a:t>
                       </a:r>
                     </a:p>
                   </a:txBody>
@@ -3747,26 +3747,26 @@
                         <a:rPr lang="es-PE" sz="1050">
                           <a:latin typeface="Calibri"/>
                         </a:rPr>
-                        <a:t>5 h 33 min</a:t>
-                      </a:r>
-                    </a:p>
-                  </a:txBody>
-                  <a:tcPr>
-                    <a:solidFill>
-                      <a:srgbClr val="EEF1F6"/>
-                    </a:solidFill>
-                  </a:tcPr>
-                </a:tc>
-                <a:tc>
-                  <a:txBody>
-                    <a:bodyPr/>
-                    <a:lstStyle/>
-                    <a:p>
-                      <a:r>
-                        <a:rPr lang="es-PE" sz="1050">
-                          <a:latin typeface="Calibri"/>
-                        </a:rPr>
-                        <a:t>CENTRO MEDICO LUZ DIVINA</a:t>
+                        <a:t>5 h 29 min</a:t>
+                      </a:r>
+                    </a:p>
+                  </a:txBody>
+                  <a:tcPr>
+                    <a:solidFill>
+                      <a:srgbClr val="EEF1F6"/>
+                    </a:solidFill>
+                  </a:tcPr>
+                </a:tc>
+                <a:tc>
+                  <a:txBody>
+                    <a:bodyPr/>
+                    <a:lstStyle/>
+                    <a:p>
+                      <a:r>
+                        <a:rPr lang="es-PE" sz="1050">
+                          <a:latin typeface="Calibri"/>
+                        </a:rPr>
+                        <a:t>CLINICA YANTALO -</a:t>
                       </a:r>
                     </a:p>
                   </a:txBody>
@@ -3792,7 +3792,7 @@
                         <a:rPr lang="es-PE" sz="1050">
                           <a:latin typeface="Calibri"/>
                         </a:rPr>
-                        <a:t>269</a:t>
+                        <a:t>260</a:t>
                       </a:r>
                     </a:p>
                   </a:txBody>
@@ -3849,26 +3849,26 @@
                         <a:rPr lang="es-PE" sz="1050">
                           <a:latin typeface="Calibri"/>
                         </a:rPr>
-                        <a:t>5 h 29 min</a:t>
-                      </a:r>
-                    </a:p>
-                  </a:txBody>
-                  <a:tcPr>
-                    <a:solidFill>
-                      <a:srgbClr val="FFFFFF"/>
-                    </a:solidFill>
-                  </a:tcPr>
-                </a:tc>
-                <a:tc>
-                  <a:txBody>
-                    <a:bodyPr/>
-                    <a:lstStyle/>
-                    <a:p>
-                      <a:r>
-                        <a:rPr lang="es-PE" sz="1050">
-                          <a:latin typeface="Calibri"/>
-                        </a:rPr>
-                        <a:t>CLINICA YANTALO -</a:t>
+                        <a:t>5 h 10 min</a:t>
+                      </a:r>
+                    </a:p>
+                  </a:txBody>
+                  <a:tcPr>
+                    <a:solidFill>
+                      <a:srgbClr val="FFFFFF"/>
+                    </a:solidFill>
+                  </a:tcPr>
+                </a:tc>
+                <a:tc>
+                  <a:txBody>
+                    <a:bodyPr/>
+                    <a:lstStyle/>
+                    <a:p>
+                      <a:r>
+                        <a:rPr lang="es-PE" sz="1050">
+                          <a:latin typeface="Calibri"/>
+                        </a:rPr>
+                        <a:t>Nombre comercial: Centr…</a:t>
                       </a:r>
                     </a:p>
                   </a:txBody>
@@ -3894,7 +3894,7 @@
                         <a:rPr lang="es-PE" sz="1050">
                           <a:latin typeface="Calibri"/>
                         </a:rPr>
-                        <a:t>260</a:t>
+                        <a:t>264</a:t>
                       </a:r>
                     </a:p>
                   </a:txBody>
@@ -3970,7 +3970,7 @@
                         <a:rPr lang="es-PE" sz="1050">
                           <a:latin typeface="Calibri"/>
                         </a:rPr>
-                        <a:t>Nombre comercial: Centr…</a:t>
+                        <a:t>HOSPITAL DE RIOJA</a:t>
                       </a:r>
                     </a:p>
                   </a:txBody>
@@ -4088,7 +4088,7 @@
                 </a:solidFill>
                 <a:latin typeface="Calibri"/>
               </a:rPr>
-              <a:t>La via aerea solo se evalua cuando origen y destino usan aeropuertos distintos con servicio comercial; por eso solo 18 de 278 convenios la tienen.</a:t>
+              <a:t>La via aerea solo se evalua cuando origen y destino usan aeropuertos distintos con servicio comercial; por eso solo 17 de 277 convenios la tienen.</a:t>
             </a:r>
             <a:endParaRPr lang="es-PE" sz="1500"/>
           </a:p>
@@ -4104,7 +4104,7 @@
                 </a:solidFill>
                 <a:latin typeface="Calibri"/>
               </a:rPr>
-              <a:t>Rutas largas reales donde el avion es la opcion sensata (el terrestre de la misma fila es varias veces mas largo): Juliaca-Jaen (JUL-JAE, 9 h 08 vs 2 d 5 h por tierra), Lima-Piura (LIM-PIU, 2 h 44-2 h 48 vs 18 h 20-18 h 21 por tierra), Lima-Arequipa (LIM-AQP, 3 h 06 vs 17 h 36), Lima-Chiclayo (LIM-CIX, 2 h 39 vs 14 h 56), Trujillo-Lima (TRU-LIM, 2 h 38 vs 10 h 24).</a:t>
+              <a:t>Rutas largas reales donde el avion es la opcion sensata (el terrestre de la misma fila es varias veces mas largo): Lima-Piura (LIM-PIU, 2 h 44-2 h 48 vs 18 h 20-18 h 21 por tierra), Lima-Arequipa (LIM-AQP, 3 h 06 vs 17 h 36), Lima-Chiclayo (LIM-CIX, 2 h 39 vs 14 h 56), Trujillo-Lima (TRU-LIM, 2 h 38 vs 10 h 24).</a:t>
             </a:r>
             <a:endParaRPr lang="es-PE" sz="1500"/>
           </a:p>
@@ -4254,7 +4254,7 @@
                 </a:solidFill>
                 <a:latin typeface="Calibri"/>
               </a:rPr>
-              <a:t>En los 248 convenios geolocalizados, para cada par se busco un puerto fluvial navegable a &lt;=150 km de cada extremo y una ruta de rio entre ambos (red curada: Yurimaguas, Iquitos, Pucallpa, Nauta, Contamana, etc.).</a:t>
+              <a:t>En los 247 convenios geolocalizados, para cada par se busco un puerto fluvial navegable a &lt;=150 km de cada extremo y una ruta de rio entre ambos (red curada: Yurimaguas, Iquitos, Pucallpa, Nauta, Contamana, etc.).</a:t>
             </a:r>
             <a:endParaRPr lang="es-PE" sz="1500"/>
           </a:p>
@@ -4270,7 +4270,7 @@
                 </a:solidFill>
                 <a:latin typeface="Calibri"/>
               </a:rPr>
-              <a:t>Resultado: 231 convenios no tienen puerto navegable cerca de al menos un extremo; 17 (San Martin) tienen ambos extremos junto al mismo puerto. En todos hay carretera.</a:t>
+              <a:t>Resultado: 230 convenios no tienen puerto navegable cerca de al menos un extremo; 17 (San Martin) tienen ambos extremos junto al mismo puerto. En todos hay carretera.</a:t>
             </a:r>
             <a:endParaRPr lang="es-PE" sz="1500"/>
           </a:p>
@@ -4389,7 +4389,7 @@
                 </a:solidFill>
                 <a:latin typeface="Calibri"/>
               </a:rPr>
-              <a:t>El convenio con mayor tiempo terrestre es N 253: HOSPITAL CARLOS MONGE MEDRANO -&gt; SANTA MARIA DE NIEVA (2,546 km, 2 d 5 h).</a:t>
+              <a:t>El convenio con mayor tiempo terrestre es N 211: MEDIC SER SAC -AUNA CLINICA DELGA… -&gt; CLÍNICAS AUNA SEDE PIURA - (977 km, 18 h 21 min).</a:t>
             </a:r>
             <a:endParaRPr lang="es-PE" sz="1500"/>
           </a:p>
@@ -4421,7 +4421,7 @@
                 </a:solidFill>
                 <a:latin typeface="Calibri"/>
               </a:rPr>
-              <a:t>De los 18 convenios con opcion aerea, en 5 el avion realmente reduce el tiempo puerta a puerta frente al terrestre (todos con Lima de por medio); en los demas el terrestre sigue siendo mas rapido pese a la distancia de vuelo. En los que no tienen opcion aerea el traslado es y debe seguir siendo por carretera.</a:t>
+              <a:t>De los 17 convenios con opcion aerea, en 5 el avion realmente reduce el tiempo puerta a puerta frente al terrestre (todos con Lima de por medio); en los demas el terrestre sigue siendo mas rapido pese a la distancia de vuelo. En los que no tienen opcion aerea el traslado es y debe seguir siendo por carretera.</a:t>
             </a:r>
             <a:endParaRPr lang="es-PE" sz="1500"/>
           </a:p>

--- a/datos/Resumen_tiempos_convenios_BS.pptx
+++ b/datos/Resumen_tiempos_convenios_BS.pptx
@@ -693,7 +693,7 @@
                 </a:solidFill>
                 <a:latin typeface="Calibri"/>
               </a:rPr>
-              <a:t>17 con opcion de via aerea util (origen y destino en ciudades con aeropuertos distintos).</a:t>
+              <a:t>16 con opcion de via aerea util (origen y destino en ciudades con aeropuertos distintos).</a:t>
             </a:r>
             <a:endParaRPr lang="es-PE" sz="1600"/>
           </a:p>
@@ -859,7 +859,7 @@
                 </a:solidFill>
                 <a:latin typeface="Calibri"/>
               </a:rPr>
-              <a:t>Hasta 1 h ............ 189</a:t>
+              <a:t>Hasta 1 h ............ 190</a:t>
             </a:r>
             <a:endParaRPr lang="es-PE" sz="1400"/>
           </a:p>
@@ -907,7 +907,7 @@
                 </a:solidFill>
                 <a:latin typeface="Calibri"/>
               </a:rPr>
-              <a:t>6 a 12 h ............. 6</a:t>
+              <a:t>6 a 12 h ............. 5</a:t>
             </a:r>
             <a:endParaRPr lang="es-PE" sz="1400"/>
           </a:p>
@@ -954,7 +954,7 @@
                 </a:solidFill>
                 <a:latin typeface="Calibri"/>
               </a:rPr>
-              <a:t>Conjunto completo (247 convenios): mediana 0 h 26 min, media 1 h 15 min.</a:t>
+              <a:t>Conjunto completo (247 convenios): mediana 0 h 26 min, media 1 h 12 min.</a:t>
             </a:r>
             <a:endParaRPr lang="es-PE" sz="1300"/>
           </a:p>
@@ -969,7 +969,7 @@
                 </a:solidFill>
                 <a:latin typeface="Calibri"/>
               </a:rPr>
-              <a:t>IPRESS con traslado terrestre mayor a 1 h: 58 convenios (23 % del total).</a:t>
+              <a:t>IPRESS con traslado terrestre mayor a 1 h: 57 convenios (23 % del total).</a:t>
             </a:r>
             <a:endParaRPr lang="es-PE" sz="1500"/>
           </a:p>
@@ -985,7 +985,7 @@
                 </a:solidFill>
                 <a:latin typeface="Calibri"/>
               </a:rPr>
-              <a:t>En ese grupo la mediana del tiempo de ruta es 2 h 29 min y la media es 4 h 02 min.</a:t>
+              <a:t>En ese grupo la mediana del tiempo de ruta es 2 h 28 min y la media es 3 h 55 min.</a:t>
             </a:r>
             <a:endParaRPr lang="es-PE" sz="1500"/>
           </a:p>
@@ -1000,7 +1000,7 @@
                 </a:solidFill>
                 <a:latin typeface="Calibri"/>
               </a:rPr>
-              <a:t>La media es mayor que la mediana porque unos pocos convenios inter-regionales de sierra y selva (12 h a 2 dias) elevan el promedio; para la mitad del grupo el traslado sigue por debajo de 2 h 29 min.</a:t>
+              <a:t>La media es mayor que la mediana porque unos pocos convenios inter-regionales de sierra y selva (12 h a 2 dias) elevan el promedio; para la mitad del grupo el traslado sigue por debajo de 2 h 28 min.</a:t>
             </a:r>
             <a:endParaRPr lang="es-PE" sz="1200"/>
           </a:p>
@@ -1767,102 +1767,102 @@
                         <a:rPr lang="es-PE" sz="1050">
                           <a:latin typeface="Calibri"/>
                         </a:rPr>
-                        <a:t>100</a:t>
-                      </a:r>
-                    </a:p>
-                  </a:txBody>
-                  <a:tcPr>
-                    <a:solidFill>
-                      <a:srgbClr val="FFFFFF"/>
-                    </a:solidFill>
-                  </a:tcPr>
-                </a:tc>
-                <a:tc>
-                  <a:txBody>
-                    <a:bodyPr/>
-                    <a:lstStyle/>
-                    <a:p>
-                      <a:r>
-                        <a:rPr lang="es-PE" sz="1050">
-                          <a:latin typeface="Calibri"/>
-                        </a:rPr>
-                        <a:t>HOSPITAL REGIONAL DOCENTE…</a:t>
-                      </a:r>
-                    </a:p>
-                  </a:txBody>
-                  <a:tcPr>
-                    <a:solidFill>
-                      <a:srgbClr val="FFFFFF"/>
-                    </a:solidFill>
-                  </a:tcPr>
-                </a:tc>
-                <a:tc>
-                  <a:txBody>
-                    <a:bodyPr/>
-                    <a:lstStyle/>
-                    <a:p>
-                      <a:r>
-                        <a:rPr lang="es-PE" sz="1050">
-                          <a:latin typeface="Calibri"/>
-                        </a:rPr>
-                        <a:t>CLINICA CAMINO REAL</a:t>
-                      </a:r>
-                    </a:p>
-                  </a:txBody>
-                  <a:tcPr>
-                    <a:solidFill>
-                      <a:srgbClr val="FFFFFF"/>
-                    </a:solidFill>
-                  </a:tcPr>
-                </a:tc>
-                <a:tc>
-                  <a:txBody>
-                    <a:bodyPr/>
-                    <a:lstStyle/>
-                    <a:p>
-                      <a:r>
-                        <a:rPr lang="es-PE" sz="1050">
-                          <a:latin typeface="Calibri"/>
-                        </a:rPr>
-                        <a:t>559</a:t>
-                      </a:r>
-                    </a:p>
-                  </a:txBody>
-                  <a:tcPr>
-                    <a:solidFill>
-                      <a:srgbClr val="FFFFFF"/>
-                    </a:solidFill>
-                  </a:tcPr>
-                </a:tc>
-                <a:tc>
-                  <a:txBody>
-                    <a:bodyPr/>
-                    <a:lstStyle/>
-                    <a:p>
-                      <a:r>
-                        <a:rPr lang="es-PE" sz="1050">
-                          <a:latin typeface="Calibri"/>
-                        </a:rPr>
-                        <a:t>10 h 24 min</a:t>
-                      </a:r>
-                    </a:p>
-                  </a:txBody>
-                  <a:tcPr>
-                    <a:solidFill>
-                      <a:srgbClr val="FFFFFF"/>
-                    </a:solidFill>
-                  </a:tcPr>
-                </a:tc>
-                <a:tc>
-                  <a:txBody>
-                    <a:bodyPr/>
-                    <a:lstStyle/>
-                    <a:p>
-                      <a:r>
-                        <a:rPr lang="es-PE" sz="1050">
-                          <a:latin typeface="Calibri"/>
-                        </a:rPr>
-                        <a:t>costa / llano</a:t>
+                        <a:t>57</a:t>
+                      </a:r>
+                    </a:p>
+                  </a:txBody>
+                  <a:tcPr>
+                    <a:solidFill>
+                      <a:srgbClr val="FFFFFF"/>
+                    </a:solidFill>
+                  </a:tcPr>
+                </a:tc>
+                <a:tc>
+                  <a:txBody>
+                    <a:bodyPr/>
+                    <a:lstStyle/>
+                    <a:p>
+                      <a:r>
+                        <a:rPr lang="es-PE" sz="1050">
+                          <a:latin typeface="Calibri"/>
+                        </a:rPr>
+                        <a:t>Hospital Antonio Lorena d…</a:t>
+                      </a:r>
+                    </a:p>
+                  </a:txBody>
+                  <a:tcPr>
+                    <a:solidFill>
+                      <a:srgbClr val="FFFFFF"/>
+                    </a:solidFill>
+                  </a:tcPr>
+                </a:tc>
+                <a:tc>
+                  <a:txBody>
+                    <a:bodyPr/>
+                    <a:lstStyle/>
+                    <a:p>
+                      <a:r>
+                        <a:rPr lang="es-PE" sz="1050">
+                          <a:latin typeface="Calibri"/>
+                        </a:rPr>
+                        <a:t>SR DE TORRECHAYOC</a:t>
+                      </a:r>
+                    </a:p>
+                  </a:txBody>
+                  <a:tcPr>
+                    <a:solidFill>
+                      <a:srgbClr val="FFFFFF"/>
+                    </a:solidFill>
+                  </a:tcPr>
+                </a:tc>
+                <a:tc>
+                  <a:txBody>
+                    <a:bodyPr/>
+                    <a:lstStyle/>
+                    <a:p>
+                      <a:r>
+                        <a:rPr lang="es-PE" sz="1050">
+                          <a:latin typeface="Calibri"/>
+                        </a:rPr>
+                        <a:t>202</a:t>
+                      </a:r>
+                    </a:p>
+                  </a:txBody>
+                  <a:tcPr>
+                    <a:solidFill>
+                      <a:srgbClr val="FFFFFF"/>
+                    </a:solidFill>
+                  </a:tcPr>
+                </a:tc>
+                <a:tc>
+                  <a:txBody>
+                    <a:bodyPr/>
+                    <a:lstStyle/>
+                    <a:p>
+                      <a:r>
+                        <a:rPr lang="es-PE" sz="1050">
+                          <a:latin typeface="Calibri"/>
+                        </a:rPr>
+                        <a:t>6 h 57 min</a:t>
+                      </a:r>
+                    </a:p>
+                  </a:txBody>
+                  <a:tcPr>
+                    <a:solidFill>
+                      <a:srgbClr val="FFFFFF"/>
+                    </a:solidFill>
+                  </a:tcPr>
+                </a:tc>
+                <a:tc>
+                  <a:txBody>
+                    <a:bodyPr/>
+                    <a:lstStyle/>
+                    <a:p>
+                      <a:r>
+                        <a:rPr lang="es-PE" sz="1050">
+                          <a:latin typeface="Calibri"/>
+                        </a:rPr>
+                        <a:t>sierra alta sostenida</a:t>
                       </a:r>
                     </a:p>
                   </a:txBody>
@@ -1888,7 +1888,7 @@
                         <a:rPr lang="es-PE" sz="1050">
                           <a:latin typeface="Calibri"/>
                         </a:rPr>
-                        <a:t>57</a:t>
+                        <a:t>48</a:t>
                       </a:r>
                     </a:p>
                   </a:txBody>
@@ -1926,7 +1926,7 @@
                         <a:rPr lang="es-PE" sz="1050">
                           <a:latin typeface="Calibri"/>
                         </a:rPr>
-                        <a:t>SR DE TORRECHAYOC</a:t>
+                        <a:t>QUILLABAMBA-ESSALUD</a:t>
                       </a:r>
                     </a:p>
                   </a:txBody>
@@ -2009,7 +2009,7 @@
                         <a:rPr lang="es-PE" sz="1050">
                           <a:latin typeface="Calibri"/>
                         </a:rPr>
-                        <a:t>48</a:t>
+                        <a:t>49</a:t>
                       </a:r>
                     </a:p>
                   </a:txBody>
@@ -2047,45 +2047,45 @@
                         <a:rPr lang="es-PE" sz="1050">
                           <a:latin typeface="Calibri"/>
                         </a:rPr>
-                        <a:t>QUILLABAMBA-ESSALUD</a:t>
-                      </a:r>
-                    </a:p>
-                  </a:txBody>
-                  <a:tcPr>
-                    <a:solidFill>
-                      <a:srgbClr val="FFFFFF"/>
-                    </a:solidFill>
-                  </a:tcPr>
-                </a:tc>
-                <a:tc>
-                  <a:txBody>
-                    <a:bodyPr/>
-                    <a:lstStyle/>
-                    <a:p>
-                      <a:r>
-                        <a:rPr lang="es-PE" sz="1050">
-                          <a:latin typeface="Calibri"/>
-                        </a:rPr>
-                        <a:t>202</a:t>
-                      </a:r>
-                    </a:p>
-                  </a:txBody>
-                  <a:tcPr>
-                    <a:solidFill>
-                      <a:srgbClr val="FFFFFF"/>
-                    </a:solidFill>
-                  </a:tcPr>
-                </a:tc>
-                <a:tc>
-                  <a:txBody>
-                    <a:bodyPr/>
-                    <a:lstStyle/>
-                    <a:p>
-                      <a:r>
-                        <a:rPr lang="es-PE" sz="1050">
-                          <a:latin typeface="Calibri"/>
-                        </a:rPr>
-                        <a:t>6 h 57 min</a:t>
+                        <a:t>HOSPITAL DE ESPINAR</a:t>
+                      </a:r>
+                    </a:p>
+                  </a:txBody>
+                  <a:tcPr>
+                    <a:solidFill>
+                      <a:srgbClr val="FFFFFF"/>
+                    </a:solidFill>
+                  </a:tcPr>
+                </a:tc>
+                <a:tc>
+                  <a:txBody>
+                    <a:bodyPr/>
+                    <a:lstStyle/>
+                    <a:p>
+                      <a:r>
+                        <a:rPr lang="es-PE" sz="1050">
+                          <a:latin typeface="Calibri"/>
+                        </a:rPr>
+                        <a:t>221</a:t>
+                      </a:r>
+                    </a:p>
+                  </a:txBody>
+                  <a:tcPr>
+                    <a:solidFill>
+                      <a:srgbClr val="FFFFFF"/>
+                    </a:solidFill>
+                  </a:tcPr>
+                </a:tc>
+                <a:tc>
+                  <a:txBody>
+                    <a:bodyPr/>
+                    <a:lstStyle/>
+                    <a:p>
+                      <a:r>
+                        <a:rPr lang="es-PE" sz="1050">
+                          <a:latin typeface="Calibri"/>
+                        </a:rPr>
+                        <a:t>6 h 09 min</a:t>
                       </a:r>
                     </a:p>
                   </a:txBody>
@@ -2130,83 +2130,83 @@
                         <a:rPr lang="es-PE" sz="1050">
                           <a:latin typeface="Calibri"/>
                         </a:rPr>
-                        <a:t>49</a:t>
-                      </a:r>
-                    </a:p>
-                  </a:txBody>
-                  <a:tcPr>
-                    <a:solidFill>
-                      <a:srgbClr val="EEF1F6"/>
-                    </a:solidFill>
-                  </a:tcPr>
-                </a:tc>
-                <a:tc>
-                  <a:txBody>
-                    <a:bodyPr/>
-                    <a:lstStyle/>
-                    <a:p>
-                      <a:r>
-                        <a:rPr lang="es-PE" sz="1050">
-                          <a:latin typeface="Calibri"/>
-                        </a:rPr>
-                        <a:t>Hospital Antonio Lorena d…</a:t>
-                      </a:r>
-                    </a:p>
-                  </a:txBody>
-                  <a:tcPr>
-                    <a:solidFill>
-                      <a:srgbClr val="EEF1F6"/>
-                    </a:solidFill>
-                  </a:tcPr>
-                </a:tc>
-                <a:tc>
-                  <a:txBody>
-                    <a:bodyPr/>
-                    <a:lstStyle/>
-                    <a:p>
-                      <a:r>
-                        <a:rPr lang="es-PE" sz="1050">
-                          <a:latin typeface="Calibri"/>
-                        </a:rPr>
-                        <a:t>HOSPITAL DE ESPINAR</a:t>
-                      </a:r>
-                    </a:p>
-                  </a:txBody>
-                  <a:tcPr>
-                    <a:solidFill>
-                      <a:srgbClr val="EEF1F6"/>
-                    </a:solidFill>
-                  </a:tcPr>
-                </a:tc>
-                <a:tc>
-                  <a:txBody>
-                    <a:bodyPr/>
-                    <a:lstStyle/>
-                    <a:p>
-                      <a:r>
-                        <a:rPr lang="es-PE" sz="1050">
-                          <a:latin typeface="Calibri"/>
-                        </a:rPr>
-                        <a:t>221</a:t>
-                      </a:r>
-                    </a:p>
-                  </a:txBody>
-                  <a:tcPr>
-                    <a:solidFill>
-                      <a:srgbClr val="EEF1F6"/>
-                    </a:solidFill>
-                  </a:tcPr>
-                </a:tc>
-                <a:tc>
-                  <a:txBody>
-                    <a:bodyPr/>
-                    <a:lstStyle/>
-                    <a:p>
-                      <a:r>
-                        <a:rPr lang="es-PE" sz="1050">
-                          <a:latin typeface="Calibri"/>
-                        </a:rPr>
-                        <a:t>6 h 09 min</a:t>
+                        <a:t>40</a:t>
+                      </a:r>
+                    </a:p>
+                  </a:txBody>
+                  <a:tcPr>
+                    <a:solidFill>
+                      <a:srgbClr val="EEF1F6"/>
+                    </a:solidFill>
+                  </a:tcPr>
+                </a:tc>
+                <a:tc>
+                  <a:txBody>
+                    <a:bodyPr/>
+                    <a:lstStyle/>
+                    <a:p>
+                      <a:r>
+                        <a:rPr lang="es-PE" sz="1050">
+                          <a:latin typeface="Calibri"/>
+                        </a:rPr>
+                        <a:t>Hospital Regional de Ayac…</a:t>
+                      </a:r>
+                    </a:p>
+                  </a:txBody>
+                  <a:tcPr>
+                    <a:solidFill>
+                      <a:srgbClr val="EEF1F6"/>
+                    </a:solidFill>
+                  </a:tcPr>
+                </a:tc>
+                <a:tc>
+                  <a:txBody>
+                    <a:bodyPr/>
+                    <a:lstStyle/>
+                    <a:p>
+                      <a:r>
+                        <a:rPr lang="es-PE" sz="1050">
+                          <a:latin typeface="Calibri"/>
+                        </a:rPr>
+                        <a:t>SAN JUAN DE KIMBIRI-VRAEM</a:t>
+                      </a:r>
+                    </a:p>
+                  </a:txBody>
+                  <a:tcPr>
+                    <a:solidFill>
+                      <a:srgbClr val="EEF1F6"/>
+                    </a:solidFill>
+                  </a:tcPr>
+                </a:tc>
+                <a:tc>
+                  <a:txBody>
+                    <a:bodyPr/>
+                    <a:lstStyle/>
+                    <a:p>
+                      <a:r>
+                        <a:rPr lang="es-PE" sz="1050">
+                          <a:latin typeface="Calibri"/>
+                        </a:rPr>
+                        <a:t>186</a:t>
+                      </a:r>
+                    </a:p>
+                  </a:txBody>
+                  <a:tcPr>
+                    <a:solidFill>
+                      <a:srgbClr val="EEF1F6"/>
+                    </a:solidFill>
+                  </a:tcPr>
+                </a:tc>
+                <a:tc>
+                  <a:txBody>
+                    <a:bodyPr/>
+                    <a:lstStyle/>
+                    <a:p>
+                      <a:r>
+                        <a:rPr lang="es-PE" sz="1050">
+                          <a:latin typeface="Calibri"/>
+                        </a:rPr>
+                        <a:t>6 h 04 min</a:t>
                       </a:r>
                     </a:p>
                   </a:txBody>
@@ -2251,83 +2251,83 @@
                         <a:rPr lang="es-PE" sz="1050">
                           <a:latin typeface="Calibri"/>
                         </a:rPr>
-                        <a:t>40</a:t>
-                      </a:r>
-                    </a:p>
-                  </a:txBody>
-                  <a:tcPr>
-                    <a:solidFill>
-                      <a:srgbClr val="FFFFFF"/>
-                    </a:solidFill>
-                  </a:tcPr>
-                </a:tc>
-                <a:tc>
-                  <a:txBody>
-                    <a:bodyPr/>
-                    <a:lstStyle/>
-                    <a:p>
-                      <a:r>
-                        <a:rPr lang="es-PE" sz="1050">
-                          <a:latin typeface="Calibri"/>
-                        </a:rPr>
-                        <a:t>Hospital Regional de Ayac…</a:t>
-                      </a:r>
-                    </a:p>
-                  </a:txBody>
-                  <a:tcPr>
-                    <a:solidFill>
-                      <a:srgbClr val="FFFFFF"/>
-                    </a:solidFill>
-                  </a:tcPr>
-                </a:tc>
-                <a:tc>
-                  <a:txBody>
-                    <a:bodyPr/>
-                    <a:lstStyle/>
-                    <a:p>
-                      <a:r>
-                        <a:rPr lang="es-PE" sz="1050">
-                          <a:latin typeface="Calibri"/>
-                        </a:rPr>
-                        <a:t>SAN JUAN DE KIMBIRI-VRAEM</a:t>
-                      </a:r>
-                    </a:p>
-                  </a:txBody>
-                  <a:tcPr>
-                    <a:solidFill>
-                      <a:srgbClr val="FFFFFF"/>
-                    </a:solidFill>
-                  </a:tcPr>
-                </a:tc>
-                <a:tc>
-                  <a:txBody>
-                    <a:bodyPr/>
-                    <a:lstStyle/>
-                    <a:p>
-                      <a:r>
-                        <a:rPr lang="es-PE" sz="1050">
-                          <a:latin typeface="Calibri"/>
-                        </a:rPr>
-                        <a:t>186</a:t>
-                      </a:r>
-                    </a:p>
-                  </a:txBody>
-                  <a:tcPr>
-                    <a:solidFill>
-                      <a:srgbClr val="FFFFFF"/>
-                    </a:solidFill>
-                  </a:tcPr>
-                </a:tc>
-                <a:tc>
-                  <a:txBody>
-                    <a:bodyPr/>
-                    <a:lstStyle/>
-                    <a:p>
-                      <a:r>
-                        <a:rPr lang="es-PE" sz="1050">
-                          <a:latin typeface="Calibri"/>
-                        </a:rPr>
-                        <a:t>6 h 04 min</a:t>
+                        <a:t>241</a:t>
+                      </a:r>
+                    </a:p>
+                  </a:txBody>
+                  <a:tcPr>
+                    <a:solidFill>
+                      <a:srgbClr val="FFFFFF"/>
+                    </a:solidFill>
+                  </a:tcPr>
+                </a:tc>
+                <a:tc>
+                  <a:txBody>
+                    <a:bodyPr/>
+                    <a:lstStyle/>
+                    <a:p>
+                      <a:r>
+                        <a:rPr lang="es-PE" sz="1050">
+                          <a:latin typeface="Calibri"/>
+                        </a:rPr>
+                        <a:t>HOSPITAL II PASCO</a:t>
+                      </a:r>
+                    </a:p>
+                  </a:txBody>
+                  <a:tcPr>
+                    <a:solidFill>
+                      <a:srgbClr val="FFFFFF"/>
+                    </a:solidFill>
+                  </a:tcPr>
+                </a:tc>
+                <a:tc>
+                  <a:txBody>
+                    <a:bodyPr/>
+                    <a:lstStyle/>
+                    <a:p>
+                      <a:r>
+                        <a:rPr lang="es-PE" sz="1050">
+                          <a:latin typeface="Calibri"/>
+                        </a:rPr>
+                        <a:t>HOSPITAL I OXAPAMPA</a:t>
+                      </a:r>
+                    </a:p>
+                  </a:txBody>
+                  <a:tcPr>
+                    <a:solidFill>
+                      <a:srgbClr val="FFFFFF"/>
+                    </a:solidFill>
+                  </a:tcPr>
+                </a:tc>
+                <a:tc>
+                  <a:txBody>
+                    <a:bodyPr/>
+                    <a:lstStyle/>
+                    <a:p>
+                      <a:r>
+                        <a:rPr lang="es-PE" sz="1050">
+                          <a:latin typeface="Calibri"/>
+                        </a:rPr>
+                        <a:t>175</a:t>
+                      </a:r>
+                    </a:p>
+                  </a:txBody>
+                  <a:tcPr>
+                    <a:solidFill>
+                      <a:srgbClr val="FFFFFF"/>
+                    </a:solidFill>
+                  </a:tcPr>
+                </a:tc>
+                <a:tc>
+                  <a:txBody>
+                    <a:bodyPr/>
+                    <a:lstStyle/>
+                    <a:p>
+                      <a:r>
+                        <a:rPr lang="es-PE" sz="1050">
+                          <a:latin typeface="Calibri"/>
+                        </a:rPr>
+                        <a:t>6 h 02 min</a:t>
                       </a:r>
                     </a:p>
                   </a:txBody>
@@ -2372,45 +2372,45 @@
                         <a:rPr lang="es-PE" sz="1050">
                           <a:latin typeface="Calibri"/>
                         </a:rPr>
-                        <a:t>241</a:t>
-                      </a:r>
-                    </a:p>
-                  </a:txBody>
-                  <a:tcPr>
-                    <a:solidFill>
-                      <a:srgbClr val="EEF1F6"/>
-                    </a:solidFill>
-                  </a:tcPr>
-                </a:tc>
-                <a:tc>
-                  <a:txBody>
-                    <a:bodyPr/>
-                    <a:lstStyle/>
-                    <a:p>
-                      <a:r>
-                        <a:rPr lang="es-PE" sz="1050">
-                          <a:latin typeface="Calibri"/>
-                        </a:rPr>
-                        <a:t>HOSPITAL II PASCO</a:t>
-                      </a:r>
-                    </a:p>
-                  </a:txBody>
-                  <a:tcPr>
-                    <a:solidFill>
-                      <a:srgbClr val="EEF1F6"/>
-                    </a:solidFill>
-                  </a:tcPr>
-                </a:tc>
-                <a:tc>
-                  <a:txBody>
-                    <a:bodyPr/>
-                    <a:lstStyle/>
-                    <a:p>
-                      <a:r>
-                        <a:rPr lang="es-PE" sz="1050">
-                          <a:latin typeface="Calibri"/>
-                        </a:rPr>
-                        <a:t>HOSPITAL I OXAPAMPA</a:t>
+                        <a:t>41</a:t>
+                      </a:r>
+                    </a:p>
+                  </a:txBody>
+                  <a:tcPr>
+                    <a:solidFill>
+                      <a:srgbClr val="EEF1F6"/>
+                    </a:solidFill>
+                  </a:tcPr>
+                </a:tc>
+                <a:tc>
+                  <a:txBody>
+                    <a:bodyPr/>
+                    <a:lstStyle/>
+                    <a:p>
+                      <a:r>
+                        <a:rPr lang="es-PE" sz="1050">
+                          <a:latin typeface="Calibri"/>
+                        </a:rPr>
+                        <a:t>Hospital Regional de Ayac…</a:t>
+                      </a:r>
+                    </a:p>
+                  </a:txBody>
+                  <a:tcPr>
+                    <a:solidFill>
+                      <a:srgbClr val="EEF1F6"/>
+                    </a:solidFill>
+                  </a:tcPr>
+                </a:tc>
+                <a:tc>
+                  <a:txBody>
+                    <a:bodyPr/>
+                    <a:lstStyle/>
+                    <a:p>
+                      <a:r>
+                        <a:rPr lang="es-PE" sz="1050">
+                          <a:latin typeface="Calibri"/>
+                        </a:rPr>
+                        <a:t>HOSPITAL DE APOYO SAN FRA…</a:t>
                       </a:r>
                     </a:p>
                   </a:txBody>
@@ -2448,7 +2448,7 @@
                         <a:rPr lang="es-PE" sz="1050">
                           <a:latin typeface="Calibri"/>
                         </a:rPr>
-                        <a:t>6 h 02 min</a:t>
+                        <a:t>5 h 25 min</a:t>
                       </a:r>
                     </a:p>
                   </a:txBody>
@@ -2493,83 +2493,83 @@
                         <a:rPr lang="es-PE" sz="1050">
                           <a:latin typeface="Calibri"/>
                         </a:rPr>
-                        <a:t>41</a:t>
-                      </a:r>
-                    </a:p>
-                  </a:txBody>
-                  <a:tcPr>
-                    <a:solidFill>
-                      <a:srgbClr val="FFFFFF"/>
-                    </a:solidFill>
-                  </a:tcPr>
-                </a:tc>
-                <a:tc>
-                  <a:txBody>
-                    <a:bodyPr/>
-                    <a:lstStyle/>
-                    <a:p>
-                      <a:r>
-                        <a:rPr lang="es-PE" sz="1050">
-                          <a:latin typeface="Calibri"/>
-                        </a:rPr>
-                        <a:t>Hospital Regional de Ayac…</a:t>
-                      </a:r>
-                    </a:p>
-                  </a:txBody>
-                  <a:tcPr>
-                    <a:solidFill>
-                      <a:srgbClr val="FFFFFF"/>
-                    </a:solidFill>
-                  </a:tcPr>
-                </a:tc>
-                <a:tc>
-                  <a:txBody>
-                    <a:bodyPr/>
-                    <a:lstStyle/>
-                    <a:p>
-                      <a:r>
-                        <a:rPr lang="es-PE" sz="1050">
-                          <a:latin typeface="Calibri"/>
-                        </a:rPr>
-                        <a:t>HOSPITAL DE APOYO SAN FRA…</a:t>
-                      </a:r>
-                    </a:p>
-                  </a:txBody>
-                  <a:tcPr>
-                    <a:solidFill>
-                      <a:srgbClr val="FFFFFF"/>
-                    </a:solidFill>
-                  </a:tcPr>
-                </a:tc>
-                <a:tc>
-                  <a:txBody>
-                    <a:bodyPr/>
-                    <a:lstStyle/>
-                    <a:p>
-                      <a:r>
-                        <a:rPr lang="es-PE" sz="1050">
-                          <a:latin typeface="Calibri"/>
-                        </a:rPr>
-                        <a:t>175</a:t>
-                      </a:r>
-                    </a:p>
-                  </a:txBody>
-                  <a:tcPr>
-                    <a:solidFill>
-                      <a:srgbClr val="FFFFFF"/>
-                    </a:solidFill>
-                  </a:tcPr>
-                </a:tc>
-                <a:tc>
-                  <a:txBody>
-                    <a:bodyPr/>
-                    <a:lstStyle/>
-                    <a:p>
-                      <a:r>
-                        <a:rPr lang="es-PE" sz="1050">
-                          <a:latin typeface="Calibri"/>
-                        </a:rPr>
-                        <a:t>5 h 25 min</a:t>
+                        <a:t>51</a:t>
+                      </a:r>
+                    </a:p>
+                  </a:txBody>
+                  <a:tcPr>
+                    <a:solidFill>
+                      <a:srgbClr val="FFFFFF"/>
+                    </a:solidFill>
+                  </a:tcPr>
+                </a:tc>
+                <a:tc>
+                  <a:txBody>
+                    <a:bodyPr/>
+                    <a:lstStyle/>
+                    <a:p>
+                      <a:r>
+                        <a:rPr lang="es-PE" sz="1050">
+                          <a:latin typeface="Calibri"/>
+                        </a:rPr>
+                        <a:t>Hospital Antonio Lorena d…</a:t>
+                      </a:r>
+                    </a:p>
+                  </a:txBody>
+                  <a:tcPr>
+                    <a:solidFill>
+                      <a:srgbClr val="FFFFFF"/>
+                    </a:solidFill>
+                  </a:tcPr>
+                </a:tc>
+                <a:tc>
+                  <a:txBody>
+                    <a:bodyPr/>
+                    <a:lstStyle/>
+                    <a:p>
+                      <a:r>
+                        <a:rPr lang="es-PE" sz="1050">
+                          <a:latin typeface="Calibri"/>
+                        </a:rPr>
+                        <a:t>HOSPITAL DE SANTO TOMAS</a:t>
+                      </a:r>
+                    </a:p>
+                  </a:txBody>
+                  <a:tcPr>
+                    <a:solidFill>
+                      <a:srgbClr val="FFFFFF"/>
+                    </a:solidFill>
+                  </a:tcPr>
+                </a:tc>
+                <a:tc>
+                  <a:txBody>
+                    <a:bodyPr/>
+                    <a:lstStyle/>
+                    <a:p>
+                      <a:r>
+                        <a:rPr lang="es-PE" sz="1050">
+                          <a:latin typeface="Calibri"/>
+                        </a:rPr>
+                        <a:t>219</a:t>
+                      </a:r>
+                    </a:p>
+                  </a:txBody>
+                  <a:tcPr>
+                    <a:solidFill>
+                      <a:srgbClr val="FFFFFF"/>
+                    </a:solidFill>
+                  </a:tcPr>
+                </a:tc>
+                <a:tc>
+                  <a:txBody>
+                    <a:bodyPr/>
+                    <a:lstStyle/>
+                    <a:p>
+                      <a:r>
+                        <a:rPr lang="es-PE" sz="1050">
+                          <a:latin typeface="Calibri"/>
+                        </a:rPr>
+                        <a:t>5 h 21 min</a:t>
                       </a:r>
                     </a:p>
                   </a:txBody>
@@ -2614,83 +2614,83 @@
                         <a:rPr lang="es-PE" sz="1050">
                           <a:latin typeface="Calibri"/>
                         </a:rPr>
-                        <a:t>51</a:t>
-                      </a:r>
-                    </a:p>
-                  </a:txBody>
-                  <a:tcPr>
-                    <a:solidFill>
-                      <a:srgbClr val="EEF1F6"/>
-                    </a:solidFill>
-                  </a:tcPr>
-                </a:tc>
-                <a:tc>
-                  <a:txBody>
-                    <a:bodyPr/>
-                    <a:lstStyle/>
-                    <a:p>
-                      <a:r>
-                        <a:rPr lang="es-PE" sz="1050">
-                          <a:latin typeface="Calibri"/>
-                        </a:rPr>
-                        <a:t>Hospital Antonio Lorena d…</a:t>
-                      </a:r>
-                    </a:p>
-                  </a:txBody>
-                  <a:tcPr>
-                    <a:solidFill>
-                      <a:srgbClr val="EEF1F6"/>
-                    </a:solidFill>
-                  </a:tcPr>
-                </a:tc>
-                <a:tc>
-                  <a:txBody>
-                    <a:bodyPr/>
-                    <a:lstStyle/>
-                    <a:p>
-                      <a:r>
-                        <a:rPr lang="es-PE" sz="1050">
-                          <a:latin typeface="Calibri"/>
-                        </a:rPr>
-                        <a:t>HOSPITAL DE SANTO TOMAS</a:t>
-                      </a:r>
-                    </a:p>
-                  </a:txBody>
-                  <a:tcPr>
-                    <a:solidFill>
-                      <a:srgbClr val="EEF1F6"/>
-                    </a:solidFill>
-                  </a:tcPr>
-                </a:tc>
-                <a:tc>
-                  <a:txBody>
-                    <a:bodyPr/>
-                    <a:lstStyle/>
-                    <a:p>
-                      <a:r>
-                        <a:rPr lang="es-PE" sz="1050">
-                          <a:latin typeface="Calibri"/>
-                        </a:rPr>
-                        <a:t>219</a:t>
-                      </a:r>
-                    </a:p>
-                  </a:txBody>
-                  <a:tcPr>
-                    <a:solidFill>
-                      <a:srgbClr val="EEF1F6"/>
-                    </a:solidFill>
-                  </a:tcPr>
-                </a:tc>
-                <a:tc>
-                  <a:txBody>
-                    <a:bodyPr/>
-                    <a:lstStyle/>
-                    <a:p>
-                      <a:r>
-                        <a:rPr lang="es-PE" sz="1050">
-                          <a:latin typeface="Calibri"/>
-                        </a:rPr>
-                        <a:t>5 h 21 min</a:t>
+                        <a:t>69</a:t>
+                      </a:r>
+                    </a:p>
+                  </a:txBody>
+                  <a:tcPr>
+                    <a:solidFill>
+                      <a:srgbClr val="EEF1F6"/>
+                    </a:solidFill>
+                  </a:tcPr>
+                </a:tc>
+                <a:tc>
+                  <a:txBody>
+                    <a:bodyPr/>
+                    <a:lstStyle/>
+                    <a:p>
+                      <a:r>
+                        <a:rPr lang="es-PE" sz="1050">
+                          <a:latin typeface="Calibri"/>
+                        </a:rPr>
+                        <a:t>Hospital Regional Docente…</a:t>
+                      </a:r>
+                    </a:p>
+                  </a:txBody>
+                  <a:tcPr>
+                    <a:solidFill>
+                      <a:srgbClr val="EEF1F6"/>
+                    </a:solidFill>
+                  </a:tcPr>
+                </a:tc>
+                <a:tc>
+                  <a:txBody>
+                    <a:bodyPr/>
+                    <a:lstStyle/>
+                    <a:p>
+                      <a:r>
+                        <a:rPr lang="es-PE" sz="1050">
+                          <a:latin typeface="Calibri"/>
+                        </a:rPr>
+                        <a:t>HOSPITAL DE LIRCAY</a:t>
+                      </a:r>
+                    </a:p>
+                  </a:txBody>
+                  <a:tcPr>
+                    <a:solidFill>
+                      <a:srgbClr val="EEF1F6"/>
+                    </a:solidFill>
+                  </a:tcPr>
+                </a:tc>
+                <a:tc>
+                  <a:txBody>
+                    <a:bodyPr/>
+                    <a:lstStyle/>
+                    <a:p>
+                      <a:r>
+                        <a:rPr lang="es-PE" sz="1050">
+                          <a:latin typeface="Calibri"/>
+                        </a:rPr>
+                        <a:t>210</a:t>
+                      </a:r>
+                    </a:p>
+                  </a:txBody>
+                  <a:tcPr>
+                    <a:solidFill>
+                      <a:srgbClr val="EEF1F6"/>
+                    </a:solidFill>
+                  </a:tcPr>
+                </a:tc>
+                <a:tc>
+                  <a:txBody>
+                    <a:bodyPr/>
+                    <a:lstStyle/>
+                    <a:p>
+                      <a:r>
+                        <a:rPr lang="es-PE" sz="1050">
+                          <a:latin typeface="Calibri"/>
+                        </a:rPr>
+                        <a:t>5 h 14 min</a:t>
                       </a:r>
                     </a:p>
                   </a:txBody>
@@ -2787,7 +2787,7 @@
                 </a:solidFill>
                 <a:latin typeface="Calibri"/>
               </a:rPr>
-              <a:t>Via aerea - 17 convenios con opcion aerea (por tiempo)</a:t>
+              <a:t>Via aerea - 16 convenios con opcion aerea (por tiempo)</a:t>
             </a:r>
             <a:endParaRPr lang="es-PE" sz="2600"/>
           </a:p>
@@ -3792,7 +3792,7 @@
                         <a:rPr lang="es-PE" sz="1050">
                           <a:latin typeface="Calibri"/>
                         </a:rPr>
-                        <a:t>260</a:t>
+                        <a:t>264</a:t>
                       </a:r>
                     </a:p>
                   </a:txBody>
@@ -3868,7 +3868,7 @@
                         <a:rPr lang="es-PE" sz="1050">
                           <a:latin typeface="Calibri"/>
                         </a:rPr>
-                        <a:t>Nombre comercial: Centr…</a:t>
+                        <a:t>HOSPITAL DE RIOJA</a:t>
                       </a:r>
                     </a:p>
                   </a:txBody>
@@ -3894,7 +3894,7 @@
                         <a:rPr lang="es-PE" sz="1050">
                           <a:latin typeface="Calibri"/>
                         </a:rPr>
-                        <a:t>264</a:t>
+                        <a:t>270</a:t>
                       </a:r>
                     </a:p>
                   </a:txBody>
@@ -3970,7 +3970,7 @@
                         <a:rPr lang="es-PE" sz="1050">
                           <a:latin typeface="Calibri"/>
                         </a:rPr>
-                        <a:t>HOSPITAL DE RIOJA</a:t>
+                        <a:t>CLINICA SINAI</a:t>
                       </a:r>
                     </a:p>
                   </a:txBody>
@@ -4088,7 +4088,7 @@
                 </a:solidFill>
                 <a:latin typeface="Calibri"/>
               </a:rPr>
-              <a:t>La via aerea solo se evalua cuando origen y destino usan aeropuertos distintos con servicio comercial; por eso solo 17 de 277 convenios la tienen.</a:t>
+              <a:t>La via aerea solo se evalua cuando origen y destino usan aeropuertos distintos con servicio comercial; por eso solo 16 de 277 convenios la tienen.</a:t>
             </a:r>
             <a:endParaRPr lang="es-PE" sz="1500"/>
           </a:p>
@@ -4104,7 +4104,7 @@
                 </a:solidFill>
                 <a:latin typeface="Calibri"/>
               </a:rPr>
-              <a:t>Rutas largas reales donde el avion es la opcion sensata (el terrestre de la misma fila es varias veces mas largo): Lima-Piura (LIM-PIU, 2 h 44-2 h 48 vs 18 h 20-18 h 21 por tierra), Lima-Arequipa (LIM-AQP, 3 h 06 vs 17 h 36), Lima-Chiclayo (LIM-CIX, 2 h 39 vs 14 h 56), Trujillo-Lima (TRU-LIM, 2 h 38 vs 10 h 24).</a:t>
+              <a:t>Rutas largas reales donde el avion es la opcion sensata (el terrestre de la misma fila es varias veces mas largo): Lima-Piura (LIM-PIU, 2 h 44-2 h 48 vs 18 h 20-18 h 21 por tierra), Lima-Arequipa (LIM-AQP, 3 h 06 vs 17 h 36), Lima-Chiclayo (LIM-CIX, 2 h 39 vs 14 h 56).</a:t>
             </a:r>
             <a:endParaRPr lang="es-PE" sz="1500"/>
           </a:p>
@@ -4421,7 +4421,7 @@
                 </a:solidFill>
                 <a:latin typeface="Calibri"/>
               </a:rPr>
-              <a:t>De los 17 convenios con opcion aerea, en 5 el avion realmente reduce el tiempo puerta a puerta frente al terrestre (todos con Lima de por medio); en los demas el terrestre sigue siendo mas rapido pese a la distancia de vuelo. En los que no tienen opcion aerea el traslado es y debe seguir siendo por carretera.</a:t>
+              <a:t>De los 16 convenios con opcion aerea, en 5 el avion realmente reduce el tiempo puerta a puerta frente al terrestre (todos con Lima de por medio); en los demas el terrestre sigue siendo mas rapido pese a la distancia de vuelo. En los que no tienen opcion aerea el traslado es y debe seguir siendo por carretera.</a:t>
             </a:r>
             <a:endParaRPr lang="es-PE" sz="1500"/>
           </a:p>

--- a/datos/Resumen_tiempos_convenios_BS.pptx
+++ b/datos/Resumen_tiempos_convenios_BS.pptx
@@ -13,6 +13,7 @@
     <p:sldId id="261" r:id="rId7"/>
     <p:sldId id="262" r:id="rId8"/>
     <p:sldId id="263" r:id="rId9"/>
+    <p:sldId id="264" r:id="rId10"/>
   </p:sldIdLst>
   <p:sldSz cx="12192000" cy="6858000"/>
   <p:notesSz cx="6858000" cy="9144000"/>
@@ -804,7 +805,7 @@
                 </a:solidFill>
                 <a:latin typeface="Calibri"/>
               </a:rPr>
-              <a:t>Via terrestre - distribucion de tiempos</a:t>
+              <a:t>Via terrestre - distribucion de tiempos (sin via aerea)</a:t>
             </a:r>
             <a:endParaRPr lang="es-PE" sz="2600"/>
           </a:p>
@@ -837,13 +838,29 @@
               <a:buNone/>
             </a:pPr>
             <a:r>
+              <a:rPr lang="es-PE" sz="1300" dirty="0">
+                <a:solidFill>
+                  <a:srgbClr val="022300"/>
+                </a:solidFill>
+                <a:latin typeface="Calibri"/>
+              </a:rPr>
+              <a:t>Distribucion de los 231 convenios por tiempo de traslado terrestre, EXCLUYENDO los 16 convenios con opcion aerea util (en esos casos el traslado real conviene por aire, no por tierra):</a:t>
+            </a:r>
+            <a:endParaRPr lang="es-PE" sz="1300"/>
+          </a:p>
+          <a:p>
+            <a:pPr marL="0" lvl="0">
+              <a:buFont typeface="Arial"/>
+              <a:buChar char="•"/>
+            </a:pPr>
+            <a:r>
               <a:rPr lang="es-PE" sz="1400" dirty="0">
                 <a:solidFill>
                   <a:srgbClr val="022300"/>
                 </a:solidFill>
                 <a:latin typeface="Calibri"/>
               </a:rPr>
-              <a:t>Distribucion de los 247 convenios por tiempo de traslado terrestre (auto particular):</a:t>
+              <a:t>Hasta 1 h ............ 189</a:t>
             </a:r>
             <a:endParaRPr lang="es-PE" sz="1400"/>
           </a:p>
@@ -859,7 +876,7 @@
                 </a:solidFill>
                 <a:latin typeface="Calibri"/>
               </a:rPr>
-              <a:t>Hasta 1 h ............ 190</a:t>
+              <a:t>1 a 3 h .............. 30</a:t>
             </a:r>
             <a:endParaRPr lang="es-PE" sz="1400"/>
           </a:p>
@@ -875,23 +892,7 @@
                 </a:solidFill>
                 <a:latin typeface="Calibri"/>
               </a:rPr>
-              <a:t>1 a 3 h .............. 37</a:t>
-            </a:r>
-            <a:endParaRPr lang="es-PE" sz="1400"/>
-          </a:p>
-          <a:p>
-            <a:pPr marL="0" lvl="0">
-              <a:buFont typeface="Arial"/>
-              <a:buChar char="•"/>
-            </a:pPr>
-            <a:r>
-              <a:rPr lang="es-PE" sz="1400" dirty="0">
-                <a:solidFill>
-                  <a:srgbClr val="022300"/>
-                </a:solidFill>
-                <a:latin typeface="Calibri"/>
-              </a:rPr>
-              <a:t>3 a 6 h .............. 11</a:t>
+              <a:t>3 a 6 h .............. 7</a:t>
             </a:r>
             <a:endParaRPr lang="es-PE" sz="1400"/>
           </a:p>
@@ -923,7 +924,7 @@
                 </a:solidFill>
                 <a:latin typeface="Calibri"/>
               </a:rPr>
-              <a:t>12 a 24 h ............ 4</a:t>
+              <a:t>12 a 24 h ............ 0</a:t>
             </a:r>
             <a:endParaRPr lang="es-PE" sz="1400"/>
           </a:p>
@@ -948,13 +949,13 @@
               <a:buNone/>
             </a:pPr>
             <a:r>
-              <a:rPr lang="es-PE" sz="1300" dirty="0">
+              <a:rPr lang="es-PE" sz="1300" b="1" dirty="0">
                 <a:solidFill>
                   <a:srgbClr val="7A8699"/>
                 </a:solidFill>
                 <a:latin typeface="Calibri"/>
               </a:rPr>
-              <a:t>Conjunto completo (247 convenios): mediana 0 h 26 min, media 1 h 12 min.</a:t>
+              <a:t>Sin via aerea (231 convenios): mediana 0 h 24 min, media 0 h 50 min, desviacion estandar 1 h 12 min.</a:t>
             </a:r>
             <a:endParaRPr lang="es-PE" sz="1300"/>
           </a:p>
@@ -969,7 +970,7 @@
                 </a:solidFill>
                 <a:latin typeface="Calibri"/>
               </a:rPr>
-              <a:t>IPRESS con traslado terrestre mayor a 1 h: 57 convenios (23 % del total).</a:t>
+              <a:t>IPRESS con traslado terrestre mayor a 1 h: 42 convenios (18 % del subconjunto sin via aerea).</a:t>
             </a:r>
             <a:endParaRPr lang="es-PE" sz="1500"/>
           </a:p>
@@ -985,7 +986,7 @@
                 </a:solidFill>
                 <a:latin typeface="Calibri"/>
               </a:rPr>
-              <a:t>En ese grupo la mediana del tiempo de ruta es 2 h 28 min y la media es 3 h 55 min.</a:t>
+              <a:t>En ese grupo la mediana del tiempo de ruta es 2 h 16 min y la media es 2 h 51 min.</a:t>
             </a:r>
             <a:endParaRPr lang="es-PE" sz="1500"/>
           </a:p>
@@ -1000,7 +1001,7 @@
                 </a:solidFill>
                 <a:latin typeface="Calibri"/>
               </a:rPr>
-              <a:t>La media es mayor que la mediana porque unos pocos convenios inter-regionales de sierra y selva (12 h a 2 dias) elevan el promedio; para la mitad del grupo el traslado sigue por debajo de 2 h 28 min.</a:t>
+              <a:t>La media es mayor que la mediana porque unos pocos convenios de sierra (Cusco, Ayacucho) elevan el promedio; para la mitad del grupo el traslado sigue por debajo de 2 h 16 min. Ver el detalle punto a punto y las bandas de desviacion estandar en el anexo (ultima diapositiva).</a:t>
             </a:r>
             <a:endParaRPr lang="es-PE" sz="1200"/>
           </a:p>
@@ -4451,6 +4452,94 @@
 </p:sld>
 </file>
 
+<file path=ppt/slides/slide9.xml><?xml version="1.0" encoding="utf-8"?>
+<p:sld xmlns:a="http://schemas.openxmlformats.org/drawingml/2006/main" xmlns:r="http://schemas.openxmlformats.org/officeDocument/2006/relationships" xmlns:p="http://schemas.openxmlformats.org/presentationml/2006/main">
+  <p:cSld>
+    <p:spTree>
+      <p:nvGrpSpPr>
+        <p:cNvPr id="1" name=""/>
+        <p:cNvGrpSpPr/>
+        <p:nvPr/>
+      </p:nvGrpSpPr>
+      <p:grpSpPr>
+        <a:xfrm>
+          <a:off x="0" y="0"/>
+          <a:ext cx="0" cy="0"/>
+          <a:chOff x="0" y="0"/>
+          <a:chExt cx="0" cy="0"/>
+        </a:xfrm>
+      </p:grpSpPr>
+      <p:sp>
+        <p:nvSpPr>
+          <p:cNvPr id="171" name="Titulo"/>
+          <p:cNvSpPr>
+            <a:spLocks noGrp="1"/>
+          </p:cNvSpPr>
+          <p:nvPr/>
+        </p:nvSpPr>
+        <p:spPr>
+          <a:xfrm>
+            <a:off x="640000" y="360000"/>
+            <a:ext cx="10900000" cy="900000"/>
+          </a:xfrm>
+          <a:prstGeom prst="rect">
+            <a:avLst/>
+          </a:prstGeom>
+        </p:spPr>
+        <p:txBody>
+          <a:bodyPr wrap="square" rtlCol="0">
+            <a:normAutofit/>
+          </a:bodyPr>
+          <a:lstStyle/>
+          <a:p>
+            <a:pPr marL="0" lvl="0">
+              <a:buNone/>
+            </a:pPr>
+            <a:r>
+              <a:rPr lang="es-PE" sz="2600" b="1" dirty="0">
+                <a:solidFill>
+                  <a:srgbClr val="1F2A44"/>
+                </a:solidFill>
+                <a:latin typeface="Calibri"/>
+              </a:rPr>
+              <a:t>Anexo - dispersion de tiempos y desviacion estandar (sin via aerea)</a:t>
+            </a:r>
+            <a:endParaRPr lang="es-PE" sz="2600"/>
+          </a:p>
+        </p:txBody>
+      </p:sp>
+      <p:pic>
+        <p:nvPicPr>
+          <p:cNvPr id="91" name="Chart"/>
+          <p:cNvPicPr>
+            <a:picLocks noChangeAspect="1"/>
+          </p:cNvPicPr>
+          <p:nvPr/>
+        </p:nvPicPr>
+        <p:blipFill>
+          <a:blip r:embed="rId2"/>
+          <a:stretch>
+            <a:fillRect/>
+          </a:stretch>
+        </p:blipFill>
+        <p:spPr>
+          <a:xfrm>
+            <a:off x="1071000" y="1330000"/>
+            <a:ext cx="10050000" cy="5653125"/>
+          </a:xfrm>
+          <a:prstGeom prst="rect">
+            <a:avLst/>
+          </a:prstGeom>
+        </p:spPr>
+      </p:pic>
+    </p:spTree>
+  </p:cSld>
+  <p:clrMapOvr>
+    <a:overrideClrMapping bg1="lt1" tx1="dk1" bg2="lt2" tx2="dk2" accent1="accent1" accent2="accent2" accent3="accent3" accent4="accent4" accent5="accent5" accent6="accent6" hlink="hlink" folHlink="folHlink"/>
+  </p:clrMapOvr>
+</p:sld>
+</file>
+
 <file path=ppt/theme/theme1.xml><?xml version="1.0" encoding="utf-8"?>
 <a:theme xmlns:a="http://schemas.openxmlformats.org/drawingml/2006/main" name="Office">
   <a:themeElements>

--- a/datos/Resumen_tiempos_convenios_BS.pptx
+++ b/datos/Resumen_tiempos_convenios_BS.pptx
@@ -955,7 +955,7 @@
                 </a:solidFill>
                 <a:latin typeface="Calibri"/>
               </a:rPr>
-              <a:t>Sin via aerea (231 convenios): mediana 0 h 24 min, media 0 h 50 min, desviacion estandar 1 h 12 min.</a:t>
+              <a:t>Sin via aerea (231 convenios): mediana 24 min, media 50 min, desviacion estandar 72 min.</a:t>
             </a:r>
             <a:endParaRPr lang="es-PE" sz="1300"/>
           </a:p>
@@ -986,7 +986,7 @@
                 </a:solidFill>
                 <a:latin typeface="Calibri"/>
               </a:rPr>
-              <a:t>En ese grupo la mediana del tiempo de ruta es 2 h 16 min y la media es 2 h 51 min.</a:t>
+              <a:t>En ese grupo la mediana del tiempo de ruta es 136 min y la media es 171 min.</a:t>
             </a:r>
             <a:endParaRPr lang="es-PE" sz="1500"/>
           </a:p>
@@ -1001,7 +1001,7 @@
                 </a:solidFill>
                 <a:latin typeface="Calibri"/>
               </a:rPr>
-              <a:t>La media es mayor que la mediana porque unos pocos convenios de sierra (Cusco, Ayacucho) elevan el promedio; para la mitad del grupo el traslado sigue por debajo de 2 h 16 min. Ver el detalle punto a punto y las bandas de desviacion estandar en el anexo (ultima diapositiva).</a:t>
+              <a:t>La media es mayor que la mediana porque unos pocos convenios de sierra (Cusco, Ayacucho) elevan el promedio; para la mitad del grupo el traslado sigue por debajo de 136 min. Ver el detalle punto a punto y las bandas de desviacion estandar en el anexo (ultima diapositiva).</a:t>
             </a:r>
             <a:endParaRPr lang="es-PE" sz="1200"/>
           </a:p>
